--- a/presentation_ml_final/LANL_ML_Final_Project_Presentation.pptx
+++ b/presentation_ml_final/LANL_ML_Final_Project_Presentation.pptx
@@ -5,20 +5,22 @@
     <p:sldMasterId id="2147483648" r:id="rId1"/>
   </p:sldMasterIdLst>
   <p:sldIdLst>
-    <p:sldId id="256" r:id="rId7"/>
-    <p:sldId id="257" r:id="rId8"/>
-    <p:sldId id="258" r:id="rId9"/>
-    <p:sldId id="259" r:id="rId10"/>
-    <p:sldId id="260" r:id="rId11"/>
-    <p:sldId id="261" r:id="rId12"/>
-    <p:sldId id="262" r:id="rId13"/>
-    <p:sldId id="263" r:id="rId14"/>
-    <p:sldId id="264" r:id="rId15"/>
-    <p:sldId id="265" r:id="rId16"/>
-    <p:sldId id="266" r:id="rId17"/>
-    <p:sldId id="267" r:id="rId18"/>
+    <p:sldId id="256" r:id="rId2"/>
+    <p:sldId id="257" r:id="rId3"/>
+    <p:sldId id="258" r:id="rId4"/>
+    <p:sldId id="259" r:id="rId5"/>
+    <p:sldId id="260" r:id="rId6"/>
+    <p:sldId id="261" r:id="rId7"/>
+    <p:sldId id="262" r:id="rId8"/>
+    <p:sldId id="263" r:id="rId9"/>
+    <p:sldId id="264" r:id="rId10"/>
+    <p:sldId id="268" r:id="rId11"/>
+    <p:sldId id="269" r:id="rId12"/>
+    <p:sldId id="265" r:id="rId13"/>
+    <p:sldId id="266" r:id="rId14"/>
+    <p:sldId id="267" r:id="rId15"/>
   </p:sldIdLst>
-  <p:sldSz cx="12188952" cy="6858000" type="screen4x3"/>
+  <p:sldSz cx="12188825" cy="6858000"/>
   <p:notesSz cx="6858000" cy="9144000"/>
   <p:defaultTextStyle>
     <a:defPPr>
@@ -115,6 +117,22 @@
       </a:defRPr>
     </a:lvl9pPr>
   </p:defaultTextStyle>
+  <p:extLst>
+    <p:ext uri="{EFAFB233-063F-42B5-8137-9DF3F51BA10A}">
+      <p15:sldGuideLst xmlns:p15="http://schemas.microsoft.com/office/powerpoint/2012/main">
+        <p15:guide id="1" orient="horz" pos="2160">
+          <p15:clr>
+            <a:srgbClr val="A4A3A4"/>
+          </p15:clr>
+        </p15:guide>
+        <p15:guide id="2" pos="2880">
+          <p15:clr>
+            <a:srgbClr val="A4A3A4"/>
+          </p15:clr>
+        </p15:guide>
+      </p15:sldGuideLst>
+    </p:ext>
+  </p:extLst>
 </p:presentation>
 </file>
 
@@ -156,10 +174,9 @@
           <a:lstStyle/>
           <a:p>
             <a:r>
-              <a:rPr lang="en-US" smtClean="0"/>
+              <a:rPr lang="en-US"/>
               <a:t>Click to edit Master title style</a:t>
             </a:r>
-            <a:endParaRPr lang="en-US"/>
           </a:p>
         </p:txBody>
       </p:sp>
@@ -275,10 +292,9 @@
           </a:lstStyle>
           <a:p>
             <a:r>
-              <a:rPr lang="en-US" smtClean="0"/>
+              <a:rPr lang="en-US"/>
               <a:t>Click to edit Master subtitle style</a:t>
             </a:r>
-            <a:endParaRPr lang="en-US"/>
           </a:p>
         </p:txBody>
       </p:sp>
@@ -299,7 +315,7 @@
           <a:p>
             <a:fld id="{5BCAD085-E8A6-8845-BD4E-CB4CCA059FC4}" type="datetimeFigureOut">
               <a:rPr lang="en-US" smtClean="0"/>
-              <a:t>1/27/13</a:t>
+              <a:t>5/13/2026</a:t>
             </a:fld>
             <a:endParaRPr lang="en-US"/>
           </a:p>
@@ -393,10 +409,9 @@
           <a:lstStyle/>
           <a:p>
             <a:r>
-              <a:rPr lang="en-US" smtClean="0"/>
+              <a:rPr lang="en-US"/>
               <a:t>Click to edit Master title style</a:t>
             </a:r>
-            <a:endParaRPr lang="en-US"/>
           </a:p>
         </p:txBody>
       </p:sp>
@@ -417,38 +432,37 @@
           <a:p>
             <a:pPr lvl="0"/>
             <a:r>
-              <a:rPr lang="en-US" smtClean="0"/>
+              <a:rPr lang="en-US"/>
               <a:t>Click to edit Master text styles</a:t>
             </a:r>
           </a:p>
           <a:p>
             <a:pPr lvl="1"/>
             <a:r>
-              <a:rPr lang="en-US" smtClean="0"/>
+              <a:rPr lang="en-US"/>
               <a:t>Second level</a:t>
             </a:r>
           </a:p>
           <a:p>
             <a:pPr lvl="2"/>
             <a:r>
-              <a:rPr lang="en-US" smtClean="0"/>
+              <a:rPr lang="en-US"/>
               <a:t>Third level</a:t>
             </a:r>
           </a:p>
           <a:p>
             <a:pPr lvl="3"/>
             <a:r>
-              <a:rPr lang="en-US" smtClean="0"/>
+              <a:rPr lang="en-US"/>
               <a:t>Fourth level</a:t>
             </a:r>
           </a:p>
           <a:p>
             <a:pPr lvl="4"/>
             <a:r>
-              <a:rPr lang="en-US" smtClean="0"/>
+              <a:rPr lang="en-US"/>
               <a:t>Fifth level</a:t>
             </a:r>
-            <a:endParaRPr lang="en-US"/>
           </a:p>
         </p:txBody>
       </p:sp>
@@ -469,7 +483,7 @@
           <a:p>
             <a:fld id="{5BCAD085-E8A6-8845-BD4E-CB4CCA059FC4}" type="datetimeFigureOut">
               <a:rPr lang="en-US" smtClean="0"/>
-              <a:t>1/27/13</a:t>
+              <a:t>5/13/2026</a:t>
             </a:fld>
             <a:endParaRPr lang="en-US"/>
           </a:p>
@@ -568,10 +582,9 @@
           <a:lstStyle/>
           <a:p>
             <a:r>
-              <a:rPr lang="en-US" smtClean="0"/>
+              <a:rPr lang="en-US"/>
               <a:t>Click to edit Master title style</a:t>
             </a:r>
-            <a:endParaRPr lang="en-US"/>
           </a:p>
         </p:txBody>
       </p:sp>
@@ -597,38 +610,37 @@
           <a:p>
             <a:pPr lvl="0"/>
             <a:r>
-              <a:rPr lang="en-US" smtClean="0"/>
+              <a:rPr lang="en-US"/>
               <a:t>Click to edit Master text styles</a:t>
             </a:r>
           </a:p>
           <a:p>
             <a:pPr lvl="1"/>
             <a:r>
-              <a:rPr lang="en-US" smtClean="0"/>
+              <a:rPr lang="en-US"/>
               <a:t>Second level</a:t>
             </a:r>
           </a:p>
           <a:p>
             <a:pPr lvl="2"/>
             <a:r>
-              <a:rPr lang="en-US" smtClean="0"/>
+              <a:rPr lang="en-US"/>
               <a:t>Third level</a:t>
             </a:r>
           </a:p>
           <a:p>
             <a:pPr lvl="3"/>
             <a:r>
-              <a:rPr lang="en-US" smtClean="0"/>
+              <a:rPr lang="en-US"/>
               <a:t>Fourth level</a:t>
             </a:r>
           </a:p>
           <a:p>
             <a:pPr lvl="4"/>
             <a:r>
-              <a:rPr lang="en-US" smtClean="0"/>
+              <a:rPr lang="en-US"/>
               <a:t>Fifth level</a:t>
             </a:r>
-            <a:endParaRPr lang="en-US"/>
           </a:p>
         </p:txBody>
       </p:sp>
@@ -649,7 +661,7 @@
           <a:p>
             <a:fld id="{5BCAD085-E8A6-8845-BD4E-CB4CCA059FC4}" type="datetimeFigureOut">
               <a:rPr lang="en-US" smtClean="0"/>
-              <a:t>1/27/13</a:t>
+              <a:t>5/13/2026</a:t>
             </a:fld>
             <a:endParaRPr lang="en-US"/>
           </a:p>
@@ -743,10 +755,9 @@
           <a:lstStyle/>
           <a:p>
             <a:r>
-              <a:rPr lang="en-US" smtClean="0"/>
+              <a:rPr lang="en-US"/>
               <a:t>Click to edit Master title style</a:t>
             </a:r>
-            <a:endParaRPr lang="en-US"/>
           </a:p>
         </p:txBody>
       </p:sp>
@@ -767,38 +778,37 @@
           <a:p>
             <a:pPr lvl="0"/>
             <a:r>
-              <a:rPr lang="en-US" smtClean="0"/>
+              <a:rPr lang="en-US"/>
               <a:t>Click to edit Master text styles</a:t>
             </a:r>
           </a:p>
           <a:p>
             <a:pPr lvl="1"/>
             <a:r>
-              <a:rPr lang="en-US" smtClean="0"/>
+              <a:rPr lang="en-US"/>
               <a:t>Second level</a:t>
             </a:r>
           </a:p>
           <a:p>
             <a:pPr lvl="2"/>
             <a:r>
-              <a:rPr lang="en-US" smtClean="0"/>
+              <a:rPr lang="en-US"/>
               <a:t>Third level</a:t>
             </a:r>
           </a:p>
           <a:p>
             <a:pPr lvl="3"/>
             <a:r>
-              <a:rPr lang="en-US" smtClean="0"/>
+              <a:rPr lang="en-US"/>
               <a:t>Fourth level</a:t>
             </a:r>
           </a:p>
           <a:p>
             <a:pPr lvl="4"/>
             <a:r>
-              <a:rPr lang="en-US" smtClean="0"/>
+              <a:rPr lang="en-US"/>
               <a:t>Fifth level</a:t>
             </a:r>
-            <a:endParaRPr lang="en-US"/>
           </a:p>
         </p:txBody>
       </p:sp>
@@ -819,7 +829,7 @@
           <a:p>
             <a:fld id="{5BCAD085-E8A6-8845-BD4E-CB4CCA059FC4}" type="datetimeFigureOut">
               <a:rPr lang="en-US" smtClean="0"/>
-              <a:t>1/27/13</a:t>
+              <a:t>5/13/2026</a:t>
             </a:fld>
             <a:endParaRPr lang="en-US"/>
           </a:p>
@@ -922,10 +932,9 @@
           </a:lstStyle>
           <a:p>
             <a:r>
-              <a:rPr lang="en-US" smtClean="0"/>
+              <a:rPr lang="en-US"/>
               <a:t>Click to edit Master title style</a:t>
             </a:r>
-            <a:endParaRPr lang="en-US"/>
           </a:p>
         </p:txBody>
       </p:sp>
@@ -1042,7 +1051,7 @@
           <a:p>
             <a:pPr lvl="0"/>
             <a:r>
-              <a:rPr lang="en-US" smtClean="0"/>
+              <a:rPr lang="en-US"/>
               <a:t>Click to edit Master text styles</a:t>
             </a:r>
           </a:p>
@@ -1065,7 +1074,7 @@
           <a:p>
             <a:fld id="{5BCAD085-E8A6-8845-BD4E-CB4CCA059FC4}" type="datetimeFigureOut">
               <a:rPr lang="en-US" smtClean="0"/>
-              <a:t>1/27/13</a:t>
+              <a:t>5/13/2026</a:t>
             </a:fld>
             <a:endParaRPr lang="en-US"/>
           </a:p>
@@ -1159,10 +1168,9 @@
           <a:lstStyle/>
           <a:p>
             <a:r>
-              <a:rPr lang="en-US" smtClean="0"/>
+              <a:rPr lang="en-US"/>
               <a:t>Click to edit Master title style</a:t>
             </a:r>
-            <a:endParaRPr lang="en-US"/>
           </a:p>
         </p:txBody>
       </p:sp>
@@ -1216,38 +1224,37 @@
           <a:p>
             <a:pPr lvl="0"/>
             <a:r>
-              <a:rPr lang="en-US" smtClean="0"/>
+              <a:rPr lang="en-US"/>
               <a:t>Click to edit Master text styles</a:t>
             </a:r>
           </a:p>
           <a:p>
             <a:pPr lvl="1"/>
             <a:r>
-              <a:rPr lang="en-US" smtClean="0"/>
+              <a:rPr lang="en-US"/>
               <a:t>Second level</a:t>
             </a:r>
           </a:p>
           <a:p>
             <a:pPr lvl="2"/>
             <a:r>
-              <a:rPr lang="en-US" smtClean="0"/>
+              <a:rPr lang="en-US"/>
               <a:t>Third level</a:t>
             </a:r>
           </a:p>
           <a:p>
             <a:pPr lvl="3"/>
             <a:r>
-              <a:rPr lang="en-US" smtClean="0"/>
+              <a:rPr lang="en-US"/>
               <a:t>Fourth level</a:t>
             </a:r>
           </a:p>
           <a:p>
             <a:pPr lvl="4"/>
             <a:r>
-              <a:rPr lang="en-US" smtClean="0"/>
+              <a:rPr lang="en-US"/>
               <a:t>Fifth level</a:t>
             </a:r>
-            <a:endParaRPr lang="en-US"/>
           </a:p>
         </p:txBody>
       </p:sp>
@@ -1301,38 +1308,37 @@
           <a:p>
             <a:pPr lvl="0"/>
             <a:r>
-              <a:rPr lang="en-US" smtClean="0"/>
+              <a:rPr lang="en-US"/>
               <a:t>Click to edit Master text styles</a:t>
             </a:r>
           </a:p>
           <a:p>
             <a:pPr lvl="1"/>
             <a:r>
-              <a:rPr lang="en-US" smtClean="0"/>
+              <a:rPr lang="en-US"/>
               <a:t>Second level</a:t>
             </a:r>
           </a:p>
           <a:p>
             <a:pPr lvl="2"/>
             <a:r>
-              <a:rPr lang="en-US" smtClean="0"/>
+              <a:rPr lang="en-US"/>
               <a:t>Third level</a:t>
             </a:r>
           </a:p>
           <a:p>
             <a:pPr lvl="3"/>
             <a:r>
-              <a:rPr lang="en-US" smtClean="0"/>
+              <a:rPr lang="en-US"/>
               <a:t>Fourth level</a:t>
             </a:r>
           </a:p>
           <a:p>
             <a:pPr lvl="4"/>
             <a:r>
-              <a:rPr lang="en-US" smtClean="0"/>
+              <a:rPr lang="en-US"/>
               <a:t>Fifth level</a:t>
             </a:r>
-            <a:endParaRPr lang="en-US"/>
           </a:p>
         </p:txBody>
       </p:sp>
@@ -1353,7 +1359,7 @@
           <a:p>
             <a:fld id="{5BCAD085-E8A6-8845-BD4E-CB4CCA059FC4}" type="datetimeFigureOut">
               <a:rPr lang="en-US" smtClean="0"/>
-              <a:t>1/27/13</a:t>
+              <a:t>5/13/2026</a:t>
             </a:fld>
             <a:endParaRPr lang="en-US"/>
           </a:p>
@@ -1451,10 +1457,9 @@
           </a:lstStyle>
           <a:p>
             <a:r>
-              <a:rPr lang="en-US" smtClean="0"/>
+              <a:rPr lang="en-US"/>
               <a:t>Click to edit Master title style</a:t>
             </a:r>
-            <a:endParaRPr lang="en-US"/>
           </a:p>
         </p:txBody>
       </p:sp>
@@ -1517,7 +1522,7 @@
           <a:p>
             <a:pPr lvl="0"/>
             <a:r>
-              <a:rPr lang="en-US" smtClean="0"/>
+              <a:rPr lang="en-US"/>
               <a:t>Click to edit Master text styles</a:t>
             </a:r>
           </a:p>
@@ -1573,38 +1578,37 @@
           <a:p>
             <a:pPr lvl="0"/>
             <a:r>
-              <a:rPr lang="en-US" smtClean="0"/>
+              <a:rPr lang="en-US"/>
               <a:t>Click to edit Master text styles</a:t>
             </a:r>
           </a:p>
           <a:p>
             <a:pPr lvl="1"/>
             <a:r>
-              <a:rPr lang="en-US" smtClean="0"/>
+              <a:rPr lang="en-US"/>
               <a:t>Second level</a:t>
             </a:r>
           </a:p>
           <a:p>
             <a:pPr lvl="2"/>
             <a:r>
-              <a:rPr lang="en-US" smtClean="0"/>
+              <a:rPr lang="en-US"/>
               <a:t>Third level</a:t>
             </a:r>
           </a:p>
           <a:p>
             <a:pPr lvl="3"/>
             <a:r>
-              <a:rPr lang="en-US" smtClean="0"/>
+              <a:rPr lang="en-US"/>
               <a:t>Fourth level</a:t>
             </a:r>
           </a:p>
           <a:p>
             <a:pPr lvl="4"/>
             <a:r>
-              <a:rPr lang="en-US" smtClean="0"/>
+              <a:rPr lang="en-US"/>
               <a:t>Fifth level</a:t>
             </a:r>
-            <a:endParaRPr lang="en-US"/>
           </a:p>
         </p:txBody>
       </p:sp>
@@ -1667,7 +1671,7 @@
           <a:p>
             <a:pPr lvl="0"/>
             <a:r>
-              <a:rPr lang="en-US" smtClean="0"/>
+              <a:rPr lang="en-US"/>
               <a:t>Click to edit Master text styles</a:t>
             </a:r>
           </a:p>
@@ -1723,38 +1727,37 @@
           <a:p>
             <a:pPr lvl="0"/>
             <a:r>
-              <a:rPr lang="en-US" smtClean="0"/>
+              <a:rPr lang="en-US"/>
               <a:t>Click to edit Master text styles</a:t>
             </a:r>
           </a:p>
           <a:p>
             <a:pPr lvl="1"/>
             <a:r>
-              <a:rPr lang="en-US" smtClean="0"/>
+              <a:rPr lang="en-US"/>
               <a:t>Second level</a:t>
             </a:r>
           </a:p>
           <a:p>
             <a:pPr lvl="2"/>
             <a:r>
-              <a:rPr lang="en-US" smtClean="0"/>
+              <a:rPr lang="en-US"/>
               <a:t>Third level</a:t>
             </a:r>
           </a:p>
           <a:p>
             <a:pPr lvl="3"/>
             <a:r>
-              <a:rPr lang="en-US" smtClean="0"/>
+              <a:rPr lang="en-US"/>
               <a:t>Fourth level</a:t>
             </a:r>
           </a:p>
           <a:p>
             <a:pPr lvl="4"/>
             <a:r>
-              <a:rPr lang="en-US" smtClean="0"/>
+              <a:rPr lang="en-US"/>
               <a:t>Fifth level</a:t>
             </a:r>
-            <a:endParaRPr lang="en-US"/>
           </a:p>
         </p:txBody>
       </p:sp>
@@ -1775,7 +1778,7 @@
           <a:p>
             <a:fld id="{5BCAD085-E8A6-8845-BD4E-CB4CCA059FC4}" type="datetimeFigureOut">
               <a:rPr lang="en-US" smtClean="0"/>
-              <a:t>1/27/13</a:t>
+              <a:t>5/13/2026</a:t>
             </a:fld>
             <a:endParaRPr lang="en-US"/>
           </a:p>
@@ -1869,10 +1872,9 @@
           <a:lstStyle/>
           <a:p>
             <a:r>
-              <a:rPr lang="en-US" smtClean="0"/>
+              <a:rPr lang="en-US"/>
               <a:t>Click to edit Master title style</a:t>
             </a:r>
-            <a:endParaRPr lang="en-US"/>
           </a:p>
         </p:txBody>
       </p:sp>
@@ -1893,7 +1895,7 @@
           <a:p>
             <a:fld id="{5BCAD085-E8A6-8845-BD4E-CB4CCA059FC4}" type="datetimeFigureOut">
               <a:rPr lang="en-US" smtClean="0"/>
-              <a:t>1/27/13</a:t>
+              <a:t>5/13/2026</a:t>
             </a:fld>
             <a:endParaRPr lang="en-US"/>
           </a:p>
@@ -1988,7 +1990,7 @@
           <a:p>
             <a:fld id="{5BCAD085-E8A6-8845-BD4E-CB4CCA059FC4}" type="datetimeFigureOut">
               <a:rPr lang="en-US" smtClean="0"/>
-              <a:t>1/27/13</a:t>
+              <a:t>5/13/2026</a:t>
             </a:fld>
             <a:endParaRPr lang="en-US"/>
           </a:p>
@@ -2091,10 +2093,9 @@
           </a:lstStyle>
           <a:p>
             <a:r>
-              <a:rPr lang="en-US" smtClean="0"/>
+              <a:rPr lang="en-US"/>
               <a:t>Click to edit Master title style</a:t>
             </a:r>
-            <a:endParaRPr lang="en-US"/>
           </a:p>
         </p:txBody>
       </p:sp>
@@ -2148,38 +2149,37 @@
           <a:p>
             <a:pPr lvl="0"/>
             <a:r>
-              <a:rPr lang="en-US" smtClean="0"/>
+              <a:rPr lang="en-US"/>
               <a:t>Click to edit Master text styles</a:t>
             </a:r>
           </a:p>
           <a:p>
             <a:pPr lvl="1"/>
             <a:r>
-              <a:rPr lang="en-US" smtClean="0"/>
+              <a:rPr lang="en-US"/>
               <a:t>Second level</a:t>
             </a:r>
           </a:p>
           <a:p>
             <a:pPr lvl="2"/>
             <a:r>
-              <a:rPr lang="en-US" smtClean="0"/>
+              <a:rPr lang="en-US"/>
               <a:t>Third level</a:t>
             </a:r>
           </a:p>
           <a:p>
             <a:pPr lvl="3"/>
             <a:r>
-              <a:rPr lang="en-US" smtClean="0"/>
+              <a:rPr lang="en-US"/>
               <a:t>Fourth level</a:t>
             </a:r>
           </a:p>
           <a:p>
             <a:pPr lvl="4"/>
             <a:r>
-              <a:rPr lang="en-US" smtClean="0"/>
+              <a:rPr lang="en-US"/>
               <a:t>Fifth level</a:t>
             </a:r>
-            <a:endParaRPr lang="en-US"/>
           </a:p>
         </p:txBody>
       </p:sp>
@@ -2242,7 +2242,7 @@
           <a:p>
             <a:pPr lvl="0"/>
             <a:r>
-              <a:rPr lang="en-US" smtClean="0"/>
+              <a:rPr lang="en-US"/>
               <a:t>Click to edit Master text styles</a:t>
             </a:r>
           </a:p>
@@ -2265,7 +2265,7 @@
           <a:p>
             <a:fld id="{5BCAD085-E8A6-8845-BD4E-CB4CCA059FC4}" type="datetimeFigureOut">
               <a:rPr lang="en-US" smtClean="0"/>
-              <a:t>1/27/13</a:t>
+              <a:t>5/13/2026</a:t>
             </a:fld>
             <a:endParaRPr lang="en-US"/>
           </a:p>
@@ -2368,10 +2368,9 @@
           </a:lstStyle>
           <a:p>
             <a:r>
-              <a:rPr lang="en-US" smtClean="0"/>
+              <a:rPr lang="en-US"/>
               <a:t>Click to edit Master title style</a:t>
             </a:r>
-            <a:endParaRPr lang="en-US"/>
           </a:p>
         </p:txBody>
       </p:sp>
@@ -2495,7 +2494,7 @@
           <a:p>
             <a:pPr lvl="0"/>
             <a:r>
-              <a:rPr lang="en-US" smtClean="0"/>
+              <a:rPr lang="en-US"/>
               <a:t>Click to edit Master text styles</a:t>
             </a:r>
           </a:p>
@@ -2518,7 +2517,7 @@
           <a:p>
             <a:fld id="{5BCAD085-E8A6-8845-BD4E-CB4CCA059FC4}" type="datetimeFigureOut">
               <a:rPr lang="en-US" smtClean="0"/>
-              <a:t>1/27/13</a:t>
+              <a:t>5/13/2026</a:t>
             </a:fld>
             <a:endParaRPr lang="en-US"/>
           </a:p>
@@ -2583,9 +2582,12 @@
 <p:sldMaster xmlns:a="http://schemas.openxmlformats.org/drawingml/2006/main" xmlns:r="http://schemas.openxmlformats.org/officeDocument/2006/relationships" xmlns:p="http://schemas.openxmlformats.org/presentationml/2006/main">
   <p:cSld>
     <p:bg>
-      <p:bgRef idx="1001">
-        <a:schemeClr val="bg1"/>
-      </p:bgRef>
+      <p:bgPr>
+        <a:solidFill>
+          <a:srgbClr val="0D1117"/>
+        </a:solidFill>
+        <a:effectLst/>
+      </p:bgPr>
     </p:bg>
     <p:spTree>
       <p:nvGrpSpPr>
@@ -2627,10 +2629,9 @@
           <a:lstStyle/>
           <a:p>
             <a:r>
-              <a:rPr lang="en-US" smtClean="0"/>
+              <a:rPr lang="en-US"/>
               <a:t>Click to edit Master title style</a:t>
             </a:r>
-            <a:endParaRPr lang="en-US"/>
           </a:p>
         </p:txBody>
       </p:sp>
@@ -2661,38 +2662,37 @@
           <a:p>
             <a:pPr lvl="0"/>
             <a:r>
-              <a:rPr lang="en-US" smtClean="0"/>
+              <a:rPr lang="en-US"/>
               <a:t>Click to edit Master text styles</a:t>
             </a:r>
           </a:p>
           <a:p>
             <a:pPr lvl="1"/>
             <a:r>
-              <a:rPr lang="en-US" smtClean="0"/>
+              <a:rPr lang="en-US"/>
               <a:t>Second level</a:t>
             </a:r>
           </a:p>
           <a:p>
             <a:pPr lvl="2"/>
             <a:r>
-              <a:rPr lang="en-US" smtClean="0"/>
+              <a:rPr lang="en-US"/>
               <a:t>Third level</a:t>
             </a:r>
           </a:p>
           <a:p>
             <a:pPr lvl="3"/>
             <a:r>
-              <a:rPr lang="en-US" smtClean="0"/>
+              <a:rPr lang="en-US"/>
               <a:t>Fourth level</a:t>
             </a:r>
           </a:p>
           <a:p>
             <a:pPr lvl="4"/>
             <a:r>
-              <a:rPr lang="en-US" smtClean="0"/>
+              <a:rPr lang="en-US"/>
               <a:t>Fifth level</a:t>
             </a:r>
-            <a:endParaRPr lang="en-US"/>
           </a:p>
         </p:txBody>
       </p:sp>
@@ -2731,7 +2731,7 @@
           <a:p>
             <a:fld id="{5BCAD085-E8A6-8845-BD4E-CB4CCA059FC4}" type="datetimeFigureOut">
               <a:rPr lang="en-US" smtClean="0"/>
-              <a:t>1/27/13</a:t>
+              <a:t>5/13/2026</a:t>
             </a:fld>
             <a:endParaRPr lang="en-US"/>
           </a:p>
@@ -3090,23 +3090,22 @@
 </file>
 
 <file path=ppt/slides/slide1.xml><?xml version="1.0" encoding="utf-8"?>
-<p:sld xmlns:a="http://schemas.openxmlformats.org/drawingml/2006/main" xmlns:p="http://schemas.openxmlformats.org/presentationml/2006/main" xmlns:r="http://schemas.openxmlformats.org/officeDocument/2006/relationships">
+<p:sld xmlns:a="http://schemas.openxmlformats.org/drawingml/2006/main" xmlns:r="http://schemas.openxmlformats.org/officeDocument/2006/relationships" xmlns:p="http://schemas.openxmlformats.org/presentationml/2006/main">
   <p:cSld>
-    <p:bg>
-      <p:bgPr>
-        <a:solidFill>
-          <a:srgbClr val="0D1117"/>
-        </a:solidFill>
-        <a:effectLst/>
-      </p:bgPr>
-    </p:bg>
     <p:spTree>
       <p:nvGrpSpPr>
         <p:cNvPr id="1" name=""/>
         <p:cNvGrpSpPr/>
         <p:nvPr/>
       </p:nvGrpSpPr>
-      <p:grpSpPr/>
+      <p:grpSpPr>
+        <a:xfrm>
+          <a:off x="0" y="0"/>
+          <a:ext cx="0" cy="0"/>
+          <a:chOff x="0" y="0"/>
+          <a:chExt cx="0" cy="0"/>
+        </a:xfrm>
+      </p:grpSpPr>
       <p:sp>
         <p:nvSpPr>
           <p:cNvPr id="2" name="Rectangle 1"/>
@@ -3147,6 +3146,7 @@
           <a:lstStyle/>
           <a:p>
             <a:pPr algn="ctr"/>
+            <a:endParaRPr/>
           </a:p>
         </p:txBody>
       </p:sp>
@@ -3193,7 +3193,7 @@
         </p:nvSpPr>
         <p:spPr>
           <a:xfrm>
-            <a:off x="914400" y="1920240"/>
+            <a:off x="914400" y="1819562"/>
             <a:ext cx="10332720" cy="731520"/>
           </a:xfrm>
           <a:prstGeom prst="rect">
@@ -3334,63 +3334,52 @@
 </file>
 
 <file path=ppt/slides/slide10.xml><?xml version="1.0" encoding="utf-8"?>
-<p:sld xmlns:a="http://schemas.openxmlformats.org/drawingml/2006/main" xmlns:p="http://schemas.openxmlformats.org/presentationml/2006/main" xmlns:r="http://schemas.openxmlformats.org/officeDocument/2006/relationships">
+<p:sld xmlns:a="http://schemas.openxmlformats.org/drawingml/2006/main" xmlns:r="http://schemas.openxmlformats.org/officeDocument/2006/relationships" xmlns:p="http://schemas.openxmlformats.org/presentationml/2006/main">
   <p:cSld>
-    <p:bg>
-      <p:bgPr>
-        <a:solidFill>
-          <a:srgbClr val="0D1117"/>
-        </a:solidFill>
-        <a:effectLst/>
-      </p:bgPr>
-    </p:bg>
     <p:spTree>
       <p:nvGrpSpPr>
         <p:cNvPr id="1" name=""/>
         <p:cNvGrpSpPr/>
         <p:nvPr/>
       </p:nvGrpSpPr>
-      <p:grpSpPr/>
-      <p:sp>
-        <p:nvSpPr>
-          <p:cNvPr id="2" name="Rectangle 1"/>
-          <p:cNvSpPr/>
-          <p:nvPr/>
-        </p:nvSpPr>
-        <p:spPr>
-          <a:xfrm>
-            <a:off x="0" y="0"/>
-            <a:ext cx="12188952" cy="1280160"/>
-          </a:xfrm>
-          <a:prstGeom prst="rect">
-            <a:avLst/>
-          </a:prstGeom>
-          <a:solidFill>
-            <a:srgbClr val="1A202C"/>
-          </a:solidFill>
-          <a:ln>
-            <a:noFill/>
-          </a:ln>
-        </p:spPr>
-        <p:style>
-          <a:lnRef idx="1">
-            <a:schemeClr val="accent1"/>
-          </a:lnRef>
-          <a:fillRef idx="3">
-            <a:schemeClr val="accent1"/>
-          </a:fillRef>
-          <a:effectRef idx="2">
-            <a:schemeClr val="accent1"/>
-          </a:effectRef>
-          <a:fontRef idx="minor">
-            <a:schemeClr val="lt1"/>
-          </a:fontRef>
-        </p:style>
-        <p:txBody>
-          <a:bodyPr rtlCol="0" anchor="ctr"/>
-          <a:lstStyle/>
-          <a:p>
-            <a:pPr algn="ctr"/>
+      <p:grpSpPr>
+        <a:xfrm>
+          <a:off x="0" y="0"/>
+          <a:ext cx="0" cy="0"/>
+          <a:chOff x="0" y="0"/>
+          <a:chExt cx="0" cy="0"/>
+        </a:xfrm>
+      </p:grpSpPr>
+      <p:sp>
+        <p:nvSpPr>
+          <p:cNvPr id="2" name="TextBox 1"/>
+          <p:cNvSpPr txBox="1"/>
+          <p:nvPr/>
+        </p:nvSpPr>
+        <p:spPr>
+          <a:xfrm>
+            <a:off x="347472" y="51253"/>
+            <a:ext cx="7275005" cy="523220"/>
+          </a:xfrm>
+          <a:prstGeom prst="rect">
+            <a:avLst/>
+          </a:prstGeom>
+          <a:noFill/>
+        </p:spPr>
+        <p:txBody>
+          <a:bodyPr wrap="none">
+            <a:spAutoFit/>
+          </a:bodyPr>
+          <a:lstStyle/>
+          <a:p>
+            <a:r>
+              <a:rPr sz="2800" b="1" dirty="0">
+                <a:solidFill>
+                  <a:srgbClr val="57FB72"/>
+                </a:solidFill>
+              </a:rPr>
+              <a:t>Winning Model Diagnostics: ROC and PR Curves</a:t>
+            </a:r>
           </a:p>
         </p:txBody>
       </p:sp>
@@ -3402,224 +3391,143 @@
         </p:nvSpPr>
         <p:spPr>
           <a:xfrm>
-            <a:off x="457200" y="91440"/>
-            <a:ext cx="10058400" cy="640080"/>
-          </a:xfrm>
-          <a:prstGeom prst="rect">
-            <a:avLst/>
-          </a:prstGeom>
-          <a:noFill/>
-        </p:spPr>
-        <p:txBody>
-          <a:bodyPr wrap="square">
-            <a:spAutoFit/>
-          </a:bodyPr>
-          <a:lstStyle/>
-          <a:p>
-            <a:pPr algn="l"/>
-            <a:r>
-              <a:rPr sz="2800" b="1">
-                <a:solidFill>
-                  <a:srgbClr val="00D48A"/>
-                </a:solidFill>
-                <a:latin typeface="Calibri"/>
-              </a:rPr>
-              <a:t>Model Interpretation — TreeSHAP + Counterfactuals</a:t>
-            </a:r>
-          </a:p>
-        </p:txBody>
-      </p:sp>
-      <p:sp>
-        <p:nvSpPr>
-          <p:cNvPr id="4" name="TextBox 3"/>
-          <p:cNvSpPr txBox="1"/>
-          <p:nvPr/>
-        </p:nvSpPr>
-        <p:spPr>
-          <a:xfrm>
-            <a:off x="457200" y="731520"/>
-            <a:ext cx="10058400" cy="457200"/>
-          </a:xfrm>
-          <a:prstGeom prst="rect">
-            <a:avLst/>
-          </a:prstGeom>
-          <a:noFill/>
-        </p:spPr>
-        <p:txBody>
-          <a:bodyPr wrap="square">
-            <a:spAutoFit/>
-          </a:bodyPr>
-          <a:lstStyle/>
-          <a:p>
-            <a:pPr algn="l"/>
-            <a:r>
-              <a:rPr sz="1600" b="0">
-                <a:solidFill>
-                  <a:srgbClr val="9CA3AF"/>
-                </a:solidFill>
-                <a:latin typeface="Calibri"/>
-              </a:rPr>
-              <a:t>Exact per-feature contributions — not an approximation</a:t>
-            </a:r>
-          </a:p>
-        </p:txBody>
-      </p:sp>
-      <p:sp>
-        <p:nvSpPr>
-          <p:cNvPr id="5" name="TextBox 4"/>
-          <p:cNvSpPr txBox="1"/>
-          <p:nvPr/>
-        </p:nvSpPr>
-        <p:spPr>
-          <a:xfrm>
-            <a:off x="274320" y="6492240"/>
-            <a:ext cx="10972800" cy="320040"/>
-          </a:xfrm>
-          <a:prstGeom prst="rect">
-            <a:avLst/>
-          </a:prstGeom>
-          <a:noFill/>
-        </p:spPr>
-        <p:txBody>
-          <a:bodyPr wrap="square">
-            <a:spAutoFit/>
-          </a:bodyPr>
-          <a:lstStyle/>
-          <a:p>
-            <a:pPr algn="l"/>
-            <a:r>
-              <a:rPr sz="1100" b="0">
-                <a:solidFill>
-                  <a:srgbClr val="9CA3AF"/>
-                </a:solidFill>
-                <a:latin typeface="Calibri"/>
-              </a:rPr>
-              <a:t>Mark Crisci  |  LANL ML Final Project  |  10/12</a:t>
-            </a:r>
-          </a:p>
-        </p:txBody>
-      </p:sp>
-      <p:sp>
-        <p:nvSpPr>
-          <p:cNvPr id="6" name="Rectangle 5"/>
-          <p:cNvSpPr/>
-          <p:nvPr/>
-        </p:nvSpPr>
-        <p:spPr>
-          <a:xfrm>
-            <a:off x="365760" y="1417320"/>
-            <a:ext cx="5577840" cy="5029200"/>
-          </a:xfrm>
-          <a:prstGeom prst="rect">
-            <a:avLst/>
-          </a:prstGeom>
-          <a:solidFill>
-            <a:srgbClr val="1A202C"/>
-          </a:solidFill>
-          <a:ln>
-            <a:noFill/>
-          </a:ln>
-        </p:spPr>
-        <p:style>
-          <a:lnRef idx="1">
-            <a:schemeClr val="accent1"/>
-          </a:lnRef>
-          <a:fillRef idx="3">
-            <a:schemeClr val="accent1"/>
-          </a:fillRef>
-          <a:effectRef idx="2">
-            <a:schemeClr val="accent1"/>
-          </a:effectRef>
-          <a:fontRef idx="minor">
-            <a:schemeClr val="lt1"/>
-          </a:fontRef>
-        </p:style>
-        <p:txBody>
-          <a:bodyPr rtlCol="0" anchor="ctr"/>
-          <a:lstStyle/>
-          <a:p>
-            <a:pPr algn="ctr"/>
-          </a:p>
-        </p:txBody>
-      </p:sp>
-      <p:sp>
-        <p:nvSpPr>
-          <p:cNvPr id="7" name="TextBox 6"/>
-          <p:cNvSpPr txBox="1"/>
-          <p:nvPr/>
-        </p:nvSpPr>
-        <p:spPr>
-          <a:xfrm>
-            <a:off x="548640" y="1508760"/>
-            <a:ext cx="5212080" cy="347472"/>
-          </a:xfrm>
-          <a:prstGeom prst="rect">
-            <a:avLst/>
-          </a:prstGeom>
-          <a:noFill/>
-        </p:spPr>
-        <p:txBody>
-          <a:bodyPr wrap="square">
-            <a:spAutoFit/>
-          </a:bodyPr>
-          <a:lstStyle/>
-          <a:p>
-            <a:pPr algn="l"/>
-            <a:r>
-              <a:rPr sz="1500" b="1">
-                <a:solidFill>
-                  <a:srgbClr val="00D48A"/>
-                </a:solidFill>
-                <a:latin typeface="Calibri"/>
-              </a:rPr>
-              <a:t>Why did the model flag this host?</a:t>
-            </a:r>
-          </a:p>
-        </p:txBody>
-      </p:sp>
-      <p:sp>
-        <p:nvSpPr>
-          <p:cNvPr id="8" name="Rectangle 7"/>
-          <p:cNvSpPr/>
-          <p:nvPr/>
-        </p:nvSpPr>
-        <p:spPr>
-          <a:xfrm>
-            <a:off x="548640" y="1965960"/>
-            <a:ext cx="2304288" cy="274320"/>
-          </a:xfrm>
-          <a:prstGeom prst="rect">
-            <a:avLst/>
-          </a:prstGeom>
-          <a:solidFill>
-            <a:srgbClr val="FF4D4D"/>
-          </a:solidFill>
-          <a:ln>
-            <a:noFill/>
-          </a:ln>
-        </p:spPr>
-        <p:style>
-          <a:lnRef idx="1">
-            <a:schemeClr val="accent1"/>
-          </a:lnRef>
-          <a:fillRef idx="3">
-            <a:schemeClr val="accent1"/>
-          </a:fillRef>
-          <a:effectRef idx="2">
-            <a:schemeClr val="accent1"/>
-          </a:effectRef>
-          <a:fontRef idx="minor">
-            <a:schemeClr val="lt1"/>
-          </a:fontRef>
-        </p:style>
-        <p:txBody>
-          <a:bodyPr rtlCol="0" anchor="ctr"/>
-          <a:lstStyle/>
-          <a:p>
-            <a:pPr algn="ctr"/>
-          </a:p>
-        </p:txBody>
-      </p:sp>
+            <a:off x="438785" y="496418"/>
+            <a:ext cx="4515660" cy="292388"/>
+          </a:xfrm>
+          <a:prstGeom prst="rect">
+            <a:avLst/>
+          </a:prstGeom>
+          <a:noFill/>
+        </p:spPr>
+        <p:txBody>
+          <a:bodyPr wrap="none">
+            <a:spAutoFit/>
+          </a:bodyPr>
+          <a:lstStyle/>
+          <a:p>
+            <a:r>
+              <a:rPr sz="1300" b="0" dirty="0">
+                <a:solidFill>
+                  <a:schemeClr val="bg2"/>
+                </a:solidFill>
+              </a:rPr>
+              <a:t>Validation and test curves for the </a:t>
+            </a:r>
+            <a:r>
+              <a:rPr sz="1300" b="0" dirty="0" err="1">
+                <a:solidFill>
+                  <a:schemeClr val="bg2"/>
+                </a:solidFill>
+              </a:rPr>
+              <a:t>LightGBM</a:t>
+            </a:r>
+            <a:r>
+              <a:rPr sz="1300" b="0" dirty="0">
+                <a:solidFill>
+                  <a:schemeClr val="bg2"/>
+                </a:solidFill>
+              </a:rPr>
+              <a:t> rare-event classifier</a:t>
+            </a:r>
+          </a:p>
+        </p:txBody>
+      </p:sp>
+      <p:pic>
+        <p:nvPicPr>
+          <p:cNvPr id="4" name="Picture 3" descr="lgbm_roc_validation.png"/>
+          <p:cNvPicPr>
+            <a:picLocks noChangeAspect="1"/>
+          </p:cNvPicPr>
+          <p:nvPr/>
+        </p:nvPicPr>
+        <p:blipFill>
+          <a:blip r:embed="rId2"/>
+          <a:stretch>
+            <a:fillRect/>
+          </a:stretch>
+        </p:blipFill>
+        <p:spPr>
+          <a:xfrm>
+            <a:off x="438912" y="1053958"/>
+            <a:ext cx="3925699" cy="2718909"/>
+          </a:xfrm>
+          <a:prstGeom prst="rect">
+            <a:avLst/>
+          </a:prstGeom>
+        </p:spPr>
+      </p:pic>
+      <p:pic>
+        <p:nvPicPr>
+          <p:cNvPr id="5" name="Picture 4" descr="lgbm_roc_test.png"/>
+          <p:cNvPicPr>
+            <a:picLocks noChangeAspect="1"/>
+          </p:cNvPicPr>
+          <p:nvPr/>
+        </p:nvPicPr>
+        <p:blipFill>
+          <a:blip r:embed="rId3"/>
+          <a:stretch>
+            <a:fillRect/>
+          </a:stretch>
+        </p:blipFill>
+        <p:spPr>
+          <a:xfrm>
+            <a:off x="7007753" y="901108"/>
+            <a:ext cx="4251489" cy="2724954"/>
+          </a:xfrm>
+          <a:prstGeom prst="rect">
+            <a:avLst/>
+          </a:prstGeom>
+        </p:spPr>
+      </p:pic>
+      <p:pic>
+        <p:nvPicPr>
+          <p:cNvPr id="6" name="Picture 5" descr="lgbm_pr_validation.png"/>
+          <p:cNvPicPr>
+            <a:picLocks noChangeAspect="1"/>
+          </p:cNvPicPr>
+          <p:nvPr/>
+        </p:nvPicPr>
+        <p:blipFill>
+          <a:blip r:embed="rId4"/>
+          <a:stretch>
+            <a:fillRect/>
+          </a:stretch>
+        </p:blipFill>
+        <p:spPr>
+          <a:xfrm>
+            <a:off x="438785" y="3739702"/>
+            <a:ext cx="3925826" cy="2718909"/>
+          </a:xfrm>
+          <a:prstGeom prst="rect">
+            <a:avLst/>
+          </a:prstGeom>
+        </p:spPr>
+      </p:pic>
+      <p:pic>
+        <p:nvPicPr>
+          <p:cNvPr id="7" name="Picture 6" descr="lgbm_pr_test.png"/>
+          <p:cNvPicPr>
+            <a:picLocks noChangeAspect="1"/>
+          </p:cNvPicPr>
+          <p:nvPr/>
+        </p:nvPicPr>
+        <p:blipFill>
+          <a:blip r:embed="rId5"/>
+          <a:stretch>
+            <a:fillRect/>
+          </a:stretch>
+        </p:blipFill>
+        <p:spPr>
+          <a:xfrm>
+            <a:off x="7007753" y="3645802"/>
+            <a:ext cx="4251490" cy="2724955"/>
+          </a:xfrm>
+          <a:prstGeom prst="rect">
+            <a:avLst/>
+          </a:prstGeom>
+        </p:spPr>
+      </p:pic>
       <p:sp>
         <p:nvSpPr>
           <p:cNvPr id="9" name="TextBox 8"/>
@@ -3628,30 +3536,108 @@
         </p:nvSpPr>
         <p:spPr>
           <a:xfrm>
-            <a:off x="3429000" y="1965960"/>
-            <a:ext cx="1828800" cy="274320"/>
-          </a:xfrm>
-          <a:prstGeom prst="rect">
-            <a:avLst/>
-          </a:prstGeom>
-          <a:noFill/>
-        </p:spPr>
-        <p:txBody>
-          <a:bodyPr wrap="square">
-            <a:spAutoFit/>
-          </a:bodyPr>
-          <a:lstStyle/>
-          <a:p>
-            <a:pPr algn="l"/>
-            <a:r>
-              <a:rPr sz="1100" b="0">
-                <a:solidFill>
-                  <a:srgbClr val="FFFFFF"/>
-                </a:solidFill>
-                <a:latin typeface="Calibri"/>
-              </a:rPr>
-              <a:t>flows_outbound_count</a:t>
-            </a:r>
+            <a:off x="7098384" y="540626"/>
+            <a:ext cx="4251489" cy="1061829"/>
+          </a:xfrm>
+          <a:prstGeom prst="rect">
+            <a:avLst/>
+          </a:prstGeom>
+          <a:noFill/>
+        </p:spPr>
+        <p:txBody>
+          <a:bodyPr wrap="square">
+            <a:spAutoFit/>
+          </a:bodyPr>
+          <a:lstStyle/>
+          <a:p>
+            <a:pPr>
+              <a:defRPr sz="1050">
+                <a:solidFill>
+                  <a:srgbClr val="1E1E1E"/>
+                </a:solidFill>
+              </a:defRPr>
+            </a:pPr>
+            <a:r>
+              <a:rPr dirty="0">
+                <a:solidFill>
+                  <a:srgbClr val="FFC000"/>
+                </a:solidFill>
+                <a:highlight>
+                  <a:srgbClr val="000000"/>
+                </a:highlight>
+              </a:rPr>
+              <a:t>ROC-AUC shows global ranking ability: </a:t>
+            </a:r>
+            <a:r>
+              <a:rPr dirty="0" err="1">
+                <a:solidFill>
+                  <a:srgbClr val="FFC000"/>
+                </a:solidFill>
+                <a:highlight>
+                  <a:srgbClr val="000000"/>
+                </a:highlight>
+              </a:rPr>
+              <a:t>LightGBM</a:t>
+            </a:r>
+            <a:r>
+              <a:rPr dirty="0">
+                <a:solidFill>
+                  <a:srgbClr val="FFC000"/>
+                </a:solidFill>
+                <a:highlight>
+                  <a:srgbClr val="000000"/>
+                </a:highlight>
+              </a:rPr>
+              <a:t> ranks attack-like host-hours above benign ones.</a:t>
+            </a:r>
+            <a:endParaRPr lang="en-US" dirty="0">
+              <a:solidFill>
+                <a:srgbClr val="FFC000"/>
+              </a:solidFill>
+              <a:highlight>
+                <a:srgbClr val="000000"/>
+              </a:highlight>
+            </a:endParaRPr>
+          </a:p>
+          <a:p>
+            <a:pPr>
+              <a:defRPr sz="1050">
+                <a:solidFill>
+                  <a:srgbClr val="1E1E1E"/>
+                </a:solidFill>
+              </a:defRPr>
+            </a:pPr>
+            <a:endParaRPr lang="en-US" dirty="0"/>
+          </a:p>
+          <a:p>
+            <a:pPr>
+              <a:defRPr sz="1050">
+                <a:solidFill>
+                  <a:srgbClr val="1E1E1E"/>
+                </a:solidFill>
+              </a:defRPr>
+            </a:pPr>
+            <a:endParaRPr dirty="0"/>
+          </a:p>
+          <a:p>
+            <a:pPr>
+              <a:defRPr sz="1050">
+                <a:solidFill>
+                  <a:srgbClr val="1E1E1E"/>
+                </a:solidFill>
+              </a:defRPr>
+            </a:pPr>
+            <a:endParaRPr dirty="0"/>
+          </a:p>
+          <a:p>
+            <a:pPr>
+              <a:defRPr sz="1050">
+                <a:solidFill>
+                  <a:srgbClr val="1E1E1E"/>
+                </a:solidFill>
+              </a:defRPr>
+            </a:pPr>
+            <a:endParaRPr dirty="0"/>
           </a:p>
         </p:txBody>
       </p:sp>
@@ -3663,1014 +3649,407 @@
         </p:nvSpPr>
         <p:spPr>
           <a:xfrm>
-            <a:off x="5349240" y="1965960"/>
-            <a:ext cx="548640" cy="274320"/>
-          </a:xfrm>
-          <a:prstGeom prst="rect">
-            <a:avLst/>
-          </a:prstGeom>
-          <a:noFill/>
-        </p:spPr>
-        <p:txBody>
-          <a:bodyPr wrap="square">
-            <a:spAutoFit/>
-          </a:bodyPr>
-          <a:lstStyle/>
-          <a:p>
-            <a:pPr algn="l"/>
-            <a:r>
-              <a:rPr sz="1100" b="1">
-                <a:solidFill>
-                  <a:srgbClr val="FF4D4D"/>
-                </a:solidFill>
-                <a:latin typeface="Calibri"/>
-              </a:rPr>
-              <a:t>+0.84</a:t>
-            </a:r>
-          </a:p>
-        </p:txBody>
-      </p:sp>
-      <p:sp>
-        <p:nvSpPr>
-          <p:cNvPr id="11" name="Rectangle 10"/>
-          <p:cNvSpPr/>
-          <p:nvPr/>
-        </p:nvSpPr>
-        <p:spPr>
-          <a:xfrm>
-            <a:off x="548640" y="2313432"/>
-            <a:ext cx="1673352" cy="274320"/>
-          </a:xfrm>
-          <a:prstGeom prst="rect">
-            <a:avLst/>
-          </a:prstGeom>
-          <a:solidFill>
-            <a:srgbClr val="FF4D4D"/>
-          </a:solidFill>
-          <a:ln>
-            <a:noFill/>
-          </a:ln>
-        </p:spPr>
-        <p:style>
-          <a:lnRef idx="1">
-            <a:schemeClr val="accent1"/>
-          </a:lnRef>
-          <a:fillRef idx="3">
-            <a:schemeClr val="accent1"/>
-          </a:fillRef>
-          <a:effectRef idx="2">
-            <a:schemeClr val="accent1"/>
-          </a:effectRef>
-          <a:fontRef idx="minor">
-            <a:schemeClr val="lt1"/>
-          </a:fontRef>
-        </p:style>
-        <p:txBody>
-          <a:bodyPr rtlCol="0" anchor="ctr"/>
-          <a:lstStyle/>
-          <a:p>
-            <a:pPr algn="ctr"/>
-          </a:p>
-        </p:txBody>
-      </p:sp>
-      <p:sp>
-        <p:nvSpPr>
-          <p:cNvPr id="12" name="TextBox 11"/>
-          <p:cNvSpPr txBox="1"/>
-          <p:nvPr/>
-        </p:nvSpPr>
-        <p:spPr>
-          <a:xfrm>
-            <a:off x="3429000" y="2313432"/>
-            <a:ext cx="1828800" cy="274320"/>
-          </a:xfrm>
-          <a:prstGeom prst="rect">
-            <a:avLst/>
-          </a:prstGeom>
-          <a:noFill/>
-        </p:spPr>
-        <p:txBody>
-          <a:bodyPr wrap="square">
-            <a:spAutoFit/>
-          </a:bodyPr>
-          <a:lstStyle/>
-          <a:p>
-            <a:pPr algn="l"/>
-            <a:r>
-              <a:rPr sz="1100" b="0">
-                <a:solidFill>
-                  <a:srgbClr val="FFFFFF"/>
-                </a:solidFill>
-                <a:latin typeface="Calibri"/>
-              </a:rPr>
-              <a:t>auth_unique_destinations</a:t>
-            </a:r>
-          </a:p>
-        </p:txBody>
-      </p:sp>
-      <p:sp>
-        <p:nvSpPr>
-          <p:cNvPr id="13" name="TextBox 12"/>
-          <p:cNvSpPr txBox="1"/>
-          <p:nvPr/>
-        </p:nvSpPr>
-        <p:spPr>
-          <a:xfrm>
-            <a:off x="5349240" y="2313432"/>
-            <a:ext cx="548640" cy="274320"/>
-          </a:xfrm>
-          <a:prstGeom prst="rect">
-            <a:avLst/>
-          </a:prstGeom>
-          <a:noFill/>
-        </p:spPr>
-        <p:txBody>
-          <a:bodyPr wrap="square">
-            <a:spAutoFit/>
-          </a:bodyPr>
-          <a:lstStyle/>
-          <a:p>
-            <a:pPr algn="l"/>
-            <a:r>
-              <a:rPr sz="1100" b="1">
-                <a:solidFill>
-                  <a:srgbClr val="FF4D4D"/>
-                </a:solidFill>
-                <a:latin typeface="Calibri"/>
-              </a:rPr>
-              <a:t>+0.61</a:t>
-            </a:r>
-          </a:p>
-        </p:txBody>
-      </p:sp>
-      <p:sp>
-        <p:nvSpPr>
-          <p:cNvPr id="14" name="Rectangle 13"/>
-          <p:cNvSpPr/>
-          <p:nvPr/>
-        </p:nvSpPr>
-        <p:spPr>
-          <a:xfrm>
-            <a:off x="548640" y="2660904"/>
-            <a:ext cx="1152144" cy="274320"/>
-          </a:xfrm>
-          <a:prstGeom prst="rect">
-            <a:avLst/>
-          </a:prstGeom>
-          <a:solidFill>
-            <a:srgbClr val="FF4D4D"/>
-          </a:solidFill>
-          <a:ln>
-            <a:noFill/>
-          </a:ln>
-        </p:spPr>
-        <p:style>
-          <a:lnRef idx="1">
-            <a:schemeClr val="accent1"/>
-          </a:lnRef>
-          <a:fillRef idx="3">
-            <a:schemeClr val="accent1"/>
-          </a:fillRef>
-          <a:effectRef idx="2">
-            <a:schemeClr val="accent1"/>
-          </a:effectRef>
-          <a:fontRef idx="minor">
-            <a:schemeClr val="lt1"/>
-          </a:fontRef>
-        </p:style>
-        <p:txBody>
-          <a:bodyPr rtlCol="0" anchor="ctr"/>
-          <a:lstStyle/>
-          <a:p>
-            <a:pPr algn="ctr"/>
-          </a:p>
-        </p:txBody>
-      </p:sp>
-      <p:sp>
-        <p:nvSpPr>
-          <p:cNvPr id="15" name="TextBox 14"/>
-          <p:cNvSpPr txBox="1"/>
-          <p:nvPr/>
-        </p:nvSpPr>
-        <p:spPr>
-          <a:xfrm>
-            <a:off x="3429000" y="2660904"/>
-            <a:ext cx="1828800" cy="274320"/>
-          </a:xfrm>
-          <a:prstGeom prst="rect">
-            <a:avLst/>
-          </a:prstGeom>
-          <a:noFill/>
-        </p:spPr>
-        <p:txBody>
-          <a:bodyPr wrap="square">
-            <a:spAutoFit/>
-          </a:bodyPr>
-          <a:lstStyle/>
-          <a:p>
-            <a:pPr algn="l"/>
-            <a:r>
-              <a:rPr sz="1100" b="0">
-                <a:solidFill>
-                  <a:srgbClr val="FFFFFF"/>
-                </a:solidFill>
-                <a:latin typeface="Calibri"/>
-              </a:rPr>
-              <a:t>auth_total</a:t>
-            </a:r>
-          </a:p>
-        </p:txBody>
-      </p:sp>
-      <p:sp>
-        <p:nvSpPr>
-          <p:cNvPr id="16" name="TextBox 15"/>
-          <p:cNvSpPr txBox="1"/>
-          <p:nvPr/>
-        </p:nvSpPr>
-        <p:spPr>
-          <a:xfrm>
-            <a:off x="5349240" y="2660904"/>
-            <a:ext cx="548640" cy="274320"/>
-          </a:xfrm>
-          <a:prstGeom prst="rect">
-            <a:avLst/>
-          </a:prstGeom>
-          <a:noFill/>
-        </p:spPr>
-        <p:txBody>
-          <a:bodyPr wrap="square">
-            <a:spAutoFit/>
-          </a:bodyPr>
-          <a:lstStyle/>
-          <a:p>
-            <a:pPr algn="l"/>
-            <a:r>
-              <a:rPr sz="1100" b="1">
-                <a:solidFill>
-                  <a:srgbClr val="FF4D4D"/>
-                </a:solidFill>
-                <a:latin typeface="Calibri"/>
-              </a:rPr>
-              <a:t>+0.42</a:t>
-            </a:r>
-          </a:p>
-        </p:txBody>
-      </p:sp>
-      <p:sp>
-        <p:nvSpPr>
-          <p:cNvPr id="17" name="Rectangle 16"/>
-          <p:cNvSpPr/>
-          <p:nvPr/>
-        </p:nvSpPr>
-        <p:spPr>
-          <a:xfrm>
-            <a:off x="548640" y="3008376"/>
-            <a:ext cx="795528" cy="274320"/>
-          </a:xfrm>
-          <a:prstGeom prst="rect">
-            <a:avLst/>
-          </a:prstGeom>
-          <a:solidFill>
-            <a:srgbClr val="FF4D4D"/>
-          </a:solidFill>
-          <a:ln>
-            <a:noFill/>
-          </a:ln>
-        </p:spPr>
-        <p:style>
-          <a:lnRef idx="1">
-            <a:schemeClr val="accent1"/>
-          </a:lnRef>
-          <a:fillRef idx="3">
-            <a:schemeClr val="accent1"/>
-          </a:fillRef>
-          <a:effectRef idx="2">
-            <a:schemeClr val="accent1"/>
-          </a:effectRef>
-          <a:fontRef idx="minor">
-            <a:schemeClr val="lt1"/>
-          </a:fontRef>
-        </p:style>
-        <p:txBody>
-          <a:bodyPr rtlCol="0" anchor="ctr"/>
-          <a:lstStyle/>
-          <a:p>
-            <a:pPr algn="ctr"/>
-          </a:p>
-        </p:txBody>
-      </p:sp>
-      <p:sp>
-        <p:nvSpPr>
-          <p:cNvPr id="18" name="TextBox 17"/>
-          <p:cNvSpPr txBox="1"/>
-          <p:nvPr/>
-        </p:nvSpPr>
-        <p:spPr>
-          <a:xfrm>
-            <a:off x="3429000" y="3008376"/>
-            <a:ext cx="1828800" cy="274320"/>
-          </a:xfrm>
-          <a:prstGeom prst="rect">
-            <a:avLst/>
-          </a:prstGeom>
-          <a:noFill/>
-        </p:spPr>
-        <p:txBody>
-          <a:bodyPr wrap="square">
-            <a:spAutoFit/>
-          </a:bodyPr>
-          <a:lstStyle/>
-          <a:p>
-            <a:pPr algn="l"/>
-            <a:r>
-              <a:rPr sz="1100" b="0">
-                <a:solidFill>
-                  <a:srgbClr val="FFFFFF"/>
-                </a:solidFill>
-                <a:latin typeface="Calibri"/>
-              </a:rPr>
-              <a:t>flows_bytes_total</a:t>
-            </a:r>
-          </a:p>
-        </p:txBody>
-      </p:sp>
-      <p:sp>
-        <p:nvSpPr>
-          <p:cNvPr id="19" name="TextBox 18"/>
-          <p:cNvSpPr txBox="1"/>
-          <p:nvPr/>
-        </p:nvSpPr>
-        <p:spPr>
-          <a:xfrm>
-            <a:off x="5349240" y="3008376"/>
-            <a:ext cx="548640" cy="274320"/>
-          </a:xfrm>
-          <a:prstGeom prst="rect">
-            <a:avLst/>
-          </a:prstGeom>
-          <a:noFill/>
-        </p:spPr>
-        <p:txBody>
-          <a:bodyPr wrap="square">
-            <a:spAutoFit/>
-          </a:bodyPr>
-          <a:lstStyle/>
-          <a:p>
-            <a:pPr algn="l"/>
-            <a:r>
-              <a:rPr sz="1100" b="1">
-                <a:solidFill>
-                  <a:srgbClr val="FF4D4D"/>
-                </a:solidFill>
-                <a:latin typeface="Calibri"/>
-              </a:rPr>
-              <a:t>+0.29</a:t>
-            </a:r>
-          </a:p>
-        </p:txBody>
-      </p:sp>
-      <p:sp>
-        <p:nvSpPr>
-          <p:cNvPr id="20" name="Rectangle 19"/>
-          <p:cNvSpPr/>
-          <p:nvPr/>
-        </p:nvSpPr>
-        <p:spPr>
-          <a:xfrm>
-            <a:off x="2798064" y="3355848"/>
-            <a:ext cx="493776" cy="274320"/>
-          </a:xfrm>
-          <a:prstGeom prst="rect">
-            <a:avLst/>
-          </a:prstGeom>
-          <a:solidFill>
-            <a:srgbClr val="00D48A"/>
-          </a:solidFill>
-          <a:ln>
-            <a:noFill/>
-          </a:ln>
-        </p:spPr>
-        <p:style>
-          <a:lnRef idx="1">
-            <a:schemeClr val="accent1"/>
-          </a:lnRef>
-          <a:fillRef idx="3">
-            <a:schemeClr val="accent1"/>
-          </a:fillRef>
-          <a:effectRef idx="2">
-            <a:schemeClr val="accent1"/>
-          </a:effectRef>
-          <a:fontRef idx="minor">
-            <a:schemeClr val="lt1"/>
-          </a:fontRef>
-        </p:style>
-        <p:txBody>
-          <a:bodyPr rtlCol="0" anchor="ctr"/>
-          <a:lstStyle/>
-          <a:p>
-            <a:pPr algn="ctr"/>
-          </a:p>
-        </p:txBody>
-      </p:sp>
-      <p:sp>
-        <p:nvSpPr>
-          <p:cNvPr id="21" name="TextBox 20"/>
-          <p:cNvSpPr txBox="1"/>
-          <p:nvPr/>
-        </p:nvSpPr>
-        <p:spPr>
-          <a:xfrm>
-            <a:off x="3429000" y="3355848"/>
-            <a:ext cx="1828800" cy="274320"/>
-          </a:xfrm>
-          <a:prstGeom prst="rect">
-            <a:avLst/>
-          </a:prstGeom>
-          <a:noFill/>
-        </p:spPr>
-        <p:txBody>
-          <a:bodyPr wrap="square">
-            <a:spAutoFit/>
-          </a:bodyPr>
-          <a:lstStyle/>
-          <a:p>
-            <a:pPr algn="l"/>
-            <a:r>
-              <a:rPr sz="1100" b="0">
-                <a:solidFill>
-                  <a:srgbClr val="FFFFFF"/>
-                </a:solidFill>
-                <a:latin typeface="Calibri"/>
-              </a:rPr>
-              <a:t>dns_lookup_count</a:t>
-            </a:r>
-          </a:p>
-        </p:txBody>
-      </p:sp>
-      <p:sp>
-        <p:nvSpPr>
-          <p:cNvPr id="22" name="TextBox 21"/>
-          <p:cNvSpPr txBox="1"/>
-          <p:nvPr/>
-        </p:nvSpPr>
-        <p:spPr>
-          <a:xfrm>
-            <a:off x="5349240" y="3355848"/>
-            <a:ext cx="548640" cy="274320"/>
-          </a:xfrm>
-          <a:prstGeom prst="rect">
-            <a:avLst/>
-          </a:prstGeom>
-          <a:noFill/>
-        </p:spPr>
-        <p:txBody>
-          <a:bodyPr wrap="square">
-            <a:spAutoFit/>
-          </a:bodyPr>
-          <a:lstStyle/>
-          <a:p>
-            <a:pPr algn="l"/>
-            <a:r>
-              <a:rPr sz="1100" b="1">
-                <a:solidFill>
-                  <a:srgbClr val="00D48A"/>
-                </a:solidFill>
-                <a:latin typeface="Calibri"/>
-              </a:rPr>
-              <a:t>-0.18</a:t>
-            </a:r>
-          </a:p>
-        </p:txBody>
-      </p:sp>
-      <p:sp>
-        <p:nvSpPr>
-          <p:cNvPr id="23" name="Rectangle 22"/>
-          <p:cNvSpPr/>
-          <p:nvPr/>
-        </p:nvSpPr>
-        <p:spPr>
-          <a:xfrm>
-            <a:off x="2441448" y="3703320"/>
-            <a:ext cx="850392" cy="274320"/>
-          </a:xfrm>
-          <a:prstGeom prst="rect">
-            <a:avLst/>
-          </a:prstGeom>
-          <a:solidFill>
-            <a:srgbClr val="00D48A"/>
-          </a:solidFill>
-          <a:ln>
-            <a:noFill/>
-          </a:ln>
-        </p:spPr>
-        <p:style>
-          <a:lnRef idx="1">
-            <a:schemeClr val="accent1"/>
-          </a:lnRef>
-          <a:fillRef idx="3">
-            <a:schemeClr val="accent1"/>
-          </a:fillRef>
-          <a:effectRef idx="2">
-            <a:schemeClr val="accent1"/>
-          </a:effectRef>
-          <a:fontRef idx="minor">
-            <a:schemeClr val="lt1"/>
-          </a:fontRef>
-        </p:style>
-        <p:txBody>
-          <a:bodyPr rtlCol="0" anchor="ctr"/>
-          <a:lstStyle/>
-          <a:p>
-            <a:pPr algn="ctr"/>
-          </a:p>
-        </p:txBody>
-      </p:sp>
-      <p:sp>
-        <p:nvSpPr>
-          <p:cNvPr id="24" name="TextBox 23"/>
-          <p:cNvSpPr txBox="1"/>
-          <p:nvPr/>
-        </p:nvSpPr>
-        <p:spPr>
-          <a:xfrm>
-            <a:off x="3429000" y="3703320"/>
-            <a:ext cx="1828800" cy="274320"/>
-          </a:xfrm>
-          <a:prstGeom prst="rect">
-            <a:avLst/>
-          </a:prstGeom>
-          <a:noFill/>
-        </p:spPr>
-        <p:txBody>
-          <a:bodyPr wrap="square">
-            <a:spAutoFit/>
-          </a:bodyPr>
-          <a:lstStyle/>
-          <a:p>
-            <a:pPr algn="l"/>
-            <a:r>
-              <a:rPr sz="1100" b="0">
-                <a:solidFill>
-                  <a:srgbClr val="FFFFFF"/>
-                </a:solidFill>
-                <a:latin typeface="Calibri"/>
-              </a:rPr>
-              <a:t>proc_unique_processes</a:t>
-            </a:r>
-          </a:p>
-        </p:txBody>
-      </p:sp>
-      <p:sp>
-        <p:nvSpPr>
-          <p:cNvPr id="25" name="TextBox 24"/>
-          <p:cNvSpPr txBox="1"/>
-          <p:nvPr/>
-        </p:nvSpPr>
-        <p:spPr>
-          <a:xfrm>
-            <a:off x="5349240" y="3703320"/>
-            <a:ext cx="548640" cy="274320"/>
-          </a:xfrm>
-          <a:prstGeom prst="rect">
-            <a:avLst/>
-          </a:prstGeom>
-          <a:noFill/>
-        </p:spPr>
-        <p:txBody>
-          <a:bodyPr wrap="square">
-            <a:spAutoFit/>
-          </a:bodyPr>
-          <a:lstStyle/>
-          <a:p>
-            <a:pPr algn="l"/>
-            <a:r>
-              <a:rPr sz="1100" b="1">
-                <a:solidFill>
-                  <a:srgbClr val="00D48A"/>
-                </a:solidFill>
-                <a:latin typeface="Calibri"/>
-              </a:rPr>
-              <a:t>-0.31</a:t>
-            </a:r>
-          </a:p>
-        </p:txBody>
-      </p:sp>
-      <p:sp>
-        <p:nvSpPr>
-          <p:cNvPr id="26" name="Rectangle 25"/>
-          <p:cNvSpPr/>
-          <p:nvPr/>
-        </p:nvSpPr>
-        <p:spPr>
-          <a:xfrm>
-            <a:off x="2962656" y="4050792"/>
-            <a:ext cx="329184" cy="274320"/>
-          </a:xfrm>
-          <a:prstGeom prst="rect">
-            <a:avLst/>
-          </a:prstGeom>
-          <a:solidFill>
-            <a:srgbClr val="00D48A"/>
-          </a:solidFill>
-          <a:ln>
-            <a:noFill/>
-          </a:ln>
-        </p:spPr>
-        <p:style>
-          <a:lnRef idx="1">
-            <a:schemeClr val="accent1"/>
-          </a:lnRef>
-          <a:fillRef idx="3">
-            <a:schemeClr val="accent1"/>
-          </a:fillRef>
-          <a:effectRef idx="2">
-            <a:schemeClr val="accent1"/>
-          </a:effectRef>
-          <a:fontRef idx="minor">
-            <a:schemeClr val="lt1"/>
-          </a:fontRef>
-        </p:style>
-        <p:txBody>
-          <a:bodyPr rtlCol="0" anchor="ctr"/>
-          <a:lstStyle/>
-          <a:p>
-            <a:pPr algn="ctr"/>
-          </a:p>
-        </p:txBody>
-      </p:sp>
-      <p:sp>
-        <p:nvSpPr>
-          <p:cNvPr id="27" name="TextBox 26"/>
-          <p:cNvSpPr txBox="1"/>
-          <p:nvPr/>
-        </p:nvSpPr>
-        <p:spPr>
-          <a:xfrm>
-            <a:off x="3429000" y="4050792"/>
-            <a:ext cx="1828800" cy="274320"/>
-          </a:xfrm>
-          <a:prstGeom prst="rect">
-            <a:avLst/>
-          </a:prstGeom>
-          <a:noFill/>
-        </p:spPr>
-        <p:txBody>
-          <a:bodyPr wrap="square">
-            <a:spAutoFit/>
-          </a:bodyPr>
-          <a:lstStyle/>
-          <a:p>
-            <a:pPr algn="l"/>
-            <a:r>
-              <a:rPr sz="1100" b="0">
-                <a:solidFill>
-                  <a:srgbClr val="FFFFFF"/>
-                </a:solidFill>
-                <a:latin typeface="Calibri"/>
-              </a:rPr>
-              <a:t>auth_failure_ratio</a:t>
-            </a:r>
-          </a:p>
-        </p:txBody>
-      </p:sp>
-      <p:sp>
-        <p:nvSpPr>
-          <p:cNvPr id="28" name="TextBox 27"/>
-          <p:cNvSpPr txBox="1"/>
-          <p:nvPr/>
-        </p:nvSpPr>
-        <p:spPr>
-          <a:xfrm>
-            <a:off x="5349240" y="4050792"/>
-            <a:ext cx="548640" cy="274320"/>
-          </a:xfrm>
-          <a:prstGeom prst="rect">
-            <a:avLst/>
-          </a:prstGeom>
-          <a:noFill/>
-        </p:spPr>
-        <p:txBody>
-          <a:bodyPr wrap="square">
-            <a:spAutoFit/>
-          </a:bodyPr>
-          <a:lstStyle/>
-          <a:p>
-            <a:pPr algn="l"/>
-            <a:r>
-              <a:rPr sz="1100" b="1">
-                <a:solidFill>
-                  <a:srgbClr val="00D48A"/>
-                </a:solidFill>
-                <a:latin typeface="Calibri"/>
-              </a:rPr>
-              <a:t>-0.12</a:t>
-            </a:r>
-          </a:p>
-        </p:txBody>
-      </p:sp>
-      <p:sp>
-        <p:nvSpPr>
-          <p:cNvPr id="29" name="TextBox 28"/>
-          <p:cNvSpPr txBox="1"/>
-          <p:nvPr/>
-        </p:nvSpPr>
-        <p:spPr>
-          <a:xfrm>
-            <a:off x="548640" y="4526280"/>
-            <a:ext cx="5212080" cy="320040"/>
-          </a:xfrm>
-          <a:prstGeom prst="rect">
-            <a:avLst/>
-          </a:prstGeom>
-          <a:noFill/>
-        </p:spPr>
-        <p:txBody>
-          <a:bodyPr wrap="square">
-            <a:spAutoFit/>
-          </a:bodyPr>
-          <a:lstStyle/>
-          <a:p>
-            <a:pPr algn="l"/>
-            <a:r>
-              <a:rPr sz="1100" b="0">
-                <a:solidFill>
-                  <a:srgbClr val="9CA3AF"/>
-                </a:solidFill>
-                <a:latin typeface="Calibri"/>
-              </a:rPr>
-              <a:t>Red = pushes risk UP  |  Green = pushes risk DOWN  |  Length = magnitude (log-odds)</a:t>
-            </a:r>
-          </a:p>
-        </p:txBody>
-      </p:sp>
-      <p:sp>
-        <p:nvSpPr>
-          <p:cNvPr id="30" name="TextBox 29"/>
-          <p:cNvSpPr txBox="1"/>
-          <p:nvPr/>
-        </p:nvSpPr>
-        <p:spPr>
-          <a:xfrm>
-            <a:off x="548640" y="4937760"/>
-            <a:ext cx="5212080" cy="457200"/>
-          </a:xfrm>
-          <a:prstGeom prst="rect">
-            <a:avLst/>
-          </a:prstGeom>
-          <a:noFill/>
-        </p:spPr>
-        <p:txBody>
-          <a:bodyPr wrap="square">
-            <a:spAutoFit/>
-          </a:bodyPr>
-          <a:lstStyle/>
-          <a:p>
-            <a:pPr algn="l"/>
-            <a:r>
-              <a:rPr sz="1200" b="0">
-                <a:solidFill>
-                  <a:srgbClr val="9CA3AF"/>
-                </a:solidFill>
-                <a:latin typeface="Calibri"/>
-              </a:rPr>
-              <a:t>TreeSHAP: exact contributions from LightGBM's booster internals.
-Not a shap library approximation. Reproducible and fast.</a:t>
-            </a:r>
-          </a:p>
-        </p:txBody>
-      </p:sp>
-      <p:sp>
-        <p:nvSpPr>
-          <p:cNvPr id="31" name="Rectangle 30"/>
-          <p:cNvSpPr/>
-          <p:nvPr/>
-        </p:nvSpPr>
-        <p:spPr>
-          <a:xfrm>
-            <a:off x="6217920" y="1417320"/>
-            <a:ext cx="5577840" cy="2194560"/>
-          </a:xfrm>
-          <a:prstGeom prst="rect">
-            <a:avLst/>
-          </a:prstGeom>
-          <a:solidFill>
-            <a:srgbClr val="1A202C"/>
-          </a:solidFill>
-          <a:ln>
-            <a:noFill/>
-          </a:ln>
-        </p:spPr>
-        <p:style>
-          <a:lnRef idx="1">
-            <a:schemeClr val="accent1"/>
-          </a:lnRef>
-          <a:fillRef idx="3">
-            <a:schemeClr val="accent1"/>
-          </a:fillRef>
-          <a:effectRef idx="2">
-            <a:schemeClr val="accent1"/>
-          </a:effectRef>
-          <a:fontRef idx="minor">
-            <a:schemeClr val="lt1"/>
-          </a:fontRef>
-        </p:style>
-        <p:txBody>
-          <a:bodyPr rtlCol="0" anchor="ctr"/>
-          <a:lstStyle/>
-          <a:p>
-            <a:pPr algn="ctr"/>
-          </a:p>
-        </p:txBody>
-      </p:sp>
-      <p:sp>
-        <p:nvSpPr>
-          <p:cNvPr id="32" name="TextBox 31"/>
-          <p:cNvSpPr txBox="1"/>
-          <p:nvPr/>
-        </p:nvSpPr>
-        <p:spPr>
-          <a:xfrm>
-            <a:off x="6400800" y="1508760"/>
-            <a:ext cx="5212080" cy="347472"/>
-          </a:xfrm>
-          <a:prstGeom prst="rect">
-            <a:avLst/>
-          </a:prstGeom>
-          <a:noFill/>
-        </p:spPr>
-        <p:txBody>
-          <a:bodyPr wrap="square">
-            <a:spAutoFit/>
-          </a:bodyPr>
-          <a:lstStyle/>
-          <a:p>
-            <a:pPr algn="l"/>
-            <a:r>
-              <a:rPr sz="1500" b="1">
-                <a:solidFill>
-                  <a:srgbClr val="FFB800"/>
-                </a:solidFill>
-                <a:latin typeface="Calibri"/>
-              </a:rPr>
-              <a:t>Counterfactual Recommender</a:t>
-            </a:r>
-          </a:p>
-        </p:txBody>
-      </p:sp>
-      <p:sp>
-        <p:nvSpPr>
-          <p:cNvPr id="33" name="TextBox 32"/>
-          <p:cNvSpPr txBox="1"/>
-          <p:nvPr/>
-        </p:nvSpPr>
-        <p:spPr>
-          <a:xfrm>
-            <a:off x="6400800" y="1920240"/>
-            <a:ext cx="5212080" cy="1554480"/>
-          </a:xfrm>
-          <a:prstGeom prst="rect">
-            <a:avLst/>
-          </a:prstGeom>
-          <a:noFill/>
-        </p:spPr>
-        <p:txBody>
-          <a:bodyPr wrap="square">
-            <a:spAutoFit/>
-          </a:bodyPr>
-          <a:lstStyle/>
-          <a:p>
-            <a:pPr algn="l"/>
-            <a:r>
-              <a:rPr sz="1200" b="0">
-                <a:solidFill>
-                  <a:srgbClr val="9CA3AF"/>
-                </a:solidFill>
-                <a:latin typeface="Calibri"/>
-              </a:rPr>
-              <a:t>"How to lower this risk below 20%:"
-auth_outbound_count        delta = -2
-flows_outbound_count       delta = -4
-auth_unique_destinations   delta = -1
-Smallest single-feature change that crosses the decision boundary.
-Computed by the LR sidecar (closed-form). Actionable for an analyst.</a:t>
-            </a:r>
-          </a:p>
-        </p:txBody>
-      </p:sp>
-      <p:sp>
-        <p:nvSpPr>
-          <p:cNvPr id="34" name="Rectangle 33"/>
-          <p:cNvSpPr/>
-          <p:nvPr/>
-        </p:nvSpPr>
-        <p:spPr>
-          <a:xfrm>
-            <a:off x="6217920" y="3749039"/>
-            <a:ext cx="5577840" cy="2697480"/>
-          </a:xfrm>
-          <a:prstGeom prst="rect">
-            <a:avLst/>
-          </a:prstGeom>
-          <a:solidFill>
-            <a:srgbClr val="1A202C"/>
-          </a:solidFill>
-          <a:ln>
-            <a:noFill/>
-          </a:ln>
-        </p:spPr>
-        <p:style>
-          <a:lnRef idx="1">
-            <a:schemeClr val="accent1"/>
-          </a:lnRef>
-          <a:fillRef idx="3">
-            <a:schemeClr val="accent1"/>
-          </a:fillRef>
-          <a:effectRef idx="2">
-            <a:schemeClr val="accent1"/>
-          </a:effectRef>
-          <a:fontRef idx="minor">
-            <a:schemeClr val="lt1"/>
-          </a:fontRef>
-        </p:style>
-        <p:txBody>
-          <a:bodyPr rtlCol="0" anchor="ctr"/>
-          <a:lstStyle/>
-          <a:p>
-            <a:pPr algn="ctr"/>
-          </a:p>
-        </p:txBody>
-      </p:sp>
-      <p:sp>
-        <p:nvSpPr>
-          <p:cNvPr id="35" name="TextBox 34"/>
-          <p:cNvSpPr txBox="1"/>
-          <p:nvPr/>
-        </p:nvSpPr>
-        <p:spPr>
-          <a:xfrm>
-            <a:off x="6400800" y="3840480"/>
-            <a:ext cx="5212080" cy="347472"/>
-          </a:xfrm>
-          <a:prstGeom prst="rect">
-            <a:avLst/>
-          </a:prstGeom>
-          <a:noFill/>
-        </p:spPr>
-        <p:txBody>
-          <a:bodyPr wrap="square">
-            <a:spAutoFit/>
-          </a:bodyPr>
-          <a:lstStyle/>
-          <a:p>
-            <a:pPr algn="l"/>
-            <a:r>
-              <a:rPr sz="1500" b="1">
-                <a:solidFill>
-                  <a:srgbClr val="00D48A"/>
-                </a:solidFill>
-                <a:latin typeface="Calibri"/>
-              </a:rPr>
-              <a:t>Cost-Optimal Threshold</a:t>
-            </a:r>
-          </a:p>
-        </p:txBody>
-      </p:sp>
-      <p:sp>
-        <p:nvSpPr>
-          <p:cNvPr id="36" name="TextBox 35"/>
-          <p:cNvSpPr txBox="1"/>
-          <p:nvPr/>
-        </p:nvSpPr>
-        <p:spPr>
-          <a:xfrm>
-            <a:off x="6400800" y="4251960"/>
-            <a:ext cx="5212080" cy="2011680"/>
-          </a:xfrm>
-          <a:prstGeom prst="rect">
-            <a:avLst/>
-          </a:prstGeom>
-          <a:noFill/>
-        </p:spPr>
-        <p:txBody>
-          <a:bodyPr wrap="square">
-            <a:spAutoFit/>
-          </a:bodyPr>
-          <a:lstStyle/>
-          <a:p>
-            <a:pPr algn="l"/>
-            <a:r>
-              <a:rPr sz="1200" b="0">
-                <a:solidFill>
-                  <a:srgbClr val="9CA3AF"/>
-                </a:solidFill>
-                <a:latin typeface="Calibri"/>
-              </a:rPr>
-              <a:t>Input:
-  cost_fp = $100   (analyst investigation time)
-  cost_fn = $100,000   (breach cost)
-Output: threshold = 0.10
-Minimizes: FP_count × cost_fp + FN_count × cost_fn
-on the validation set. NOT hardcoded to 0.5.</a:t>
+            <a:off x="3212184" y="6492681"/>
+            <a:ext cx="8246938" cy="276999"/>
+          </a:xfrm>
+          <a:prstGeom prst="rect">
+            <a:avLst/>
+          </a:prstGeom>
+          <a:noFill/>
+        </p:spPr>
+        <p:txBody>
+          <a:bodyPr wrap="none">
+            <a:spAutoFit/>
+          </a:bodyPr>
+          <a:lstStyle/>
+          <a:p>
+            <a:r>
+              <a:rPr sz="1200" b="1" dirty="0">
+                <a:solidFill>
+                  <a:srgbClr val="57FB72"/>
+                </a:solidFill>
+              </a:rPr>
+              <a:t>Main takeaway: the model is not a perfect alarm. It is a risk-ranking system that moves rare attack behavior far above random.</a:t>
+            </a:r>
+          </a:p>
+        </p:txBody>
+      </p:sp>
+      <p:sp>
+        <p:nvSpPr>
+          <p:cNvPr id="11" name="TextBox 10"/>
+          <p:cNvSpPr txBox="1"/>
+          <p:nvPr/>
+        </p:nvSpPr>
+        <p:spPr>
+          <a:xfrm>
+            <a:off x="240384" y="6560820"/>
+            <a:ext cx="5943600" cy="228600"/>
+          </a:xfrm>
+          <a:prstGeom prst="rect">
+            <a:avLst/>
+          </a:prstGeom>
+          <a:noFill/>
+        </p:spPr>
+        <p:txBody>
+          <a:bodyPr wrap="none">
+            <a:spAutoFit/>
+          </a:bodyPr>
+          <a:lstStyle/>
+          <a:p>
+            <a:r>
+              <a:rPr sz="900" b="0" dirty="0">
+                <a:solidFill>
+                  <a:srgbClr val="5A5A5A"/>
+                </a:solidFill>
+              </a:rPr>
+              <a:t>Mark Crisci  |  LANL ML Final Project  |  10/14</a:t>
+            </a:r>
+          </a:p>
+        </p:txBody>
+      </p:sp>
+      <p:sp>
+        <p:nvSpPr>
+          <p:cNvPr id="12" name="TextBox 11">
+            <a:extLst>
+              <a:ext uri="{FF2B5EF4-FFF2-40B4-BE49-F238E27FC236}">
+                <a16:creationId xmlns:a16="http://schemas.microsoft.com/office/drawing/2014/main" id="{966B0844-54C4-9A9E-5857-55BD8CC91136}"/>
+              </a:ext>
+            </a:extLst>
+          </p:cNvPr>
+          <p:cNvSpPr txBox="1"/>
+          <p:nvPr/>
+        </p:nvSpPr>
+        <p:spPr>
+          <a:xfrm>
+            <a:off x="3689100" y="3313089"/>
+            <a:ext cx="2674873" cy="855184"/>
+          </a:xfrm>
+          <a:prstGeom prst="rect">
+            <a:avLst/>
+          </a:prstGeom>
+          <a:noFill/>
+        </p:spPr>
+        <p:txBody>
+          <a:bodyPr wrap="square" rtlCol="0">
+            <a:spAutoFit/>
+          </a:bodyPr>
+          <a:lstStyle/>
+          <a:p>
+            <a:r>
+              <a:rPr lang="en-US" sz="1200" dirty="0">
+                <a:solidFill>
+                  <a:srgbClr val="FFC000"/>
+                </a:solidFill>
+                <a:highlight>
+                  <a:srgbClr val="000000"/>
+                </a:highlight>
+              </a:rPr>
+              <a:t>The PR curve looks visually compressed because the random baseline is only 0.000043are positives.</a:t>
+            </a:r>
+          </a:p>
+          <a:p>
+            <a:endParaRPr lang="en-US" sz="1200" dirty="0">
+              <a:solidFill>
+                <a:srgbClr val="FFC000"/>
+              </a:solidFill>
+              <a:highlight>
+                <a:srgbClr val="000000"/>
+              </a:highlight>
+            </a:endParaRPr>
+          </a:p>
+        </p:txBody>
+      </p:sp>
+      <p:sp>
+        <p:nvSpPr>
+          <p:cNvPr id="13" name="TextBox 12">
+            <a:extLst>
+              <a:ext uri="{FF2B5EF4-FFF2-40B4-BE49-F238E27FC236}">
+                <a16:creationId xmlns:a16="http://schemas.microsoft.com/office/drawing/2014/main" id="{D5D41689-0C24-EA4E-9AEF-E2B90A7CABB0}"/>
+              </a:ext>
+            </a:extLst>
+          </p:cNvPr>
+          <p:cNvSpPr txBox="1"/>
+          <p:nvPr/>
+        </p:nvSpPr>
+        <p:spPr>
+          <a:xfrm>
+            <a:off x="8613214" y="1962937"/>
+            <a:ext cx="1443094" cy="3754874"/>
+          </a:xfrm>
+          <a:prstGeom prst="rect">
+            <a:avLst/>
+          </a:prstGeom>
+          <a:noFill/>
+        </p:spPr>
+        <p:txBody>
+          <a:bodyPr wrap="square" rtlCol="0">
+            <a:spAutoFit/>
+          </a:bodyPr>
+          <a:lstStyle/>
+          <a:p>
+            <a:r>
+              <a:rPr lang="en-US" sz="1400" dirty="0">
+                <a:solidFill>
+                  <a:srgbClr val="FFC000"/>
+                </a:solidFill>
+                <a:highlight>
+                  <a:srgbClr val="000000"/>
+                </a:highlight>
+              </a:rPr>
+              <a:t> 0.881 </a:t>
+            </a:r>
+          </a:p>
+          <a:p>
+            <a:endParaRPr lang="en-US" sz="1400" dirty="0">
+              <a:solidFill>
+                <a:srgbClr val="FFC000"/>
+              </a:solidFill>
+              <a:highlight>
+                <a:srgbClr val="000000"/>
+              </a:highlight>
+            </a:endParaRPr>
+          </a:p>
+          <a:p>
+            <a:endParaRPr lang="en-US" sz="1400" dirty="0">
+              <a:solidFill>
+                <a:srgbClr val="FFC000"/>
+              </a:solidFill>
+              <a:highlight>
+                <a:srgbClr val="000000"/>
+              </a:highlight>
+            </a:endParaRPr>
+          </a:p>
+          <a:p>
+            <a:endParaRPr lang="en-US" sz="1400" dirty="0">
+              <a:solidFill>
+                <a:srgbClr val="FFC000"/>
+              </a:solidFill>
+              <a:highlight>
+                <a:srgbClr val="000000"/>
+              </a:highlight>
+            </a:endParaRPr>
+          </a:p>
+          <a:p>
+            <a:endParaRPr lang="en-US" sz="1400" dirty="0">
+              <a:solidFill>
+                <a:srgbClr val="FFC000"/>
+              </a:solidFill>
+              <a:highlight>
+                <a:srgbClr val="000000"/>
+              </a:highlight>
+            </a:endParaRPr>
+          </a:p>
+          <a:p>
+            <a:endParaRPr lang="en-US" sz="1400" dirty="0">
+              <a:solidFill>
+                <a:srgbClr val="FFC000"/>
+              </a:solidFill>
+              <a:highlight>
+                <a:srgbClr val="000000"/>
+              </a:highlight>
+            </a:endParaRPr>
+          </a:p>
+          <a:p>
+            <a:endParaRPr lang="en-US" sz="1400" dirty="0">
+              <a:solidFill>
+                <a:srgbClr val="FFC000"/>
+              </a:solidFill>
+              <a:highlight>
+                <a:srgbClr val="000000"/>
+              </a:highlight>
+            </a:endParaRPr>
+          </a:p>
+          <a:p>
+            <a:endParaRPr lang="en-US" sz="1400" dirty="0">
+              <a:solidFill>
+                <a:srgbClr val="FFC000"/>
+              </a:solidFill>
+              <a:highlight>
+                <a:srgbClr val="000000"/>
+              </a:highlight>
+            </a:endParaRPr>
+          </a:p>
+          <a:p>
+            <a:endParaRPr lang="en-US" sz="1400" dirty="0">
+              <a:solidFill>
+                <a:srgbClr val="FFC000"/>
+              </a:solidFill>
+              <a:highlight>
+                <a:srgbClr val="000000"/>
+              </a:highlight>
+            </a:endParaRPr>
+          </a:p>
+          <a:p>
+            <a:endParaRPr lang="en-US" sz="1400" dirty="0">
+              <a:solidFill>
+                <a:srgbClr val="FFC000"/>
+              </a:solidFill>
+              <a:highlight>
+                <a:srgbClr val="000000"/>
+              </a:highlight>
+            </a:endParaRPr>
+          </a:p>
+          <a:p>
+            <a:endParaRPr lang="en-US" sz="1400" dirty="0">
+              <a:solidFill>
+                <a:srgbClr val="FFC000"/>
+              </a:solidFill>
+              <a:highlight>
+                <a:srgbClr val="000000"/>
+              </a:highlight>
+            </a:endParaRPr>
+          </a:p>
+          <a:p>
+            <a:endParaRPr lang="en-US" sz="1400" dirty="0">
+              <a:solidFill>
+                <a:srgbClr val="FFC000"/>
+              </a:solidFill>
+              <a:highlight>
+                <a:srgbClr val="000000"/>
+              </a:highlight>
+            </a:endParaRPr>
+          </a:p>
+          <a:p>
+            <a:endParaRPr lang="en-US" sz="1400" dirty="0">
+              <a:solidFill>
+                <a:srgbClr val="FFC000"/>
+              </a:solidFill>
+              <a:highlight>
+                <a:srgbClr val="000000"/>
+              </a:highlight>
+            </a:endParaRPr>
+          </a:p>
+          <a:p>
+            <a:endParaRPr lang="en-US" sz="1400" dirty="0">
+              <a:solidFill>
+                <a:srgbClr val="FFC000"/>
+              </a:solidFill>
+              <a:highlight>
+                <a:srgbClr val="000000"/>
+              </a:highlight>
+            </a:endParaRPr>
+          </a:p>
+          <a:p>
+            <a:endParaRPr lang="en-US" sz="1400" dirty="0">
+              <a:solidFill>
+                <a:srgbClr val="FFC000"/>
+              </a:solidFill>
+              <a:highlight>
+                <a:srgbClr val="000000"/>
+              </a:highlight>
+            </a:endParaRPr>
+          </a:p>
+          <a:p>
+            <a:r>
+              <a:rPr lang="en-US" sz="1400" dirty="0">
+                <a:solidFill>
+                  <a:schemeClr val="tx2">
+                    <a:lumMod val="40000"/>
+                    <a:lumOff val="60000"/>
+                  </a:schemeClr>
+                </a:solidFill>
+                <a:highlight>
+                  <a:srgbClr val="000000"/>
+                </a:highlight>
+              </a:rPr>
+              <a:t>0.03905.</a:t>
+            </a:r>
+          </a:p>
+          <a:p>
+            <a:endParaRPr lang="en-US" sz="1400" dirty="0">
+              <a:solidFill>
+                <a:srgbClr val="FFC000"/>
+              </a:solidFill>
+              <a:highlight>
+                <a:srgbClr val="000000"/>
+              </a:highlight>
+            </a:endParaRPr>
+          </a:p>
+        </p:txBody>
+      </p:sp>
+      <p:sp>
+        <p:nvSpPr>
+          <p:cNvPr id="14" name="TextBox 13">
+            <a:extLst>
+              <a:ext uri="{FF2B5EF4-FFF2-40B4-BE49-F238E27FC236}">
+                <a16:creationId xmlns:a16="http://schemas.microsoft.com/office/drawing/2014/main" id="{EF2D1DE3-5B4D-B9D8-FE2C-E31656A4AA31}"/>
+              </a:ext>
+            </a:extLst>
+          </p:cNvPr>
+          <p:cNvSpPr txBox="1"/>
+          <p:nvPr/>
+        </p:nvSpPr>
+        <p:spPr>
+          <a:xfrm>
+            <a:off x="1621410" y="1962937"/>
+            <a:ext cx="923827" cy="323165"/>
+          </a:xfrm>
+          <a:prstGeom prst="rect">
+            <a:avLst/>
+          </a:prstGeom>
+          <a:noFill/>
+        </p:spPr>
+        <p:txBody>
+          <a:bodyPr wrap="square" rtlCol="0">
+            <a:spAutoFit/>
+          </a:bodyPr>
+          <a:lstStyle/>
+          <a:p>
+            <a:r>
+              <a:rPr lang="en-US" sz="1500" dirty="0">
+                <a:solidFill>
+                  <a:schemeClr val="accent6"/>
+                </a:solidFill>
+                <a:highlight>
+                  <a:srgbClr val="000000"/>
+                </a:highlight>
+              </a:rPr>
+              <a:t>0.838</a:t>
+            </a:r>
+          </a:p>
+        </p:txBody>
+      </p:sp>
+      <p:sp>
+        <p:nvSpPr>
+          <p:cNvPr id="15" name="TextBox 14">
+            <a:extLst>
+              <a:ext uri="{FF2B5EF4-FFF2-40B4-BE49-F238E27FC236}">
+                <a16:creationId xmlns:a16="http://schemas.microsoft.com/office/drawing/2014/main" id="{31884EF1-3E63-23D1-5DE2-34D4AA86AF96}"/>
+              </a:ext>
+            </a:extLst>
+          </p:cNvPr>
+          <p:cNvSpPr txBox="1"/>
+          <p:nvPr/>
+        </p:nvSpPr>
+        <p:spPr>
+          <a:xfrm>
+            <a:off x="1432874" y="5556228"/>
+            <a:ext cx="1027522" cy="323165"/>
+          </a:xfrm>
+          <a:prstGeom prst="rect">
+            <a:avLst/>
+          </a:prstGeom>
+          <a:noFill/>
+        </p:spPr>
+        <p:txBody>
+          <a:bodyPr wrap="square" rtlCol="0">
+            <a:spAutoFit/>
+          </a:bodyPr>
+          <a:lstStyle/>
+          <a:p>
+            <a:r>
+              <a:rPr lang="en-US" sz="1500" dirty="0">
+                <a:solidFill>
+                  <a:schemeClr val="tx2">
+                    <a:lumMod val="40000"/>
+                    <a:lumOff val="60000"/>
+                  </a:schemeClr>
+                </a:solidFill>
+                <a:highlight>
+                  <a:srgbClr val="000000"/>
+                </a:highlight>
+              </a:rPr>
+              <a:t>0.00161</a:t>
             </a:r>
           </a:p>
         </p:txBody>
@@ -4684,42 +4063,160 @@
 </file>
 
 <file path=ppt/slides/slide11.xml><?xml version="1.0" encoding="utf-8"?>
-<p:sld xmlns:a="http://schemas.openxmlformats.org/drawingml/2006/main" xmlns:p="http://schemas.openxmlformats.org/presentationml/2006/main" xmlns:r="http://schemas.openxmlformats.org/officeDocument/2006/relationships">
+<p:sld xmlns:a="http://schemas.openxmlformats.org/drawingml/2006/main" xmlns:r="http://schemas.openxmlformats.org/officeDocument/2006/relationships" xmlns:p="http://schemas.openxmlformats.org/presentationml/2006/main">
   <p:cSld>
-    <p:bg>
-      <p:bgPr>
-        <a:solidFill>
-          <a:srgbClr val="0D1117"/>
-        </a:solidFill>
-        <a:effectLst/>
-      </p:bgPr>
-    </p:bg>
     <p:spTree>
       <p:nvGrpSpPr>
         <p:cNvPr id="1" name=""/>
         <p:cNvGrpSpPr/>
         <p:nvPr/>
       </p:nvGrpSpPr>
-      <p:grpSpPr/>
-      <p:sp>
-        <p:nvSpPr>
-          <p:cNvPr id="2" name="Rectangle 1"/>
+      <p:grpSpPr>
+        <a:xfrm>
+          <a:off x="0" y="0"/>
+          <a:ext cx="0" cy="0"/>
+          <a:chOff x="0" y="0"/>
+          <a:chExt cx="0" cy="0"/>
+        </a:xfrm>
+      </p:grpSpPr>
+      <p:sp>
+        <p:nvSpPr>
+          <p:cNvPr id="2" name="TextBox 1"/>
+          <p:cNvSpPr txBox="1"/>
+          <p:nvPr/>
+        </p:nvSpPr>
+        <p:spPr>
+          <a:xfrm>
+            <a:off x="411480" y="182880"/>
+            <a:ext cx="7319953" cy="523220"/>
+          </a:xfrm>
+          <a:prstGeom prst="rect">
+            <a:avLst/>
+          </a:prstGeom>
+          <a:noFill/>
+        </p:spPr>
+        <p:txBody>
+          <a:bodyPr wrap="none">
+            <a:spAutoFit/>
+          </a:bodyPr>
+          <a:lstStyle/>
+          <a:p>
+            <a:r>
+              <a:rPr sz="2800" b="1" dirty="0">
+                <a:solidFill>
+                  <a:srgbClr val="57FB72"/>
+                </a:solidFill>
+                <a:highlight>
+                  <a:srgbClr val="000000"/>
+                </a:highlight>
+              </a:rPr>
+              <a:t>Winning Model Diagnostics: Confusion Matrices</a:t>
+            </a:r>
+          </a:p>
+        </p:txBody>
+      </p:sp>
+      <p:sp>
+        <p:nvSpPr>
+          <p:cNvPr id="3" name="TextBox 2"/>
+          <p:cNvSpPr txBox="1"/>
+          <p:nvPr/>
+        </p:nvSpPr>
+        <p:spPr>
+          <a:xfrm>
+            <a:off x="438912" y="658368"/>
+            <a:ext cx="4512582" cy="292388"/>
+          </a:xfrm>
+          <a:prstGeom prst="rect">
+            <a:avLst/>
+          </a:prstGeom>
+          <a:noFill/>
+        </p:spPr>
+        <p:txBody>
+          <a:bodyPr wrap="none">
+            <a:spAutoFit/>
+          </a:bodyPr>
+          <a:lstStyle/>
+          <a:p>
+            <a:r>
+              <a:rPr lang="en-US" sz="1300" b="0" dirty="0">
+                <a:solidFill>
+                  <a:schemeClr val="bg2"/>
+                </a:solidFill>
+              </a:rPr>
+              <a:t>Validation and test operating-point behavior at threshold = 0.10</a:t>
+            </a:r>
+          </a:p>
+        </p:txBody>
+      </p:sp>
+      <p:pic>
+        <p:nvPicPr>
+          <p:cNvPr id="4" name="Picture 3" descr="lgbm_confusion_matrix_validation.png"/>
+          <p:cNvPicPr>
+            <a:picLocks noChangeAspect="1"/>
+          </p:cNvPicPr>
+          <p:nvPr/>
+        </p:nvPicPr>
+        <p:blipFill>
+          <a:blip r:embed="rId2"/>
+          <a:stretch>
+            <a:fillRect/>
+          </a:stretch>
+        </p:blipFill>
+        <p:spPr>
+          <a:xfrm>
+            <a:off x="457200" y="1005840"/>
+            <a:ext cx="4709160" cy="4586722"/>
+          </a:xfrm>
+          <a:prstGeom prst="rect">
+            <a:avLst/>
+          </a:prstGeom>
+        </p:spPr>
+      </p:pic>
+      <p:pic>
+        <p:nvPicPr>
+          <p:cNvPr id="5" name="Picture 4" descr="lgbm_confusion_matrix_test.png"/>
+          <p:cNvPicPr>
+            <a:picLocks noChangeAspect="1"/>
+          </p:cNvPicPr>
+          <p:nvPr/>
+        </p:nvPicPr>
+        <p:blipFill>
+          <a:blip r:embed="rId3"/>
+          <a:stretch>
+            <a:fillRect/>
+          </a:stretch>
+        </p:blipFill>
+        <p:spPr>
+          <a:xfrm>
+            <a:off x="5166360" y="1005840"/>
+            <a:ext cx="4709160" cy="4586722"/>
+          </a:xfrm>
+          <a:prstGeom prst="rect">
+            <a:avLst/>
+          </a:prstGeom>
+        </p:spPr>
+      </p:pic>
+      <p:sp>
+        <p:nvSpPr>
+          <p:cNvPr id="6" name="Rectangle 5"/>
           <p:cNvSpPr/>
           <p:nvPr/>
         </p:nvSpPr>
         <p:spPr>
           <a:xfrm>
-            <a:off x="0" y="0"/>
-            <a:ext cx="12188952" cy="1280160"/>
+            <a:off x="9829800" y="1005840"/>
+            <a:ext cx="2183858" cy="4586722"/>
           </a:xfrm>
           <a:prstGeom prst="rect">
             <a:avLst/>
           </a:prstGeom>
           <a:solidFill>
-            <a:srgbClr val="1A202C"/>
+            <a:srgbClr val="F5F7FA"/>
           </a:solidFill>
           <a:ln>
-            <a:noFill/>
+            <a:solidFill>
+              <a:srgbClr val="DCE1E6"/>
+            </a:solidFill>
           </a:ln>
         </p:spPr>
         <p:style>
@@ -4741,154 +4238,7 @@
           <a:lstStyle/>
           <a:p>
             <a:pPr algn="ctr"/>
-          </a:p>
-        </p:txBody>
-      </p:sp>
-      <p:sp>
-        <p:nvSpPr>
-          <p:cNvPr id="3" name="TextBox 2"/>
-          <p:cNvSpPr txBox="1"/>
-          <p:nvPr/>
-        </p:nvSpPr>
-        <p:spPr>
-          <a:xfrm>
-            <a:off x="457200" y="91440"/>
-            <a:ext cx="10058400" cy="640080"/>
-          </a:xfrm>
-          <a:prstGeom prst="rect">
-            <a:avLst/>
-          </a:prstGeom>
-          <a:noFill/>
-        </p:spPr>
-        <p:txBody>
-          <a:bodyPr wrap="square">
-            <a:spAutoFit/>
-          </a:bodyPr>
-          <a:lstStyle/>
-          <a:p>
-            <a:pPr algn="l"/>
-            <a:r>
-              <a:rPr sz="2800" b="1">
-                <a:solidFill>
-                  <a:srgbClr val="00D48A"/>
-                </a:solidFill>
-                <a:latin typeface="Calibri"/>
-              </a:rPr>
-              <a:t>Why Threshold 0.5 is Wrong — and How to Fix It</a:t>
-            </a:r>
-          </a:p>
-        </p:txBody>
-      </p:sp>
-      <p:sp>
-        <p:nvSpPr>
-          <p:cNvPr id="4" name="TextBox 3"/>
-          <p:cNvSpPr txBox="1"/>
-          <p:nvPr/>
-        </p:nvSpPr>
-        <p:spPr>
-          <a:xfrm>
-            <a:off x="457200" y="731520"/>
-            <a:ext cx="10058400" cy="457200"/>
-          </a:xfrm>
-          <a:prstGeom prst="rect">
-            <a:avLst/>
-          </a:prstGeom>
-          <a:noFill/>
-        </p:spPr>
-        <p:txBody>
-          <a:bodyPr wrap="square">
-            <a:spAutoFit/>
-          </a:bodyPr>
-          <a:lstStyle/>
-          <a:p>
-            <a:pPr algn="l"/>
-            <a:r>
-              <a:rPr sz="1600" b="0">
-                <a:solidFill>
-                  <a:srgbClr val="9CA3AF"/>
-                </a:solidFill>
-                <a:latin typeface="Calibri"/>
-              </a:rPr>
-              <a:t>The threshold is a business decision, not a hyperparameter</a:t>
-            </a:r>
-          </a:p>
-        </p:txBody>
-      </p:sp>
-      <p:sp>
-        <p:nvSpPr>
-          <p:cNvPr id="5" name="TextBox 4"/>
-          <p:cNvSpPr txBox="1"/>
-          <p:nvPr/>
-        </p:nvSpPr>
-        <p:spPr>
-          <a:xfrm>
-            <a:off x="274320" y="6492240"/>
-            <a:ext cx="10972800" cy="320040"/>
-          </a:xfrm>
-          <a:prstGeom prst="rect">
-            <a:avLst/>
-          </a:prstGeom>
-          <a:noFill/>
-        </p:spPr>
-        <p:txBody>
-          <a:bodyPr wrap="square">
-            <a:spAutoFit/>
-          </a:bodyPr>
-          <a:lstStyle/>
-          <a:p>
-            <a:pPr algn="l"/>
-            <a:r>
-              <a:rPr sz="1100" b="0">
-                <a:solidFill>
-                  <a:srgbClr val="9CA3AF"/>
-                </a:solidFill>
-                <a:latin typeface="Calibri"/>
-              </a:rPr>
-              <a:t>Mark Crisci  |  LANL ML Final Project  |  11/12</a:t>
-            </a:r>
-          </a:p>
-        </p:txBody>
-      </p:sp>
-      <p:sp>
-        <p:nvSpPr>
-          <p:cNvPr id="6" name="Rectangle 5"/>
-          <p:cNvSpPr/>
-          <p:nvPr/>
-        </p:nvSpPr>
-        <p:spPr>
-          <a:xfrm>
-            <a:off x="365760" y="1417320"/>
-            <a:ext cx="5394960" cy="2926080"/>
-          </a:xfrm>
-          <a:prstGeom prst="rect">
-            <a:avLst/>
-          </a:prstGeom>
-          <a:solidFill>
-            <a:srgbClr val="1A202C"/>
-          </a:solidFill>
-          <a:ln>
-            <a:noFill/>
-          </a:ln>
-        </p:spPr>
-        <p:style>
-          <a:lnRef idx="1">
-            <a:schemeClr val="accent1"/>
-          </a:lnRef>
-          <a:fillRef idx="3">
-            <a:schemeClr val="accent1"/>
-          </a:fillRef>
-          <a:effectRef idx="2">
-            <a:schemeClr val="accent1"/>
-          </a:effectRef>
-          <a:fontRef idx="minor">
-            <a:schemeClr val="lt1"/>
-          </a:fontRef>
-        </p:style>
-        <p:txBody>
-          <a:bodyPr rtlCol="0" anchor="ctr"/>
-          <a:lstStyle/>
-          <a:p>
-            <a:pPr algn="ctr"/>
+            <a:endParaRPr/>
           </a:p>
         </p:txBody>
       </p:sp>
@@ -4900,29 +4250,264 @@
         </p:nvSpPr>
         <p:spPr>
           <a:xfrm>
-            <a:off x="548640" y="1508760"/>
-            <a:ext cx="5029200" cy="347472"/>
-          </a:xfrm>
-          <a:prstGeom prst="rect">
-            <a:avLst/>
-          </a:prstGeom>
-          <a:noFill/>
-        </p:spPr>
-        <p:txBody>
-          <a:bodyPr wrap="square">
-            <a:spAutoFit/>
-          </a:bodyPr>
-          <a:lstStyle/>
-          <a:p>
-            <a:pPr algn="l"/>
-            <a:r>
-              <a:rPr sz="1500" b="1">
-                <a:solidFill>
-                  <a:srgbClr val="FF4D4D"/>
-                </a:solidFill>
-                <a:latin typeface="Calibri"/>
-              </a:rPr>
-              <a:t>At threshold = 0.5  (sklearn default)</a:t>
+            <a:off x="9749059" y="1017959"/>
+            <a:ext cx="2264599" cy="3931846"/>
+          </a:xfrm>
+          <a:prstGeom prst="rect">
+            <a:avLst/>
+          </a:prstGeom>
+          <a:noFill/>
+        </p:spPr>
+        <p:txBody>
+          <a:bodyPr wrap="square">
+            <a:spAutoFit/>
+          </a:bodyPr>
+          <a:lstStyle/>
+          <a:p>
+            <a:r>
+              <a:rPr sz="1400" b="1" dirty="0">
+                <a:solidFill>
+                  <a:srgbClr val="0B1F3B"/>
+                </a:solidFill>
+              </a:rPr>
+              <a:t>Operational reading</a:t>
+            </a:r>
+          </a:p>
+          <a:p>
+            <a:pPr>
+              <a:defRPr sz="1050">
+                <a:solidFill>
+                  <a:srgbClr val="1E1E1E"/>
+                </a:solidFill>
+              </a:defRPr>
+            </a:pPr>
+            <a:endParaRPr lang="en-US" dirty="0"/>
+          </a:p>
+          <a:p>
+            <a:pPr>
+              <a:defRPr sz="1050">
+                <a:solidFill>
+                  <a:srgbClr val="1E1E1E"/>
+                </a:solidFill>
+              </a:defRPr>
+            </a:pPr>
+            <a:endParaRPr lang="en-US" dirty="0"/>
+          </a:p>
+          <a:p>
+            <a:pPr>
+              <a:defRPr sz="1050">
+                <a:solidFill>
+                  <a:srgbClr val="1E1E1E"/>
+                </a:solidFill>
+              </a:defRPr>
+            </a:pPr>
+            <a:r>
+              <a:rPr dirty="0"/>
+              <a:t>Validation: </a:t>
+            </a:r>
+            <a:endParaRPr lang="en-US" dirty="0"/>
+          </a:p>
+          <a:p>
+            <a:pPr>
+              <a:defRPr sz="1050">
+                <a:solidFill>
+                  <a:srgbClr val="1E1E1E"/>
+                </a:solidFill>
+              </a:defRPr>
+            </a:pPr>
+            <a:r>
+              <a:rPr b="1" i="1" dirty="0"/>
+              <a:t>TP = 23</a:t>
+            </a:r>
+            <a:r>
+              <a:rPr lang="en-US" b="1" i="1" dirty="0"/>
+              <a:t> </a:t>
+            </a:r>
+          </a:p>
+          <a:p>
+            <a:pPr>
+              <a:defRPr sz="1050">
+                <a:solidFill>
+                  <a:srgbClr val="1E1E1E"/>
+                </a:solidFill>
+              </a:defRPr>
+            </a:pPr>
+            <a:r>
+              <a:rPr b="1" i="1" dirty="0"/>
+              <a:t>FN = 96</a:t>
+            </a:r>
+            <a:endParaRPr lang="en-US" b="1" i="1" dirty="0"/>
+          </a:p>
+          <a:p>
+            <a:pPr>
+              <a:defRPr sz="1050">
+                <a:solidFill>
+                  <a:srgbClr val="1E1E1E"/>
+                </a:solidFill>
+              </a:defRPr>
+            </a:pPr>
+            <a:r>
+              <a:rPr b="1" i="1" dirty="0"/>
+              <a:t>FP = 57,773</a:t>
+            </a:r>
+            <a:endParaRPr lang="en-US" b="1" i="1" dirty="0"/>
+          </a:p>
+          <a:p>
+            <a:pPr>
+              <a:defRPr sz="1050">
+                <a:solidFill>
+                  <a:srgbClr val="1E1E1E"/>
+                </a:solidFill>
+              </a:defRPr>
+            </a:pPr>
+            <a:endParaRPr lang="en-US" dirty="0"/>
+          </a:p>
+          <a:p>
+            <a:pPr>
+              <a:defRPr sz="1050">
+                <a:solidFill>
+                  <a:srgbClr val="1E1E1E"/>
+                </a:solidFill>
+              </a:defRPr>
+            </a:pPr>
+            <a:endParaRPr dirty="0"/>
+          </a:p>
+          <a:p>
+            <a:pPr>
+              <a:defRPr sz="1050">
+                <a:solidFill>
+                  <a:srgbClr val="1E1E1E"/>
+                </a:solidFill>
+              </a:defRPr>
+            </a:pPr>
+            <a:r>
+              <a:rPr dirty="0"/>
+              <a:t>Test: </a:t>
+            </a:r>
+            <a:endParaRPr lang="en-US" dirty="0"/>
+          </a:p>
+          <a:p>
+            <a:pPr>
+              <a:defRPr sz="1050">
+                <a:solidFill>
+                  <a:srgbClr val="1E1E1E"/>
+                </a:solidFill>
+              </a:defRPr>
+            </a:pPr>
+            <a:r>
+              <a:rPr b="1" i="1" dirty="0"/>
+              <a:t>TP = 28 </a:t>
+            </a:r>
+            <a:endParaRPr lang="en-US" b="1" i="1" dirty="0"/>
+          </a:p>
+          <a:p>
+            <a:pPr>
+              <a:defRPr sz="1050">
+                <a:solidFill>
+                  <a:srgbClr val="1E1E1E"/>
+                </a:solidFill>
+              </a:defRPr>
+            </a:pPr>
+            <a:r>
+              <a:rPr b="1" i="1" dirty="0"/>
+              <a:t>FN = 91</a:t>
+            </a:r>
+            <a:endParaRPr lang="en-US" b="1" i="1" dirty="0"/>
+          </a:p>
+          <a:p>
+            <a:pPr>
+              <a:defRPr sz="1050">
+                <a:solidFill>
+                  <a:srgbClr val="1E1E1E"/>
+                </a:solidFill>
+              </a:defRPr>
+            </a:pPr>
+            <a:r>
+              <a:rPr b="1" i="1" dirty="0"/>
+              <a:t>FP = 57,53</a:t>
+            </a:r>
+            <a:r>
+              <a:rPr lang="en-US" b="1" i="1" dirty="0"/>
+              <a:t>5</a:t>
+            </a:r>
+          </a:p>
+          <a:p>
+            <a:pPr>
+              <a:defRPr sz="1050">
+                <a:solidFill>
+                  <a:srgbClr val="1E1E1E"/>
+                </a:solidFill>
+              </a:defRPr>
+            </a:pPr>
+            <a:endParaRPr lang="en-US" dirty="0"/>
+          </a:p>
+          <a:p>
+            <a:pPr>
+              <a:defRPr sz="1050">
+                <a:solidFill>
+                  <a:srgbClr val="1E1E1E"/>
+                </a:solidFill>
+              </a:defRPr>
+            </a:pPr>
+            <a:endParaRPr dirty="0"/>
+          </a:p>
+          <a:p>
+            <a:pPr>
+              <a:defRPr sz="1050">
+                <a:solidFill>
+                  <a:srgbClr val="1E1E1E"/>
+                </a:solidFill>
+              </a:defRPr>
+            </a:pPr>
+            <a:r>
+              <a:rPr i="1" dirty="0"/>
+              <a:t>At threshold 0.10, </a:t>
+            </a:r>
+            <a:endParaRPr lang="en-US" i="1" dirty="0"/>
+          </a:p>
+          <a:p>
+            <a:pPr>
+              <a:defRPr sz="1050">
+                <a:solidFill>
+                  <a:srgbClr val="1E1E1E"/>
+                </a:solidFill>
+              </a:defRPr>
+            </a:pPr>
+            <a:r>
+              <a:rPr i="1" dirty="0"/>
+              <a:t>the test model catches 28 of 119 attacks, about 23.5% recall.</a:t>
+            </a:r>
+            <a:endParaRPr lang="en-US" i="1" dirty="0"/>
+          </a:p>
+          <a:p>
+            <a:pPr>
+              <a:defRPr sz="1050">
+                <a:solidFill>
+                  <a:srgbClr val="1E1E1E"/>
+                </a:solidFill>
+              </a:defRPr>
+            </a:pPr>
+            <a:endParaRPr lang="en-US" dirty="0"/>
+          </a:p>
+          <a:p>
+            <a:pPr>
+              <a:defRPr sz="1050">
+                <a:solidFill>
+                  <a:srgbClr val="1E1E1E"/>
+                </a:solidFill>
+              </a:defRPr>
+            </a:pPr>
+            <a:r>
+              <a:rPr lang="en-US" dirty="0"/>
+              <a:t>Th</a:t>
+            </a:r>
+            <a:r>
+              <a:rPr dirty="0"/>
+              <a:t>e false positives are the analyst workload. </a:t>
+            </a:r>
+            <a:r>
+              <a:rPr sz="1200" b="1" i="1" dirty="0"/>
+              <a:t>Raising the threshold reduces noise but misses more attacks.</a:t>
             </a:r>
           </a:p>
         </p:txBody>
@@ -4935,234 +4520,60 @@
         </p:nvSpPr>
         <p:spPr>
           <a:xfrm>
-            <a:off x="548640" y="1920240"/>
-            <a:ext cx="5029200" cy="2286000"/>
-          </a:xfrm>
-          <a:prstGeom prst="rect">
-            <a:avLst/>
-          </a:prstGeom>
-          <a:noFill/>
-        </p:spPr>
-        <p:txBody>
-          <a:bodyPr wrap="square">
-            <a:spAutoFit/>
-          </a:bodyPr>
-          <a:lstStyle/>
-          <a:p>
-            <a:pPr algn="l"/>
-            <a:r>
-              <a:rPr sz="1400" b="0">
-                <a:solidFill>
-                  <a:srgbClr val="9CA3AF"/>
-                </a:solidFill>
-                <a:latin typeface="Calibri"/>
-              </a:rPr>
-              <a:t>Predicted positives:  ≈ 0
-True positives:        ≈ 0
-False positives:       ≈ 0
-False negatives:       ≈ ALL 119 test attacks
-The model looks broken. It isn't.
-It ranks positives correctly — 0.5 is just too high
-a cutoff for a 0.004% positive rate.</a:t>
-            </a:r>
-          </a:p>
-        </p:txBody>
-      </p:sp>
-      <p:sp>
-        <p:nvSpPr>
-          <p:cNvPr id="9" name="Rectangle 8"/>
-          <p:cNvSpPr/>
-          <p:nvPr/>
-        </p:nvSpPr>
-        <p:spPr>
-          <a:xfrm>
-            <a:off x="6217920" y="1417320"/>
-            <a:ext cx="5577840" cy="2926080"/>
-          </a:xfrm>
-          <a:prstGeom prst="rect">
-            <a:avLst/>
-          </a:prstGeom>
-          <a:solidFill>
-            <a:srgbClr val="1A202C"/>
-          </a:solidFill>
-          <a:ln>
-            <a:noFill/>
-          </a:ln>
-        </p:spPr>
-        <p:style>
-          <a:lnRef idx="1">
-            <a:schemeClr val="accent1"/>
-          </a:lnRef>
-          <a:fillRef idx="3">
-            <a:schemeClr val="accent1"/>
-          </a:fillRef>
-          <a:effectRef idx="2">
-            <a:schemeClr val="accent1"/>
-          </a:effectRef>
-          <a:fontRef idx="minor">
-            <a:schemeClr val="lt1"/>
-          </a:fontRef>
-        </p:style>
-        <p:txBody>
-          <a:bodyPr rtlCol="0" anchor="ctr"/>
-          <a:lstStyle/>
-          <a:p>
-            <a:pPr algn="ctr"/>
-          </a:p>
-        </p:txBody>
-      </p:sp>
-      <p:sp>
-        <p:nvSpPr>
-          <p:cNvPr id="10" name="TextBox 9"/>
-          <p:cNvSpPr txBox="1"/>
-          <p:nvPr/>
-        </p:nvSpPr>
-        <p:spPr>
-          <a:xfrm>
-            <a:off x="6400800" y="1508760"/>
-            <a:ext cx="5212080" cy="347472"/>
-          </a:xfrm>
-          <a:prstGeom prst="rect">
-            <a:avLst/>
-          </a:prstGeom>
-          <a:noFill/>
-        </p:spPr>
-        <p:txBody>
-          <a:bodyPr wrap="square">
-            <a:spAutoFit/>
-          </a:bodyPr>
-          <a:lstStyle/>
-          <a:p>
-            <a:pPr algn="l"/>
-            <a:r>
-              <a:rPr sz="1500" b="1">
-                <a:solidFill>
-                  <a:srgbClr val="00D48A"/>
-                </a:solidFill>
-                <a:latin typeface="Calibri"/>
-              </a:rPr>
-              <a:t>At cost-optimal threshold = 0.10</a:t>
-            </a:r>
-          </a:p>
-        </p:txBody>
-      </p:sp>
-      <p:sp>
-        <p:nvSpPr>
-          <p:cNvPr id="11" name="TextBox 10"/>
-          <p:cNvSpPr txBox="1"/>
-          <p:nvPr/>
-        </p:nvSpPr>
-        <p:spPr>
-          <a:xfrm>
-            <a:off x="6400800" y="1920240"/>
-            <a:ext cx="5212080" cy="2286000"/>
-          </a:xfrm>
-          <a:prstGeom prst="rect">
-            <a:avLst/>
-          </a:prstGeom>
-          <a:noFill/>
-        </p:spPr>
-        <p:txBody>
-          <a:bodyPr wrap="square">
-            <a:spAutoFit/>
-          </a:bodyPr>
-          <a:lstStyle/>
-          <a:p>
-            <a:pPr algn="l"/>
-            <a:r>
-              <a:rPr sz="1400" b="0">
-                <a:solidFill>
-                  <a:srgbClr val="9CA3AF"/>
-                </a:solidFill>
-                <a:latin typeface="Calibri"/>
-              </a:rPr>
-              <a:t>Predicted positives:  controlled volume
-True positives:        meaningful recall
-False positives:       manageable noise
-False negatives:       minimized given costs
-Same model. Same predictions.
-Different operating point — tuned to your
-actual FP/FN cost ratio.</a:t>
-            </a:r>
-          </a:p>
-        </p:txBody>
-      </p:sp>
-      <p:sp>
-        <p:nvSpPr>
-          <p:cNvPr id="12" name="Rectangle 11"/>
-          <p:cNvSpPr/>
-          <p:nvPr/>
-        </p:nvSpPr>
-        <p:spPr>
-          <a:xfrm>
-            <a:off x="365760" y="4526280"/>
-            <a:ext cx="11430000" cy="1188720"/>
-          </a:xfrm>
-          <a:prstGeom prst="rect">
-            <a:avLst/>
-          </a:prstGeom>
-          <a:solidFill>
-            <a:srgbClr val="1A202C"/>
-          </a:solidFill>
-          <a:ln>
-            <a:noFill/>
-          </a:ln>
-        </p:spPr>
-        <p:style>
-          <a:lnRef idx="1">
-            <a:schemeClr val="accent1"/>
-          </a:lnRef>
-          <a:fillRef idx="3">
-            <a:schemeClr val="accent1"/>
-          </a:fillRef>
-          <a:effectRef idx="2">
-            <a:schemeClr val="accent1"/>
-          </a:effectRef>
-          <a:fontRef idx="minor">
-            <a:schemeClr val="lt1"/>
-          </a:fontRef>
-        </p:style>
-        <p:txBody>
-          <a:bodyPr rtlCol="0" anchor="ctr"/>
-          <a:lstStyle/>
-          <a:p>
-            <a:pPr algn="ctr"/>
-          </a:p>
-        </p:txBody>
-      </p:sp>
-      <p:sp>
-        <p:nvSpPr>
-          <p:cNvPr id="13" name="TextBox 12"/>
-          <p:cNvSpPr txBox="1"/>
-          <p:nvPr/>
-        </p:nvSpPr>
-        <p:spPr>
-          <a:xfrm>
-            <a:off x="548640" y="4617720"/>
-            <a:ext cx="11064240" cy="1005840"/>
-          </a:xfrm>
-          <a:prstGeom prst="rect">
-            <a:avLst/>
-          </a:prstGeom>
-          <a:noFill/>
-        </p:spPr>
-        <p:txBody>
-          <a:bodyPr wrap="square">
-            <a:spAutoFit/>
-          </a:bodyPr>
-          <a:lstStyle/>
-          <a:p>
-            <a:pPr algn="l"/>
-            <a:r>
-              <a:rPr sz="1400" b="0">
-                <a:solidFill>
-                  <a:srgbClr val="9CA3AF"/>
-                </a:solidFill>
-                <a:latin typeface="Calibri"/>
-              </a:rPr>
-              <a:t>The cost-matrix calculator takes cost_fp and cost_fn, sweeps threshold 0.001→0.999,
-computes total_cost = FP × cost_fp + FN × cost_fn at each step on the validation set,
-and returns the threshold with the lowest expected operational cost.</a:t>
+            <a:off x="548640" y="6126480"/>
+            <a:ext cx="8648521" cy="261610"/>
+          </a:xfrm>
+          <a:prstGeom prst="rect">
+            <a:avLst/>
+          </a:prstGeom>
+          <a:noFill/>
+        </p:spPr>
+        <p:txBody>
+          <a:bodyPr wrap="none">
+            <a:spAutoFit/>
+          </a:bodyPr>
+          <a:lstStyle/>
+          <a:p>
+            <a:r>
+              <a:rPr sz="1100" b="1" dirty="0">
+                <a:solidFill>
+                  <a:srgbClr val="57FB72"/>
+                </a:solidFill>
+              </a:rPr>
+              <a:t>This is why the threshold is a business decision: lower threshold = more recall, more alerts; higher threshold = fewer alerts, more missed attacks.</a:t>
+            </a:r>
+          </a:p>
+        </p:txBody>
+      </p:sp>
+      <p:sp>
+        <p:nvSpPr>
+          <p:cNvPr id="9" name="TextBox 8"/>
+          <p:cNvSpPr txBox="1"/>
+          <p:nvPr/>
+        </p:nvSpPr>
+        <p:spPr>
+          <a:xfrm>
+            <a:off x="457200" y="6446520"/>
+            <a:ext cx="5943600" cy="228600"/>
+          </a:xfrm>
+          <a:prstGeom prst="rect">
+            <a:avLst/>
+          </a:prstGeom>
+          <a:noFill/>
+        </p:spPr>
+        <p:txBody>
+          <a:bodyPr wrap="none">
+            <a:spAutoFit/>
+          </a:bodyPr>
+          <a:lstStyle/>
+          <a:p>
+            <a:r>
+              <a:rPr sz="900" b="0" dirty="0">
+                <a:solidFill>
+                  <a:srgbClr val="5A5A5A"/>
+                </a:solidFill>
+              </a:rPr>
+              <a:t>Mark Crisci  |  LANL ML Final Project  |  11/14</a:t>
             </a:r>
           </a:p>
         </p:txBody>
@@ -5176,23 +4587,22 @@
 </file>
 
 <file path=ppt/slides/slide12.xml><?xml version="1.0" encoding="utf-8"?>
-<p:sld xmlns:a="http://schemas.openxmlformats.org/drawingml/2006/main" xmlns:p="http://schemas.openxmlformats.org/presentationml/2006/main" xmlns:r="http://schemas.openxmlformats.org/officeDocument/2006/relationships">
+<p:sld xmlns:a="http://schemas.openxmlformats.org/drawingml/2006/main" xmlns:r="http://schemas.openxmlformats.org/officeDocument/2006/relationships" xmlns:p="http://schemas.openxmlformats.org/presentationml/2006/main">
   <p:cSld>
-    <p:bg>
-      <p:bgPr>
-        <a:solidFill>
-          <a:srgbClr val="0D1117"/>
-        </a:solidFill>
-        <a:effectLst/>
-      </p:bgPr>
-    </p:bg>
     <p:spTree>
       <p:nvGrpSpPr>
         <p:cNvPr id="1" name=""/>
         <p:cNvGrpSpPr/>
         <p:nvPr/>
       </p:nvGrpSpPr>
-      <p:grpSpPr/>
+      <p:grpSpPr>
+        <a:xfrm>
+          <a:off x="0" y="0"/>
+          <a:ext cx="0" cy="0"/>
+          <a:chOff x="0" y="0"/>
+          <a:chExt cx="0" cy="0"/>
+        </a:xfrm>
+      </p:grpSpPr>
       <p:sp>
         <p:nvSpPr>
           <p:cNvPr id="2" name="Rectangle 1"/>
@@ -5233,6 +4643,7 @@
           <a:lstStyle/>
           <a:p>
             <a:pPr algn="ctr"/>
+            <a:endParaRPr/>
           </a:p>
         </p:txBody>
       </p:sp>
@@ -5266,7 +4677,7 @@
                 </a:solidFill>
                 <a:latin typeface="Calibri"/>
               </a:rPr>
-              <a:t>Limitations &amp; Stakeholder Recommendation</a:t>
+              <a:t>Model Interpretation — TreeSHAP + Counterfactuals</a:t>
             </a:r>
           </a:p>
         </p:txBody>
@@ -5301,7 +4712,7 @@
                 </a:solidFill>
                 <a:latin typeface="Calibri"/>
               </a:rPr>
-              <a:t>Honest weaknesses + what I'd tell a SOC director</a:t>
+              <a:t>Exact per-feature contributions — not an approximation</a:t>
             </a:r>
           </a:p>
         </p:txBody>
@@ -5336,56 +4747,21 @@
                 </a:solidFill>
                 <a:latin typeface="Calibri"/>
               </a:rPr>
-              <a:t>Mark Crisci  |  LANL ML Final Project  |  12/12</a:t>
-            </a:r>
-          </a:p>
-        </p:txBody>
-      </p:sp>
-      <p:sp>
-        <p:nvSpPr>
-          <p:cNvPr id="6" name="TextBox 5"/>
-          <p:cNvSpPr txBox="1"/>
+              <a:t>Mark Crisci  |  LANL ML Final Project  |  10/12</a:t>
+            </a:r>
+          </a:p>
+        </p:txBody>
+      </p:sp>
+      <p:sp>
+        <p:nvSpPr>
+          <p:cNvPr id="6" name="Rectangle 5"/>
+          <p:cNvSpPr/>
           <p:nvPr/>
         </p:nvSpPr>
         <p:spPr>
           <a:xfrm>
             <a:off x="365760" y="1417320"/>
-            <a:ext cx="5486400" cy="365760"/>
-          </a:xfrm>
-          <a:prstGeom prst="rect">
-            <a:avLst/>
-          </a:prstGeom>
-          <a:noFill/>
-        </p:spPr>
-        <p:txBody>
-          <a:bodyPr wrap="square">
-            <a:spAutoFit/>
-          </a:bodyPr>
-          <a:lstStyle/>
-          <a:p>
-            <a:pPr algn="l"/>
-            <a:r>
-              <a:rPr sz="1600" b="1">
-                <a:solidFill>
-                  <a:srgbClr val="FFB800"/>
-                </a:solidFill>
-                <a:latin typeface="Calibri"/>
-              </a:rPr>
-              <a:t>Limitations</a:t>
-            </a:r>
-          </a:p>
-        </p:txBody>
-      </p:sp>
-      <p:sp>
-        <p:nvSpPr>
-          <p:cNvPr id="7" name="Rectangle 6"/>
-          <p:cNvSpPr/>
-          <p:nvPr/>
-        </p:nvSpPr>
-        <p:spPr>
-          <a:xfrm>
-            <a:off x="365760" y="1874519"/>
-            <a:ext cx="5577840" cy="685800"/>
+            <a:ext cx="5577840" cy="5029200"/>
           </a:xfrm>
           <a:prstGeom prst="rect">
             <a:avLst/>
@@ -5416,41 +4792,86 @@
           <a:lstStyle/>
           <a:p>
             <a:pPr algn="ctr"/>
-          </a:p>
-        </p:txBody>
-      </p:sp>
-      <p:sp>
-        <p:nvSpPr>
-          <p:cNvPr id="8" name="TextBox 7"/>
-          <p:cNvSpPr txBox="1"/>
-          <p:nvPr/>
-        </p:nvSpPr>
-        <p:spPr>
-          <a:xfrm>
-            <a:off x="548640" y="1920239"/>
-            <a:ext cx="5212080" cy="301752"/>
-          </a:xfrm>
-          <a:prstGeom prst="rect">
-            <a:avLst/>
-          </a:prstGeom>
-          <a:noFill/>
-        </p:spPr>
-        <p:txBody>
-          <a:bodyPr wrap="square">
-            <a:spAutoFit/>
-          </a:bodyPr>
-          <a:lstStyle/>
-          <a:p>
-            <a:pPr algn="l"/>
-            <a:r>
-              <a:rPr sz="1300" b="1">
-                <a:solidFill>
-                  <a:srgbClr val="FFB800"/>
-                </a:solidFill>
-                <a:latin typeface="Calibri"/>
-              </a:rPr>
-              <a:t>Streaming is simulated</a:t>
-            </a:r>
+            <a:endParaRPr/>
+          </a:p>
+        </p:txBody>
+      </p:sp>
+      <p:sp>
+        <p:nvSpPr>
+          <p:cNvPr id="7" name="TextBox 6"/>
+          <p:cNvSpPr txBox="1"/>
+          <p:nvPr/>
+        </p:nvSpPr>
+        <p:spPr>
+          <a:xfrm>
+            <a:off x="548640" y="1508760"/>
+            <a:ext cx="5212080" cy="347472"/>
+          </a:xfrm>
+          <a:prstGeom prst="rect">
+            <a:avLst/>
+          </a:prstGeom>
+          <a:noFill/>
+        </p:spPr>
+        <p:txBody>
+          <a:bodyPr wrap="square">
+            <a:spAutoFit/>
+          </a:bodyPr>
+          <a:lstStyle/>
+          <a:p>
+            <a:pPr algn="l"/>
+            <a:r>
+              <a:rPr sz="1500" b="1">
+                <a:solidFill>
+                  <a:srgbClr val="00D48A"/>
+                </a:solidFill>
+                <a:latin typeface="Calibri"/>
+              </a:rPr>
+              <a:t>Why did the model flag this host?</a:t>
+            </a:r>
+          </a:p>
+        </p:txBody>
+      </p:sp>
+      <p:sp>
+        <p:nvSpPr>
+          <p:cNvPr id="8" name="Rectangle 7"/>
+          <p:cNvSpPr/>
+          <p:nvPr/>
+        </p:nvSpPr>
+        <p:spPr>
+          <a:xfrm>
+            <a:off x="548640" y="1965960"/>
+            <a:ext cx="2304288" cy="274320"/>
+          </a:xfrm>
+          <a:prstGeom prst="rect">
+            <a:avLst/>
+          </a:prstGeom>
+          <a:solidFill>
+            <a:srgbClr val="FF4D4D"/>
+          </a:solidFill>
+          <a:ln>
+            <a:noFill/>
+          </a:ln>
+        </p:spPr>
+        <p:style>
+          <a:lnRef idx="1">
+            <a:schemeClr val="accent1"/>
+          </a:lnRef>
+          <a:fillRef idx="3">
+            <a:schemeClr val="accent1"/>
+          </a:fillRef>
+          <a:effectRef idx="2">
+            <a:schemeClr val="accent1"/>
+          </a:effectRef>
+          <a:fontRef idx="minor">
+            <a:schemeClr val="lt1"/>
+          </a:fontRef>
+        </p:style>
+        <p:txBody>
+          <a:bodyPr rtlCol="0" anchor="ctr"/>
+          <a:lstStyle/>
+          <a:p>
+            <a:pPr algn="ctr"/>
+            <a:endParaRPr/>
           </a:p>
         </p:txBody>
       </p:sp>
@@ -5462,8 +4883,797 @@
         </p:nvSpPr>
         <p:spPr>
           <a:xfrm>
-            <a:off x="548640" y="2240279"/>
-            <a:ext cx="5212080" cy="256032"/>
+            <a:off x="3429000" y="1965960"/>
+            <a:ext cx="1828800" cy="274320"/>
+          </a:xfrm>
+          <a:prstGeom prst="rect">
+            <a:avLst/>
+          </a:prstGeom>
+          <a:noFill/>
+        </p:spPr>
+        <p:txBody>
+          <a:bodyPr wrap="square">
+            <a:spAutoFit/>
+          </a:bodyPr>
+          <a:lstStyle/>
+          <a:p>
+            <a:pPr algn="l"/>
+            <a:r>
+              <a:rPr sz="1100" b="0">
+                <a:solidFill>
+                  <a:srgbClr val="FFFFFF"/>
+                </a:solidFill>
+                <a:latin typeface="Calibri"/>
+              </a:rPr>
+              <a:t>flows_outbound_count</a:t>
+            </a:r>
+          </a:p>
+        </p:txBody>
+      </p:sp>
+      <p:sp>
+        <p:nvSpPr>
+          <p:cNvPr id="10" name="TextBox 9"/>
+          <p:cNvSpPr txBox="1"/>
+          <p:nvPr/>
+        </p:nvSpPr>
+        <p:spPr>
+          <a:xfrm>
+            <a:off x="5349240" y="1965960"/>
+            <a:ext cx="548640" cy="274320"/>
+          </a:xfrm>
+          <a:prstGeom prst="rect">
+            <a:avLst/>
+          </a:prstGeom>
+          <a:noFill/>
+        </p:spPr>
+        <p:txBody>
+          <a:bodyPr wrap="square">
+            <a:spAutoFit/>
+          </a:bodyPr>
+          <a:lstStyle/>
+          <a:p>
+            <a:pPr algn="l"/>
+            <a:r>
+              <a:rPr sz="1100" b="1">
+                <a:solidFill>
+                  <a:srgbClr val="FF4D4D"/>
+                </a:solidFill>
+                <a:latin typeface="Calibri"/>
+              </a:rPr>
+              <a:t>+0.84</a:t>
+            </a:r>
+          </a:p>
+        </p:txBody>
+      </p:sp>
+      <p:sp>
+        <p:nvSpPr>
+          <p:cNvPr id="11" name="Rectangle 10"/>
+          <p:cNvSpPr/>
+          <p:nvPr/>
+        </p:nvSpPr>
+        <p:spPr>
+          <a:xfrm>
+            <a:off x="548640" y="2313432"/>
+            <a:ext cx="1673352" cy="274320"/>
+          </a:xfrm>
+          <a:prstGeom prst="rect">
+            <a:avLst/>
+          </a:prstGeom>
+          <a:solidFill>
+            <a:srgbClr val="FF4D4D"/>
+          </a:solidFill>
+          <a:ln>
+            <a:noFill/>
+          </a:ln>
+        </p:spPr>
+        <p:style>
+          <a:lnRef idx="1">
+            <a:schemeClr val="accent1"/>
+          </a:lnRef>
+          <a:fillRef idx="3">
+            <a:schemeClr val="accent1"/>
+          </a:fillRef>
+          <a:effectRef idx="2">
+            <a:schemeClr val="accent1"/>
+          </a:effectRef>
+          <a:fontRef idx="minor">
+            <a:schemeClr val="lt1"/>
+          </a:fontRef>
+        </p:style>
+        <p:txBody>
+          <a:bodyPr rtlCol="0" anchor="ctr"/>
+          <a:lstStyle/>
+          <a:p>
+            <a:pPr algn="ctr"/>
+            <a:endParaRPr/>
+          </a:p>
+        </p:txBody>
+      </p:sp>
+      <p:sp>
+        <p:nvSpPr>
+          <p:cNvPr id="12" name="TextBox 11"/>
+          <p:cNvSpPr txBox="1"/>
+          <p:nvPr/>
+        </p:nvSpPr>
+        <p:spPr>
+          <a:xfrm>
+            <a:off x="3429000" y="2313432"/>
+            <a:ext cx="1828800" cy="274320"/>
+          </a:xfrm>
+          <a:prstGeom prst="rect">
+            <a:avLst/>
+          </a:prstGeom>
+          <a:noFill/>
+        </p:spPr>
+        <p:txBody>
+          <a:bodyPr wrap="square">
+            <a:spAutoFit/>
+          </a:bodyPr>
+          <a:lstStyle/>
+          <a:p>
+            <a:pPr algn="l"/>
+            <a:r>
+              <a:rPr sz="1100" b="0">
+                <a:solidFill>
+                  <a:srgbClr val="FFFFFF"/>
+                </a:solidFill>
+                <a:latin typeface="Calibri"/>
+              </a:rPr>
+              <a:t>auth_unique_destinations</a:t>
+            </a:r>
+          </a:p>
+        </p:txBody>
+      </p:sp>
+      <p:sp>
+        <p:nvSpPr>
+          <p:cNvPr id="13" name="TextBox 12"/>
+          <p:cNvSpPr txBox="1"/>
+          <p:nvPr/>
+        </p:nvSpPr>
+        <p:spPr>
+          <a:xfrm>
+            <a:off x="5349240" y="2313432"/>
+            <a:ext cx="548640" cy="274320"/>
+          </a:xfrm>
+          <a:prstGeom prst="rect">
+            <a:avLst/>
+          </a:prstGeom>
+          <a:noFill/>
+        </p:spPr>
+        <p:txBody>
+          <a:bodyPr wrap="square">
+            <a:spAutoFit/>
+          </a:bodyPr>
+          <a:lstStyle/>
+          <a:p>
+            <a:pPr algn="l"/>
+            <a:r>
+              <a:rPr sz="1100" b="1">
+                <a:solidFill>
+                  <a:srgbClr val="FF4D4D"/>
+                </a:solidFill>
+                <a:latin typeface="Calibri"/>
+              </a:rPr>
+              <a:t>+0.61</a:t>
+            </a:r>
+          </a:p>
+        </p:txBody>
+      </p:sp>
+      <p:sp>
+        <p:nvSpPr>
+          <p:cNvPr id="14" name="Rectangle 13"/>
+          <p:cNvSpPr/>
+          <p:nvPr/>
+        </p:nvSpPr>
+        <p:spPr>
+          <a:xfrm>
+            <a:off x="548640" y="2660904"/>
+            <a:ext cx="1152144" cy="274320"/>
+          </a:xfrm>
+          <a:prstGeom prst="rect">
+            <a:avLst/>
+          </a:prstGeom>
+          <a:solidFill>
+            <a:srgbClr val="FF4D4D"/>
+          </a:solidFill>
+          <a:ln>
+            <a:noFill/>
+          </a:ln>
+        </p:spPr>
+        <p:style>
+          <a:lnRef idx="1">
+            <a:schemeClr val="accent1"/>
+          </a:lnRef>
+          <a:fillRef idx="3">
+            <a:schemeClr val="accent1"/>
+          </a:fillRef>
+          <a:effectRef idx="2">
+            <a:schemeClr val="accent1"/>
+          </a:effectRef>
+          <a:fontRef idx="minor">
+            <a:schemeClr val="lt1"/>
+          </a:fontRef>
+        </p:style>
+        <p:txBody>
+          <a:bodyPr rtlCol="0" anchor="ctr"/>
+          <a:lstStyle/>
+          <a:p>
+            <a:pPr algn="ctr"/>
+            <a:endParaRPr/>
+          </a:p>
+        </p:txBody>
+      </p:sp>
+      <p:sp>
+        <p:nvSpPr>
+          <p:cNvPr id="15" name="TextBox 14"/>
+          <p:cNvSpPr txBox="1"/>
+          <p:nvPr/>
+        </p:nvSpPr>
+        <p:spPr>
+          <a:xfrm>
+            <a:off x="3429000" y="2660904"/>
+            <a:ext cx="1828800" cy="274320"/>
+          </a:xfrm>
+          <a:prstGeom prst="rect">
+            <a:avLst/>
+          </a:prstGeom>
+          <a:noFill/>
+        </p:spPr>
+        <p:txBody>
+          <a:bodyPr wrap="square">
+            <a:spAutoFit/>
+          </a:bodyPr>
+          <a:lstStyle/>
+          <a:p>
+            <a:pPr algn="l"/>
+            <a:r>
+              <a:rPr sz="1100" b="0">
+                <a:solidFill>
+                  <a:srgbClr val="FFFFFF"/>
+                </a:solidFill>
+                <a:latin typeface="Calibri"/>
+              </a:rPr>
+              <a:t>auth_total</a:t>
+            </a:r>
+          </a:p>
+        </p:txBody>
+      </p:sp>
+      <p:sp>
+        <p:nvSpPr>
+          <p:cNvPr id="16" name="TextBox 15"/>
+          <p:cNvSpPr txBox="1"/>
+          <p:nvPr/>
+        </p:nvSpPr>
+        <p:spPr>
+          <a:xfrm>
+            <a:off x="5349240" y="2660904"/>
+            <a:ext cx="548640" cy="274320"/>
+          </a:xfrm>
+          <a:prstGeom prst="rect">
+            <a:avLst/>
+          </a:prstGeom>
+          <a:noFill/>
+        </p:spPr>
+        <p:txBody>
+          <a:bodyPr wrap="square">
+            <a:spAutoFit/>
+          </a:bodyPr>
+          <a:lstStyle/>
+          <a:p>
+            <a:pPr algn="l"/>
+            <a:r>
+              <a:rPr sz="1100" b="1">
+                <a:solidFill>
+                  <a:srgbClr val="FF4D4D"/>
+                </a:solidFill>
+                <a:latin typeface="Calibri"/>
+              </a:rPr>
+              <a:t>+0.42</a:t>
+            </a:r>
+          </a:p>
+        </p:txBody>
+      </p:sp>
+      <p:sp>
+        <p:nvSpPr>
+          <p:cNvPr id="17" name="Rectangle 16"/>
+          <p:cNvSpPr/>
+          <p:nvPr/>
+        </p:nvSpPr>
+        <p:spPr>
+          <a:xfrm>
+            <a:off x="548640" y="3008376"/>
+            <a:ext cx="795528" cy="274320"/>
+          </a:xfrm>
+          <a:prstGeom prst="rect">
+            <a:avLst/>
+          </a:prstGeom>
+          <a:solidFill>
+            <a:srgbClr val="FF4D4D"/>
+          </a:solidFill>
+          <a:ln>
+            <a:noFill/>
+          </a:ln>
+        </p:spPr>
+        <p:style>
+          <a:lnRef idx="1">
+            <a:schemeClr val="accent1"/>
+          </a:lnRef>
+          <a:fillRef idx="3">
+            <a:schemeClr val="accent1"/>
+          </a:fillRef>
+          <a:effectRef idx="2">
+            <a:schemeClr val="accent1"/>
+          </a:effectRef>
+          <a:fontRef idx="minor">
+            <a:schemeClr val="lt1"/>
+          </a:fontRef>
+        </p:style>
+        <p:txBody>
+          <a:bodyPr rtlCol="0" anchor="ctr"/>
+          <a:lstStyle/>
+          <a:p>
+            <a:pPr algn="ctr"/>
+            <a:endParaRPr/>
+          </a:p>
+        </p:txBody>
+      </p:sp>
+      <p:sp>
+        <p:nvSpPr>
+          <p:cNvPr id="18" name="TextBox 17"/>
+          <p:cNvSpPr txBox="1"/>
+          <p:nvPr/>
+        </p:nvSpPr>
+        <p:spPr>
+          <a:xfrm>
+            <a:off x="3429000" y="3008376"/>
+            <a:ext cx="1828800" cy="274320"/>
+          </a:xfrm>
+          <a:prstGeom prst="rect">
+            <a:avLst/>
+          </a:prstGeom>
+          <a:noFill/>
+        </p:spPr>
+        <p:txBody>
+          <a:bodyPr wrap="square">
+            <a:spAutoFit/>
+          </a:bodyPr>
+          <a:lstStyle/>
+          <a:p>
+            <a:pPr algn="l"/>
+            <a:r>
+              <a:rPr sz="1100" b="0">
+                <a:solidFill>
+                  <a:srgbClr val="FFFFFF"/>
+                </a:solidFill>
+                <a:latin typeface="Calibri"/>
+              </a:rPr>
+              <a:t>flows_bytes_total</a:t>
+            </a:r>
+          </a:p>
+        </p:txBody>
+      </p:sp>
+      <p:sp>
+        <p:nvSpPr>
+          <p:cNvPr id="19" name="TextBox 18"/>
+          <p:cNvSpPr txBox="1"/>
+          <p:nvPr/>
+        </p:nvSpPr>
+        <p:spPr>
+          <a:xfrm>
+            <a:off x="5349240" y="3008376"/>
+            <a:ext cx="548640" cy="274320"/>
+          </a:xfrm>
+          <a:prstGeom prst="rect">
+            <a:avLst/>
+          </a:prstGeom>
+          <a:noFill/>
+        </p:spPr>
+        <p:txBody>
+          <a:bodyPr wrap="square">
+            <a:spAutoFit/>
+          </a:bodyPr>
+          <a:lstStyle/>
+          <a:p>
+            <a:pPr algn="l"/>
+            <a:r>
+              <a:rPr sz="1100" b="1">
+                <a:solidFill>
+                  <a:srgbClr val="FF4D4D"/>
+                </a:solidFill>
+                <a:latin typeface="Calibri"/>
+              </a:rPr>
+              <a:t>+0.29</a:t>
+            </a:r>
+          </a:p>
+        </p:txBody>
+      </p:sp>
+      <p:sp>
+        <p:nvSpPr>
+          <p:cNvPr id="20" name="Rectangle 19"/>
+          <p:cNvSpPr/>
+          <p:nvPr/>
+        </p:nvSpPr>
+        <p:spPr>
+          <a:xfrm>
+            <a:off x="2798064" y="3355848"/>
+            <a:ext cx="493776" cy="274320"/>
+          </a:xfrm>
+          <a:prstGeom prst="rect">
+            <a:avLst/>
+          </a:prstGeom>
+          <a:solidFill>
+            <a:srgbClr val="00D48A"/>
+          </a:solidFill>
+          <a:ln>
+            <a:noFill/>
+          </a:ln>
+        </p:spPr>
+        <p:style>
+          <a:lnRef idx="1">
+            <a:schemeClr val="accent1"/>
+          </a:lnRef>
+          <a:fillRef idx="3">
+            <a:schemeClr val="accent1"/>
+          </a:fillRef>
+          <a:effectRef idx="2">
+            <a:schemeClr val="accent1"/>
+          </a:effectRef>
+          <a:fontRef idx="minor">
+            <a:schemeClr val="lt1"/>
+          </a:fontRef>
+        </p:style>
+        <p:txBody>
+          <a:bodyPr rtlCol="0" anchor="ctr"/>
+          <a:lstStyle/>
+          <a:p>
+            <a:pPr algn="ctr"/>
+            <a:endParaRPr/>
+          </a:p>
+        </p:txBody>
+      </p:sp>
+      <p:sp>
+        <p:nvSpPr>
+          <p:cNvPr id="21" name="TextBox 20"/>
+          <p:cNvSpPr txBox="1"/>
+          <p:nvPr/>
+        </p:nvSpPr>
+        <p:spPr>
+          <a:xfrm>
+            <a:off x="3429000" y="3355848"/>
+            <a:ext cx="1828800" cy="274320"/>
+          </a:xfrm>
+          <a:prstGeom prst="rect">
+            <a:avLst/>
+          </a:prstGeom>
+          <a:noFill/>
+        </p:spPr>
+        <p:txBody>
+          <a:bodyPr wrap="square">
+            <a:spAutoFit/>
+          </a:bodyPr>
+          <a:lstStyle/>
+          <a:p>
+            <a:pPr algn="l"/>
+            <a:r>
+              <a:rPr sz="1100" b="0">
+                <a:solidFill>
+                  <a:srgbClr val="FFFFFF"/>
+                </a:solidFill>
+                <a:latin typeface="Calibri"/>
+              </a:rPr>
+              <a:t>dns_lookup_count</a:t>
+            </a:r>
+          </a:p>
+        </p:txBody>
+      </p:sp>
+      <p:sp>
+        <p:nvSpPr>
+          <p:cNvPr id="22" name="TextBox 21"/>
+          <p:cNvSpPr txBox="1"/>
+          <p:nvPr/>
+        </p:nvSpPr>
+        <p:spPr>
+          <a:xfrm>
+            <a:off x="5349240" y="3355848"/>
+            <a:ext cx="548640" cy="274320"/>
+          </a:xfrm>
+          <a:prstGeom prst="rect">
+            <a:avLst/>
+          </a:prstGeom>
+          <a:noFill/>
+        </p:spPr>
+        <p:txBody>
+          <a:bodyPr wrap="square">
+            <a:spAutoFit/>
+          </a:bodyPr>
+          <a:lstStyle/>
+          <a:p>
+            <a:pPr algn="l"/>
+            <a:r>
+              <a:rPr sz="1100" b="1">
+                <a:solidFill>
+                  <a:srgbClr val="00D48A"/>
+                </a:solidFill>
+                <a:latin typeface="Calibri"/>
+              </a:rPr>
+              <a:t>-0.18</a:t>
+            </a:r>
+          </a:p>
+        </p:txBody>
+      </p:sp>
+      <p:sp>
+        <p:nvSpPr>
+          <p:cNvPr id="23" name="Rectangle 22"/>
+          <p:cNvSpPr/>
+          <p:nvPr/>
+        </p:nvSpPr>
+        <p:spPr>
+          <a:xfrm>
+            <a:off x="2441448" y="3703320"/>
+            <a:ext cx="850392" cy="274320"/>
+          </a:xfrm>
+          <a:prstGeom prst="rect">
+            <a:avLst/>
+          </a:prstGeom>
+          <a:solidFill>
+            <a:srgbClr val="00D48A"/>
+          </a:solidFill>
+          <a:ln>
+            <a:noFill/>
+          </a:ln>
+        </p:spPr>
+        <p:style>
+          <a:lnRef idx="1">
+            <a:schemeClr val="accent1"/>
+          </a:lnRef>
+          <a:fillRef idx="3">
+            <a:schemeClr val="accent1"/>
+          </a:fillRef>
+          <a:effectRef idx="2">
+            <a:schemeClr val="accent1"/>
+          </a:effectRef>
+          <a:fontRef idx="minor">
+            <a:schemeClr val="lt1"/>
+          </a:fontRef>
+        </p:style>
+        <p:txBody>
+          <a:bodyPr rtlCol="0" anchor="ctr"/>
+          <a:lstStyle/>
+          <a:p>
+            <a:pPr algn="ctr"/>
+            <a:endParaRPr/>
+          </a:p>
+        </p:txBody>
+      </p:sp>
+      <p:sp>
+        <p:nvSpPr>
+          <p:cNvPr id="24" name="TextBox 23"/>
+          <p:cNvSpPr txBox="1"/>
+          <p:nvPr/>
+        </p:nvSpPr>
+        <p:spPr>
+          <a:xfrm>
+            <a:off x="3429000" y="3703320"/>
+            <a:ext cx="1828800" cy="274320"/>
+          </a:xfrm>
+          <a:prstGeom prst="rect">
+            <a:avLst/>
+          </a:prstGeom>
+          <a:noFill/>
+        </p:spPr>
+        <p:txBody>
+          <a:bodyPr wrap="square">
+            <a:spAutoFit/>
+          </a:bodyPr>
+          <a:lstStyle/>
+          <a:p>
+            <a:pPr algn="l"/>
+            <a:r>
+              <a:rPr sz="1100" b="0">
+                <a:solidFill>
+                  <a:srgbClr val="FFFFFF"/>
+                </a:solidFill>
+                <a:latin typeface="Calibri"/>
+              </a:rPr>
+              <a:t>proc_unique_processes</a:t>
+            </a:r>
+          </a:p>
+        </p:txBody>
+      </p:sp>
+      <p:sp>
+        <p:nvSpPr>
+          <p:cNvPr id="25" name="TextBox 24"/>
+          <p:cNvSpPr txBox="1"/>
+          <p:nvPr/>
+        </p:nvSpPr>
+        <p:spPr>
+          <a:xfrm>
+            <a:off x="5349240" y="3703320"/>
+            <a:ext cx="548640" cy="274320"/>
+          </a:xfrm>
+          <a:prstGeom prst="rect">
+            <a:avLst/>
+          </a:prstGeom>
+          <a:noFill/>
+        </p:spPr>
+        <p:txBody>
+          <a:bodyPr wrap="square">
+            <a:spAutoFit/>
+          </a:bodyPr>
+          <a:lstStyle/>
+          <a:p>
+            <a:pPr algn="l"/>
+            <a:r>
+              <a:rPr sz="1100" b="1">
+                <a:solidFill>
+                  <a:srgbClr val="00D48A"/>
+                </a:solidFill>
+                <a:latin typeface="Calibri"/>
+              </a:rPr>
+              <a:t>-0.31</a:t>
+            </a:r>
+          </a:p>
+        </p:txBody>
+      </p:sp>
+      <p:sp>
+        <p:nvSpPr>
+          <p:cNvPr id="26" name="Rectangle 25"/>
+          <p:cNvSpPr/>
+          <p:nvPr/>
+        </p:nvSpPr>
+        <p:spPr>
+          <a:xfrm>
+            <a:off x="2962656" y="4050792"/>
+            <a:ext cx="329184" cy="274320"/>
+          </a:xfrm>
+          <a:prstGeom prst="rect">
+            <a:avLst/>
+          </a:prstGeom>
+          <a:solidFill>
+            <a:srgbClr val="00D48A"/>
+          </a:solidFill>
+          <a:ln>
+            <a:noFill/>
+          </a:ln>
+        </p:spPr>
+        <p:style>
+          <a:lnRef idx="1">
+            <a:schemeClr val="accent1"/>
+          </a:lnRef>
+          <a:fillRef idx="3">
+            <a:schemeClr val="accent1"/>
+          </a:fillRef>
+          <a:effectRef idx="2">
+            <a:schemeClr val="accent1"/>
+          </a:effectRef>
+          <a:fontRef idx="minor">
+            <a:schemeClr val="lt1"/>
+          </a:fontRef>
+        </p:style>
+        <p:txBody>
+          <a:bodyPr rtlCol="0" anchor="ctr"/>
+          <a:lstStyle/>
+          <a:p>
+            <a:pPr algn="ctr"/>
+            <a:endParaRPr/>
+          </a:p>
+        </p:txBody>
+      </p:sp>
+      <p:sp>
+        <p:nvSpPr>
+          <p:cNvPr id="27" name="TextBox 26"/>
+          <p:cNvSpPr txBox="1"/>
+          <p:nvPr/>
+        </p:nvSpPr>
+        <p:spPr>
+          <a:xfrm>
+            <a:off x="3429000" y="4050792"/>
+            <a:ext cx="1828800" cy="274320"/>
+          </a:xfrm>
+          <a:prstGeom prst="rect">
+            <a:avLst/>
+          </a:prstGeom>
+          <a:noFill/>
+        </p:spPr>
+        <p:txBody>
+          <a:bodyPr wrap="square">
+            <a:spAutoFit/>
+          </a:bodyPr>
+          <a:lstStyle/>
+          <a:p>
+            <a:pPr algn="l"/>
+            <a:r>
+              <a:rPr sz="1100" b="0">
+                <a:solidFill>
+                  <a:srgbClr val="FFFFFF"/>
+                </a:solidFill>
+                <a:latin typeface="Calibri"/>
+              </a:rPr>
+              <a:t>auth_failure_ratio</a:t>
+            </a:r>
+          </a:p>
+        </p:txBody>
+      </p:sp>
+      <p:sp>
+        <p:nvSpPr>
+          <p:cNvPr id="28" name="TextBox 27"/>
+          <p:cNvSpPr txBox="1"/>
+          <p:nvPr/>
+        </p:nvSpPr>
+        <p:spPr>
+          <a:xfrm>
+            <a:off x="5349240" y="4050792"/>
+            <a:ext cx="548640" cy="274320"/>
+          </a:xfrm>
+          <a:prstGeom prst="rect">
+            <a:avLst/>
+          </a:prstGeom>
+          <a:noFill/>
+        </p:spPr>
+        <p:txBody>
+          <a:bodyPr wrap="square">
+            <a:spAutoFit/>
+          </a:bodyPr>
+          <a:lstStyle/>
+          <a:p>
+            <a:pPr algn="l"/>
+            <a:r>
+              <a:rPr sz="1100" b="1">
+                <a:solidFill>
+                  <a:srgbClr val="00D48A"/>
+                </a:solidFill>
+                <a:latin typeface="Calibri"/>
+              </a:rPr>
+              <a:t>-0.12</a:t>
+            </a:r>
+          </a:p>
+        </p:txBody>
+      </p:sp>
+      <p:sp>
+        <p:nvSpPr>
+          <p:cNvPr id="29" name="TextBox 28"/>
+          <p:cNvSpPr txBox="1"/>
+          <p:nvPr/>
+        </p:nvSpPr>
+        <p:spPr>
+          <a:xfrm>
+            <a:off x="548640" y="4526280"/>
+            <a:ext cx="5212080" cy="320040"/>
+          </a:xfrm>
+          <a:prstGeom prst="rect">
+            <a:avLst/>
+          </a:prstGeom>
+          <a:noFill/>
+        </p:spPr>
+        <p:txBody>
+          <a:bodyPr wrap="square">
+            <a:spAutoFit/>
+          </a:bodyPr>
+          <a:lstStyle/>
+          <a:p>
+            <a:pPr algn="l"/>
+            <a:r>
+              <a:rPr sz="1100" b="0">
+                <a:solidFill>
+                  <a:srgbClr val="9CA3AF"/>
+                </a:solidFill>
+                <a:latin typeface="Calibri"/>
+              </a:rPr>
+              <a:t>Red = pushes risk UP  |  Green = pushes risk DOWN  |  Length = magnitude (log-odds)</a:t>
+            </a:r>
+          </a:p>
+        </p:txBody>
+      </p:sp>
+      <p:sp>
+        <p:nvSpPr>
+          <p:cNvPr id="30" name="TextBox 29"/>
+          <p:cNvSpPr txBox="1"/>
+          <p:nvPr/>
+        </p:nvSpPr>
+        <p:spPr>
+          <a:xfrm>
+            <a:off x="548640" y="4937760"/>
+            <a:ext cx="5212080" cy="457200"/>
           </a:xfrm>
           <a:prstGeom prst="rect">
             <a:avLst/>
@@ -5484,21 +5694,22 @@
                 </a:solidFill>
                 <a:latin typeface="Calibri"/>
               </a:rPr>
-              <a:t>CSV replay at 1 event/sec — not live Kinesis ingest</a:t>
-            </a:r>
-          </a:p>
-        </p:txBody>
-      </p:sp>
-      <p:sp>
-        <p:nvSpPr>
-          <p:cNvPr id="10" name="Rectangle 9"/>
+              <a:t>TreeSHAP: exact contributions from LightGBM's booster internals.
+Not a shap library approximation. Reproducible and fast.</a:t>
+            </a:r>
+          </a:p>
+        </p:txBody>
+      </p:sp>
+      <p:sp>
+        <p:nvSpPr>
+          <p:cNvPr id="31" name="Rectangle 30"/>
           <p:cNvSpPr/>
           <p:nvPr/>
         </p:nvSpPr>
         <p:spPr>
           <a:xfrm>
-            <a:off x="365760" y="2624327"/>
-            <a:ext cx="5577840" cy="685800"/>
+            <a:off x="6217920" y="1417320"/>
+            <a:ext cx="5577840" cy="2194560"/>
           </a:xfrm>
           <a:prstGeom prst="rect">
             <a:avLst/>
@@ -5529,54 +5740,55 @@
           <a:lstStyle/>
           <a:p>
             <a:pPr algn="ctr"/>
-          </a:p>
-        </p:txBody>
-      </p:sp>
-      <p:sp>
-        <p:nvSpPr>
-          <p:cNvPr id="11" name="TextBox 10"/>
-          <p:cNvSpPr txBox="1"/>
-          <p:nvPr/>
-        </p:nvSpPr>
-        <p:spPr>
-          <a:xfrm>
-            <a:off x="548640" y="2670047"/>
-            <a:ext cx="5212080" cy="301752"/>
-          </a:xfrm>
-          <a:prstGeom prst="rect">
-            <a:avLst/>
-          </a:prstGeom>
-          <a:noFill/>
-        </p:spPr>
-        <p:txBody>
-          <a:bodyPr wrap="square">
-            <a:spAutoFit/>
-          </a:bodyPr>
-          <a:lstStyle/>
-          <a:p>
-            <a:pPr algn="l"/>
-            <a:r>
-              <a:rPr sz="1300" b="1">
+            <a:endParaRPr/>
+          </a:p>
+        </p:txBody>
+      </p:sp>
+      <p:sp>
+        <p:nvSpPr>
+          <p:cNvPr id="32" name="TextBox 31"/>
+          <p:cNvSpPr txBox="1"/>
+          <p:nvPr/>
+        </p:nvSpPr>
+        <p:spPr>
+          <a:xfrm>
+            <a:off x="6400800" y="1508760"/>
+            <a:ext cx="5212080" cy="347472"/>
+          </a:xfrm>
+          <a:prstGeom prst="rect">
+            <a:avLst/>
+          </a:prstGeom>
+          <a:noFill/>
+        </p:spPr>
+        <p:txBody>
+          <a:bodyPr wrap="square">
+            <a:spAutoFit/>
+          </a:bodyPr>
+          <a:lstStyle/>
+          <a:p>
+            <a:pPr algn="l"/>
+            <a:r>
+              <a:rPr sz="1500" b="1">
                 <a:solidFill>
                   <a:srgbClr val="FFB800"/>
                 </a:solidFill>
                 <a:latin typeface="Calibri"/>
               </a:rPr>
-              <a:t>No calibration analysis</a:t>
-            </a:r>
-          </a:p>
-        </p:txBody>
-      </p:sp>
-      <p:sp>
-        <p:nvSpPr>
-          <p:cNvPr id="12" name="TextBox 11"/>
-          <p:cNvSpPr txBox="1"/>
-          <p:nvPr/>
-        </p:nvSpPr>
-        <p:spPr>
-          <a:xfrm>
-            <a:off x="548640" y="2990087"/>
-            <a:ext cx="5212080" cy="256032"/>
+              <a:t>Counterfactual Recommender</a:t>
+            </a:r>
+          </a:p>
+        </p:txBody>
+      </p:sp>
+      <p:sp>
+        <p:nvSpPr>
+          <p:cNvPr id="33" name="TextBox 32"/>
+          <p:cNvSpPr txBox="1"/>
+          <p:nvPr/>
+        </p:nvSpPr>
+        <p:spPr>
+          <a:xfrm>
+            <a:off x="6400800" y="1920240"/>
+            <a:ext cx="5212080" cy="1554480"/>
           </a:xfrm>
           <a:prstGeom prst="rect">
             <a:avLst/>
@@ -5597,21 +5809,26 @@
                 </a:solidFill>
                 <a:latin typeface="Calibri"/>
               </a:rPr>
-              <a:t>Probabilities rank correctly; not verified as true frequencies</a:t>
-            </a:r>
-          </a:p>
-        </p:txBody>
-      </p:sp>
-      <p:sp>
-        <p:nvSpPr>
-          <p:cNvPr id="13" name="Rectangle 12"/>
+              <a:t>"How to lower this risk below 20%:"
+auth_outbound_count        delta = -2
+flows_outbound_count       delta = -4
+auth_unique_destinations   delta = -1
+Smallest single-feature change that crosses the decision boundary.
+Computed by the LR sidecar (closed-form). Actionable for an analyst.</a:t>
+            </a:r>
+          </a:p>
+        </p:txBody>
+      </p:sp>
+      <p:sp>
+        <p:nvSpPr>
+          <p:cNvPr id="34" name="Rectangle 33"/>
           <p:cNvSpPr/>
           <p:nvPr/>
         </p:nvSpPr>
         <p:spPr>
           <a:xfrm>
-            <a:off x="365760" y="3374135"/>
-            <a:ext cx="5577840" cy="685800"/>
+            <a:off x="6217920" y="3749039"/>
+            <a:ext cx="5577840" cy="2697480"/>
           </a:xfrm>
           <a:prstGeom prst="rect">
             <a:avLst/>
@@ -5642,54 +5859,55 @@
           <a:lstStyle/>
           <a:p>
             <a:pPr algn="ctr"/>
-          </a:p>
-        </p:txBody>
-      </p:sp>
-      <p:sp>
-        <p:nvSpPr>
-          <p:cNvPr id="14" name="TextBox 13"/>
-          <p:cNvSpPr txBox="1"/>
-          <p:nvPr/>
-        </p:nvSpPr>
-        <p:spPr>
-          <a:xfrm>
-            <a:off x="548640" y="3419855"/>
-            <a:ext cx="5212080" cy="301752"/>
-          </a:xfrm>
-          <a:prstGeom prst="rect">
-            <a:avLst/>
-          </a:prstGeom>
-          <a:noFill/>
-        </p:spPr>
-        <p:txBody>
-          <a:bodyPr wrap="square">
-            <a:spAutoFit/>
-          </a:bodyPr>
-          <a:lstStyle/>
-          <a:p>
-            <a:pPr algn="l"/>
-            <a:r>
-              <a:rPr sz="1300" b="1">
-                <a:solidFill>
-                  <a:srgbClr val="FFB800"/>
-                </a:solidFill>
-                <a:latin typeface="Calibri"/>
-              </a:rPr>
-              <a:t>k-fold not used</a:t>
-            </a:r>
-          </a:p>
-        </p:txBody>
-      </p:sp>
-      <p:sp>
-        <p:nvSpPr>
-          <p:cNvPr id="15" name="TextBox 14"/>
-          <p:cNvSpPr txBox="1"/>
-          <p:nvPr/>
-        </p:nvSpPr>
-        <p:spPr>
-          <a:xfrm>
-            <a:off x="548640" y="3739895"/>
-            <a:ext cx="5212080" cy="256032"/>
+            <a:endParaRPr/>
+          </a:p>
+        </p:txBody>
+      </p:sp>
+      <p:sp>
+        <p:nvSpPr>
+          <p:cNvPr id="35" name="TextBox 34"/>
+          <p:cNvSpPr txBox="1"/>
+          <p:nvPr/>
+        </p:nvSpPr>
+        <p:spPr>
+          <a:xfrm>
+            <a:off x="6400800" y="3840480"/>
+            <a:ext cx="5212080" cy="347472"/>
+          </a:xfrm>
+          <a:prstGeom prst="rect">
+            <a:avLst/>
+          </a:prstGeom>
+          <a:noFill/>
+        </p:spPr>
+        <p:txBody>
+          <a:bodyPr wrap="square">
+            <a:spAutoFit/>
+          </a:bodyPr>
+          <a:lstStyle/>
+          <a:p>
+            <a:pPr algn="l"/>
+            <a:r>
+              <a:rPr sz="1500" b="1">
+                <a:solidFill>
+                  <a:srgbClr val="00D48A"/>
+                </a:solidFill>
+                <a:latin typeface="Calibri"/>
+              </a:rPr>
+              <a:t>Cost-Optimal Threshold</a:t>
+            </a:r>
+          </a:p>
+        </p:txBody>
+      </p:sp>
+      <p:sp>
+        <p:nvSpPr>
+          <p:cNvPr id="36" name="TextBox 35"/>
+          <p:cNvSpPr txBox="1"/>
+          <p:nvPr/>
+        </p:nvSpPr>
+        <p:spPr>
+          <a:xfrm>
+            <a:off x="6400800" y="4251960"/>
+            <a:ext cx="5212080" cy="2011680"/>
           </a:xfrm>
           <a:prstGeom prst="rect">
             <a:avLst/>
@@ -5710,21 +5928,51 @@
                 </a:solidFill>
                 <a:latin typeface="Calibri"/>
               </a:rPr>
-              <a:t>Justified by temporal structure; acknowledged as a gap</a:t>
-            </a:r>
-          </a:p>
-        </p:txBody>
-      </p:sp>
-      <p:sp>
-        <p:nvSpPr>
-          <p:cNvPr id="16" name="Rectangle 15"/>
+              <a:t>Input:
+  cost_fp = $100   (analyst investigation time)
+  cost_fn = $100,000   (breach cost)
+Output: threshold = 0.10
+Minimizes: FP_count × cost_fp + FN_count × cost_fn
+on the validation set. NOT hardcoded to 0.5.</a:t>
+            </a:r>
+          </a:p>
+        </p:txBody>
+      </p:sp>
+    </p:spTree>
+  </p:cSld>
+  <p:clrMapOvr>
+    <a:masterClrMapping/>
+  </p:clrMapOvr>
+</p:sld>
+</file>
+
+<file path=ppt/slides/slide13.xml><?xml version="1.0" encoding="utf-8"?>
+<p:sld xmlns:a="http://schemas.openxmlformats.org/drawingml/2006/main" xmlns:r="http://schemas.openxmlformats.org/officeDocument/2006/relationships" xmlns:p="http://schemas.openxmlformats.org/presentationml/2006/main">
+  <p:cSld>
+    <p:spTree>
+      <p:nvGrpSpPr>
+        <p:cNvPr id="1" name=""/>
+        <p:cNvGrpSpPr/>
+        <p:nvPr/>
+      </p:nvGrpSpPr>
+      <p:grpSpPr>
+        <a:xfrm>
+          <a:off x="0" y="0"/>
+          <a:ext cx="0" cy="0"/>
+          <a:chOff x="0" y="0"/>
+          <a:chExt cx="0" cy="0"/>
+        </a:xfrm>
+      </p:grpSpPr>
+      <p:sp>
+        <p:nvSpPr>
+          <p:cNvPr id="2" name="Rectangle 1"/>
           <p:cNvSpPr/>
           <p:nvPr/>
         </p:nvSpPr>
         <p:spPr>
           <a:xfrm>
-            <a:off x="365760" y="4123943"/>
-            <a:ext cx="5577840" cy="685800"/>
+            <a:off x="0" y="0"/>
+            <a:ext cx="12188952" cy="1280160"/>
           </a:xfrm>
           <a:prstGeom prst="rect">
             <a:avLst/>
@@ -5755,89 +6003,125 @@
           <a:lstStyle/>
           <a:p>
             <a:pPr algn="ctr"/>
-          </a:p>
-        </p:txBody>
-      </p:sp>
-      <p:sp>
-        <p:nvSpPr>
-          <p:cNvPr id="17" name="TextBox 16"/>
-          <p:cNvSpPr txBox="1"/>
-          <p:nvPr/>
-        </p:nvSpPr>
-        <p:spPr>
-          <a:xfrm>
-            <a:off x="548640" y="4169663"/>
-            <a:ext cx="5212080" cy="301752"/>
-          </a:xfrm>
-          <a:prstGeom prst="rect">
-            <a:avLst/>
-          </a:prstGeom>
-          <a:noFill/>
-        </p:spPr>
-        <p:txBody>
-          <a:bodyPr wrap="square">
-            <a:spAutoFit/>
-          </a:bodyPr>
-          <a:lstStyle/>
-          <a:p>
-            <a:pPr algn="l"/>
-            <a:r>
-              <a:rPr sz="1300" b="1">
-                <a:solidFill>
-                  <a:srgbClr val="FFB800"/>
-                </a:solidFill>
-                <a:latin typeface="Calibri"/>
-              </a:rPr>
-              <a:t>596 positives total</a:t>
-            </a:r>
-          </a:p>
-        </p:txBody>
-      </p:sp>
-      <p:sp>
-        <p:nvSpPr>
-          <p:cNvPr id="18" name="TextBox 17"/>
-          <p:cNvSpPr txBox="1"/>
-          <p:nvPr/>
-        </p:nvSpPr>
-        <p:spPr>
-          <a:xfrm>
-            <a:off x="548640" y="4489703"/>
-            <a:ext cx="5212080" cy="256032"/>
-          </a:xfrm>
-          <a:prstGeom prst="rect">
-            <a:avLst/>
-          </a:prstGeom>
-          <a:noFill/>
-        </p:spPr>
-        <p:txBody>
-          <a:bodyPr wrap="square">
-            <a:spAutoFit/>
-          </a:bodyPr>
-          <a:lstStyle/>
-          <a:p>
-            <a:pPr algn="l"/>
-            <a:r>
-              <a:rPr sz="1200" b="0">
+            <a:endParaRPr/>
+          </a:p>
+        </p:txBody>
+      </p:sp>
+      <p:sp>
+        <p:nvSpPr>
+          <p:cNvPr id="3" name="TextBox 2"/>
+          <p:cNvSpPr txBox="1"/>
+          <p:nvPr/>
+        </p:nvSpPr>
+        <p:spPr>
+          <a:xfrm>
+            <a:off x="457200" y="91440"/>
+            <a:ext cx="10058400" cy="640080"/>
+          </a:xfrm>
+          <a:prstGeom prst="rect">
+            <a:avLst/>
+          </a:prstGeom>
+          <a:noFill/>
+        </p:spPr>
+        <p:txBody>
+          <a:bodyPr wrap="square">
+            <a:spAutoFit/>
+          </a:bodyPr>
+          <a:lstStyle/>
+          <a:p>
+            <a:pPr algn="l"/>
+            <a:r>
+              <a:rPr sz="2800" b="1">
+                <a:solidFill>
+                  <a:srgbClr val="00D48A"/>
+                </a:solidFill>
+                <a:latin typeface="Calibri"/>
+              </a:rPr>
+              <a:t>Why Threshold 0.5 is Wrong — and How to Fix It</a:t>
+            </a:r>
+          </a:p>
+        </p:txBody>
+      </p:sp>
+      <p:sp>
+        <p:nvSpPr>
+          <p:cNvPr id="4" name="TextBox 3"/>
+          <p:cNvSpPr txBox="1"/>
+          <p:nvPr/>
+        </p:nvSpPr>
+        <p:spPr>
+          <a:xfrm>
+            <a:off x="457200" y="731520"/>
+            <a:ext cx="10058400" cy="457200"/>
+          </a:xfrm>
+          <a:prstGeom prst="rect">
+            <a:avLst/>
+          </a:prstGeom>
+          <a:noFill/>
+        </p:spPr>
+        <p:txBody>
+          <a:bodyPr wrap="square">
+            <a:spAutoFit/>
+          </a:bodyPr>
+          <a:lstStyle/>
+          <a:p>
+            <a:pPr algn="l"/>
+            <a:r>
+              <a:rPr sz="1600" b="0">
                 <a:solidFill>
                   <a:srgbClr val="9CA3AF"/>
                 </a:solidFill>
                 <a:latin typeface="Calibri"/>
               </a:rPr>
-              <a:t>Model generalizes within LANL; external validity unknown</a:t>
-            </a:r>
-          </a:p>
-        </p:txBody>
-      </p:sp>
-      <p:sp>
-        <p:nvSpPr>
-          <p:cNvPr id="19" name="Rectangle 18"/>
+              <a:t>The threshold is a business decision, not a hyperparameter</a:t>
+            </a:r>
+          </a:p>
+        </p:txBody>
+      </p:sp>
+      <p:sp>
+        <p:nvSpPr>
+          <p:cNvPr id="5" name="TextBox 4"/>
+          <p:cNvSpPr txBox="1"/>
+          <p:nvPr/>
+        </p:nvSpPr>
+        <p:spPr>
+          <a:xfrm>
+            <a:off x="274320" y="6492240"/>
+            <a:ext cx="10972800" cy="320040"/>
+          </a:xfrm>
+          <a:prstGeom prst="rect">
+            <a:avLst/>
+          </a:prstGeom>
+          <a:noFill/>
+        </p:spPr>
+        <p:txBody>
+          <a:bodyPr wrap="square">
+            <a:spAutoFit/>
+          </a:bodyPr>
+          <a:lstStyle/>
+          <a:p>
+            <a:pPr algn="l"/>
+            <a:r>
+              <a:rPr sz="1100" b="0">
+                <a:solidFill>
+                  <a:srgbClr val="9CA3AF"/>
+                </a:solidFill>
+                <a:latin typeface="Calibri"/>
+              </a:rPr>
+              <a:t>Mark Crisci  |  LANL ML Final Project  |  11/12</a:t>
+            </a:r>
+          </a:p>
+        </p:txBody>
+      </p:sp>
+      <p:sp>
+        <p:nvSpPr>
+          <p:cNvPr id="6" name="Rectangle 5"/>
           <p:cNvSpPr/>
           <p:nvPr/>
         </p:nvSpPr>
         <p:spPr>
           <a:xfrm>
-            <a:off x="365760" y="4873751"/>
-            <a:ext cx="5577840" cy="685800"/>
+            <a:off x="365760" y="1417320"/>
+            <a:ext cx="5394960" cy="2926080"/>
           </a:xfrm>
           <a:prstGeom prst="rect">
             <a:avLst/>
@@ -5868,124 +6152,96 @@
           <a:lstStyle/>
           <a:p>
             <a:pPr algn="ctr"/>
-          </a:p>
-        </p:txBody>
-      </p:sp>
-      <p:sp>
-        <p:nvSpPr>
-          <p:cNvPr id="20" name="TextBox 19"/>
-          <p:cNvSpPr txBox="1"/>
-          <p:nvPr/>
-        </p:nvSpPr>
-        <p:spPr>
-          <a:xfrm>
-            <a:off x="548640" y="4919471"/>
-            <a:ext cx="5212080" cy="301752"/>
-          </a:xfrm>
-          <a:prstGeom prst="rect">
-            <a:avLst/>
-          </a:prstGeom>
-          <a:noFill/>
-        </p:spPr>
-        <p:txBody>
-          <a:bodyPr wrap="square">
-            <a:spAutoFit/>
-          </a:bodyPr>
-          <a:lstStyle/>
-          <a:p>
-            <a:pPr algn="l"/>
-            <a:r>
-              <a:rPr sz="1300" b="1">
-                <a:solidFill>
-                  <a:srgbClr val="FFB800"/>
-                </a:solidFill>
-                <a:latin typeface="Calibri"/>
-              </a:rPr>
-              <a:t>GenAI comparison: NOT DONE</a:t>
-            </a:r>
-          </a:p>
-        </p:txBody>
-      </p:sp>
-      <p:sp>
-        <p:nvSpPr>
-          <p:cNvPr id="21" name="TextBox 20"/>
-          <p:cNvSpPr txBox="1"/>
-          <p:nvPr/>
-        </p:nvSpPr>
-        <p:spPr>
-          <a:xfrm>
-            <a:off x="548640" y="5239511"/>
-            <a:ext cx="5212080" cy="256032"/>
-          </a:xfrm>
-          <a:prstGeom prst="rect">
-            <a:avLst/>
-          </a:prstGeom>
-          <a:noFill/>
-        </p:spPr>
-        <p:txBody>
-          <a:bodyPr wrap="square">
-            <a:spAutoFit/>
-          </a:bodyPr>
-          <a:lstStyle/>
-          <a:p>
-            <a:pPr algn="l"/>
-            <a:r>
-              <a:rPr sz="1200" b="0">
+            <a:endParaRPr/>
+          </a:p>
+        </p:txBody>
+      </p:sp>
+      <p:sp>
+        <p:nvSpPr>
+          <p:cNvPr id="7" name="TextBox 6"/>
+          <p:cNvSpPr txBox="1"/>
+          <p:nvPr/>
+        </p:nvSpPr>
+        <p:spPr>
+          <a:xfrm>
+            <a:off x="548640" y="1508760"/>
+            <a:ext cx="5029200" cy="347472"/>
+          </a:xfrm>
+          <a:prstGeom prst="rect">
+            <a:avLst/>
+          </a:prstGeom>
+          <a:noFill/>
+        </p:spPr>
+        <p:txBody>
+          <a:bodyPr wrap="square">
+            <a:spAutoFit/>
+          </a:bodyPr>
+          <a:lstStyle/>
+          <a:p>
+            <a:pPr algn="l"/>
+            <a:r>
+              <a:rPr sz="1500" b="1">
+                <a:solidFill>
+                  <a:srgbClr val="FF4D4D"/>
+                </a:solidFill>
+                <a:latin typeface="Calibri"/>
+              </a:rPr>
+              <a:t>At threshold = 0.5  (sklearn default)</a:t>
+            </a:r>
+          </a:p>
+        </p:txBody>
+      </p:sp>
+      <p:sp>
+        <p:nvSpPr>
+          <p:cNvPr id="8" name="TextBox 7"/>
+          <p:cNvSpPr txBox="1"/>
+          <p:nvPr/>
+        </p:nvSpPr>
+        <p:spPr>
+          <a:xfrm>
+            <a:off x="548640" y="1920240"/>
+            <a:ext cx="5029200" cy="2286000"/>
+          </a:xfrm>
+          <a:prstGeom prst="rect">
+            <a:avLst/>
+          </a:prstGeom>
+          <a:noFill/>
+        </p:spPr>
+        <p:txBody>
+          <a:bodyPr wrap="square">
+            <a:spAutoFit/>
+          </a:bodyPr>
+          <a:lstStyle/>
+          <a:p>
+            <a:pPr algn="l"/>
+            <a:r>
+              <a:rPr sz="1400" b="0">
                 <a:solidFill>
                   <a:srgbClr val="9CA3AF"/>
                 </a:solidFill>
                 <a:latin typeface="Calibri"/>
               </a:rPr>
-              <a:t>Extra credit not claimed</a:t>
-            </a:r>
-          </a:p>
-        </p:txBody>
-      </p:sp>
-      <p:sp>
-        <p:nvSpPr>
-          <p:cNvPr id="22" name="TextBox 21"/>
-          <p:cNvSpPr txBox="1"/>
+              <a:t>Predicted positives:  ≈ 0
+True positives:        ≈ 0
+False positives:       ≈ 0
+False negatives:       ≈ ALL 119 test attacks
+The model looks broken. It isn't.
+It ranks positives correctly — 0.5 is just too high
+a cutoff for a 0.004% positive rate.</a:t>
+            </a:r>
+          </a:p>
+        </p:txBody>
+      </p:sp>
+      <p:sp>
+        <p:nvSpPr>
+          <p:cNvPr id="9" name="Rectangle 8"/>
+          <p:cNvSpPr/>
           <p:nvPr/>
         </p:nvSpPr>
         <p:spPr>
           <a:xfrm>
             <a:off x="6217920" y="1417320"/>
-            <a:ext cx="5577840" cy="365760"/>
-          </a:xfrm>
-          <a:prstGeom prst="rect">
-            <a:avLst/>
-          </a:prstGeom>
-          <a:noFill/>
-        </p:spPr>
-        <p:txBody>
-          <a:bodyPr wrap="square">
-            <a:spAutoFit/>
-          </a:bodyPr>
-          <a:lstStyle/>
-          <a:p>
-            <a:pPr algn="l"/>
-            <a:r>
-              <a:rPr sz="1600" b="1">
-                <a:solidFill>
-                  <a:srgbClr val="00D48A"/>
-                </a:solidFill>
-                <a:latin typeface="Calibri"/>
-              </a:rPr>
-              <a:t>Stakeholder Recommendation</a:t>
-            </a:r>
-          </a:p>
-        </p:txBody>
-      </p:sp>
-      <p:sp>
-        <p:nvSpPr>
-          <p:cNvPr id="23" name="Rectangle 22"/>
-          <p:cNvSpPr/>
-          <p:nvPr/>
-        </p:nvSpPr>
-        <p:spPr>
-          <a:xfrm>
-            <a:off x="6217920" y="1874519"/>
-            <a:ext cx="5577840" cy="685800"/>
+            <a:ext cx="5577840" cy="2926080"/>
           </a:xfrm>
           <a:prstGeom prst="rect">
             <a:avLst/>
@@ -6016,89 +6272,96 @@
           <a:lstStyle/>
           <a:p>
             <a:pPr algn="ctr"/>
-          </a:p>
-        </p:txBody>
-      </p:sp>
-      <p:sp>
-        <p:nvSpPr>
-          <p:cNvPr id="24" name="TextBox 23"/>
-          <p:cNvSpPr txBox="1"/>
-          <p:nvPr/>
-        </p:nvSpPr>
-        <p:spPr>
-          <a:xfrm>
-            <a:off x="6400800" y="1920239"/>
-            <a:ext cx="5212080" cy="301752"/>
-          </a:xfrm>
-          <a:prstGeom prst="rect">
-            <a:avLst/>
-          </a:prstGeom>
-          <a:noFill/>
-        </p:spPr>
-        <p:txBody>
-          <a:bodyPr wrap="square">
-            <a:spAutoFit/>
-          </a:bodyPr>
-          <a:lstStyle/>
-          <a:p>
-            <a:pPr algn="l"/>
-            <a:r>
-              <a:rPr sz="1300" b="1">
+            <a:endParaRPr/>
+          </a:p>
+        </p:txBody>
+      </p:sp>
+      <p:sp>
+        <p:nvSpPr>
+          <p:cNvPr id="10" name="TextBox 9"/>
+          <p:cNvSpPr txBox="1"/>
+          <p:nvPr/>
+        </p:nvSpPr>
+        <p:spPr>
+          <a:xfrm>
+            <a:off x="6400800" y="1508760"/>
+            <a:ext cx="5212080" cy="347472"/>
+          </a:xfrm>
+          <a:prstGeom prst="rect">
+            <a:avLst/>
+          </a:prstGeom>
+          <a:noFill/>
+        </p:spPr>
+        <p:txBody>
+          <a:bodyPr wrap="square">
+            <a:spAutoFit/>
+          </a:bodyPr>
+          <a:lstStyle/>
+          <a:p>
+            <a:pPr algn="l"/>
+            <a:r>
+              <a:rPr sz="1500" b="1">
                 <a:solidFill>
                   <a:srgbClr val="00D48A"/>
                 </a:solidFill>
                 <a:latin typeface="Calibri"/>
               </a:rPr>
-              <a:t>Deploy LightGBM at cost-optimal threshold</a:t>
-            </a:r>
-          </a:p>
-        </p:txBody>
-      </p:sp>
-      <p:sp>
-        <p:nvSpPr>
-          <p:cNvPr id="25" name="TextBox 24"/>
-          <p:cNvSpPr txBox="1"/>
-          <p:nvPr/>
-        </p:nvSpPr>
-        <p:spPr>
-          <a:xfrm>
-            <a:off x="6400800" y="2240279"/>
-            <a:ext cx="5212080" cy="256032"/>
-          </a:xfrm>
-          <a:prstGeom prst="rect">
-            <a:avLst/>
-          </a:prstGeom>
-          <a:noFill/>
-        </p:spPr>
-        <p:txBody>
-          <a:bodyPr wrap="square">
-            <a:spAutoFit/>
-          </a:bodyPr>
-          <a:lstStyle/>
-          <a:p>
-            <a:pPr algn="l"/>
-            <a:r>
-              <a:rPr sz="1200" b="0">
+              <a:t>At cost-optimal threshold = 0.10</a:t>
+            </a:r>
+          </a:p>
+        </p:txBody>
+      </p:sp>
+      <p:sp>
+        <p:nvSpPr>
+          <p:cNvPr id="11" name="TextBox 10"/>
+          <p:cNvSpPr txBox="1"/>
+          <p:nvPr/>
+        </p:nvSpPr>
+        <p:spPr>
+          <a:xfrm>
+            <a:off x="6400800" y="1920240"/>
+            <a:ext cx="5212080" cy="2286000"/>
+          </a:xfrm>
+          <a:prstGeom prst="rect">
+            <a:avLst/>
+          </a:prstGeom>
+          <a:noFill/>
+        </p:spPr>
+        <p:txBody>
+          <a:bodyPr wrap="square">
+            <a:spAutoFit/>
+          </a:bodyPr>
+          <a:lstStyle/>
+          <a:p>
+            <a:pPr algn="l"/>
+            <a:r>
+              <a:rPr sz="1400" b="0">
                 <a:solidFill>
                   <a:srgbClr val="9CA3AF"/>
                 </a:solidFill>
                 <a:latin typeface="Calibri"/>
               </a:rPr>
-              <a:t>Set threshold via the cost-matrix calculator using your actual FP/FN costs</a:t>
-            </a:r>
-          </a:p>
-        </p:txBody>
-      </p:sp>
-      <p:sp>
-        <p:nvSpPr>
-          <p:cNvPr id="26" name="Rectangle 25"/>
+              <a:t>Predicted positives:  controlled volume
+True positives:        meaningful recall
+False positives:       manageable noise
+False negatives:       minimized given costs
+Same model. Same predictions.
+Different operating point — tuned to your
+actual FP/FN cost ratio.</a:t>
+            </a:r>
+          </a:p>
+        </p:txBody>
+      </p:sp>
+      <p:sp>
+        <p:nvSpPr>
+          <p:cNvPr id="12" name="Rectangle 11"/>
           <p:cNvSpPr/>
           <p:nvPr/>
         </p:nvSpPr>
         <p:spPr>
           <a:xfrm>
-            <a:off x="6217920" y="2624327"/>
-            <a:ext cx="5577840" cy="685800"/>
+            <a:off x="365760" y="4526280"/>
+            <a:ext cx="11430000" cy="1188720"/>
           </a:xfrm>
           <a:prstGeom prst="rect">
             <a:avLst/>
@@ -6129,89 +6392,82 @@
           <a:lstStyle/>
           <a:p>
             <a:pPr algn="ctr"/>
-          </a:p>
-        </p:txBody>
-      </p:sp>
-      <p:sp>
-        <p:nvSpPr>
-          <p:cNvPr id="27" name="TextBox 26"/>
-          <p:cNvSpPr txBox="1"/>
-          <p:nvPr/>
-        </p:nvSpPr>
-        <p:spPr>
-          <a:xfrm>
-            <a:off x="6400800" y="2670047"/>
-            <a:ext cx="5212080" cy="301752"/>
-          </a:xfrm>
-          <a:prstGeom prst="rect">
-            <a:avLst/>
-          </a:prstGeom>
-          <a:noFill/>
-        </p:spPr>
-        <p:txBody>
-          <a:bodyPr wrap="square">
-            <a:spAutoFit/>
-          </a:bodyPr>
-          <a:lstStyle/>
-          <a:p>
-            <a:pPr algn="l"/>
-            <a:r>
-              <a:rPr sz="1300" b="1">
-                <a:solidFill>
-                  <a:srgbClr val="00D48A"/>
-                </a:solidFill>
-                <a:latin typeface="Calibri"/>
-              </a:rPr>
-              <a:t>Pair every alert with its SHAP explanation</a:t>
-            </a:r>
-          </a:p>
-        </p:txBody>
-      </p:sp>
-      <p:sp>
-        <p:nvSpPr>
-          <p:cNvPr id="28" name="TextBox 27"/>
-          <p:cNvSpPr txBox="1"/>
-          <p:nvPr/>
-        </p:nvSpPr>
-        <p:spPr>
-          <a:xfrm>
-            <a:off x="6400800" y="2990087"/>
-            <a:ext cx="5212080" cy="256032"/>
-          </a:xfrm>
-          <a:prstGeom prst="rect">
-            <a:avLst/>
-          </a:prstGeom>
-          <a:noFill/>
-        </p:spPr>
-        <p:txBody>
-          <a:bodyPr wrap="square">
-            <a:spAutoFit/>
-          </a:bodyPr>
-          <a:lstStyle/>
-          <a:p>
-            <a:pPr algn="l"/>
-            <a:r>
-              <a:rPr sz="1200" b="0">
+            <a:endParaRPr/>
+          </a:p>
+        </p:txBody>
+      </p:sp>
+      <p:sp>
+        <p:nvSpPr>
+          <p:cNvPr id="13" name="TextBox 12"/>
+          <p:cNvSpPr txBox="1"/>
+          <p:nvPr/>
+        </p:nvSpPr>
+        <p:spPr>
+          <a:xfrm>
+            <a:off x="548640" y="4617720"/>
+            <a:ext cx="11064240" cy="1005840"/>
+          </a:xfrm>
+          <a:prstGeom prst="rect">
+            <a:avLst/>
+          </a:prstGeom>
+          <a:noFill/>
+        </p:spPr>
+        <p:txBody>
+          <a:bodyPr wrap="square">
+            <a:spAutoFit/>
+          </a:bodyPr>
+          <a:lstStyle/>
+          <a:p>
+            <a:pPr algn="l"/>
+            <a:r>
+              <a:rPr sz="1400" b="0">
                 <a:solidFill>
                   <a:srgbClr val="9CA3AF"/>
                 </a:solidFill>
                 <a:latin typeface="Calibri"/>
               </a:rPr>
-              <a:t>Analysts see WHY the model flagged — not just that it did</a:t>
-            </a:r>
-          </a:p>
-        </p:txBody>
-      </p:sp>
-      <p:sp>
-        <p:nvSpPr>
-          <p:cNvPr id="29" name="Rectangle 28"/>
+              <a:t>The cost-matrix calculator takes cost_fp and cost_fn, sweeps threshold 0.001→0.999,
+computes total_cost = FP × cost_fp + FN × cost_fn at each step on the validation set,
+and returns the threshold with the lowest expected operational cost.</a:t>
+            </a:r>
+          </a:p>
+        </p:txBody>
+      </p:sp>
+    </p:spTree>
+  </p:cSld>
+  <p:clrMapOvr>
+    <a:masterClrMapping/>
+  </p:clrMapOvr>
+</p:sld>
+</file>
+
+<file path=ppt/slides/slide14.xml><?xml version="1.0" encoding="utf-8"?>
+<p:sld xmlns:a="http://schemas.openxmlformats.org/drawingml/2006/main" xmlns:r="http://schemas.openxmlformats.org/officeDocument/2006/relationships" xmlns:p="http://schemas.openxmlformats.org/presentationml/2006/main">
+  <p:cSld>
+    <p:spTree>
+      <p:nvGrpSpPr>
+        <p:cNvPr id="1" name=""/>
+        <p:cNvGrpSpPr/>
+        <p:nvPr/>
+      </p:nvGrpSpPr>
+      <p:grpSpPr>
+        <a:xfrm>
+          <a:off x="0" y="0"/>
+          <a:ext cx="0" cy="0"/>
+          <a:chOff x="0" y="0"/>
+          <a:chExt cx="0" cy="0"/>
+        </a:xfrm>
+      </p:grpSpPr>
+      <p:sp>
+        <p:nvSpPr>
+          <p:cNvPr id="2" name="Rectangle 1"/>
           <p:cNvSpPr/>
           <p:nvPr/>
         </p:nvSpPr>
         <p:spPr>
           <a:xfrm>
-            <a:off x="6217920" y="3374135"/>
-            <a:ext cx="5577840" cy="685800"/>
+            <a:off x="0" y="0"/>
+            <a:ext cx="12188952" cy="1280160"/>
           </a:xfrm>
           <a:prstGeom prst="rect">
             <a:avLst/>
@@ -6242,88 +6498,159 @@
           <a:lstStyle/>
           <a:p>
             <a:pPr algn="ctr"/>
-          </a:p>
-        </p:txBody>
-      </p:sp>
-      <p:sp>
-        <p:nvSpPr>
-          <p:cNvPr id="30" name="TextBox 29"/>
-          <p:cNvSpPr txBox="1"/>
-          <p:nvPr/>
-        </p:nvSpPr>
-        <p:spPr>
-          <a:xfrm>
-            <a:off x="6400800" y="3419855"/>
-            <a:ext cx="5212080" cy="301752"/>
-          </a:xfrm>
-          <a:prstGeom prst="rect">
-            <a:avLst/>
-          </a:prstGeom>
-          <a:noFill/>
-        </p:spPr>
-        <p:txBody>
-          <a:bodyPr wrap="square">
-            <a:spAutoFit/>
-          </a:bodyPr>
-          <a:lstStyle/>
-          <a:p>
-            <a:pPr algn="l"/>
-            <a:r>
-              <a:rPr sz="1300" b="1">
+            <a:endParaRPr/>
+          </a:p>
+        </p:txBody>
+      </p:sp>
+      <p:sp>
+        <p:nvSpPr>
+          <p:cNvPr id="3" name="TextBox 2"/>
+          <p:cNvSpPr txBox="1"/>
+          <p:nvPr/>
+        </p:nvSpPr>
+        <p:spPr>
+          <a:xfrm>
+            <a:off x="457200" y="91440"/>
+            <a:ext cx="10058400" cy="640080"/>
+          </a:xfrm>
+          <a:prstGeom prst="rect">
+            <a:avLst/>
+          </a:prstGeom>
+          <a:noFill/>
+        </p:spPr>
+        <p:txBody>
+          <a:bodyPr wrap="square">
+            <a:spAutoFit/>
+          </a:bodyPr>
+          <a:lstStyle/>
+          <a:p>
+            <a:pPr algn="l"/>
+            <a:r>
+              <a:rPr sz="2800" b="1">
                 <a:solidFill>
                   <a:srgbClr val="00D48A"/>
                 </a:solidFill>
                 <a:latin typeface="Calibri"/>
               </a:rPr>
-              <a:t>Use the counterfactual table as first-line remediation</a:t>
-            </a:r>
-          </a:p>
-        </p:txBody>
-      </p:sp>
-      <p:sp>
-        <p:nvSpPr>
-          <p:cNvPr id="31" name="TextBox 30"/>
-          <p:cNvSpPr txBox="1"/>
-          <p:nvPr/>
-        </p:nvSpPr>
-        <p:spPr>
-          <a:xfrm>
-            <a:off x="6400800" y="3739895"/>
-            <a:ext cx="5212080" cy="256032"/>
-          </a:xfrm>
-          <a:prstGeom prst="rect">
-            <a:avLst/>
-          </a:prstGeom>
-          <a:noFill/>
-        </p:spPr>
-        <p:txBody>
-          <a:bodyPr wrap="square">
-            <a:spAutoFit/>
-          </a:bodyPr>
-          <a:lstStyle/>
-          <a:p>
-            <a:pPr algn="l"/>
-            <a:r>
-              <a:rPr sz="1200" b="0">
+              <a:t>Limitations &amp; Stakeholder Recommendation</a:t>
+            </a:r>
+          </a:p>
+        </p:txBody>
+      </p:sp>
+      <p:sp>
+        <p:nvSpPr>
+          <p:cNvPr id="4" name="TextBox 3"/>
+          <p:cNvSpPr txBox="1"/>
+          <p:nvPr/>
+        </p:nvSpPr>
+        <p:spPr>
+          <a:xfrm>
+            <a:off x="457200" y="731520"/>
+            <a:ext cx="10058400" cy="457200"/>
+          </a:xfrm>
+          <a:prstGeom prst="rect">
+            <a:avLst/>
+          </a:prstGeom>
+          <a:noFill/>
+        </p:spPr>
+        <p:txBody>
+          <a:bodyPr wrap="square">
+            <a:spAutoFit/>
+          </a:bodyPr>
+          <a:lstStyle/>
+          <a:p>
+            <a:pPr algn="l"/>
+            <a:r>
+              <a:rPr sz="1600" b="0">
                 <a:solidFill>
                   <a:srgbClr val="9CA3AF"/>
                 </a:solidFill>
                 <a:latin typeface="Calibri"/>
               </a:rPr>
-              <a:t>'Reduce outbound auth count by 2' is actionable; 'elevated risk' is not</a:t>
-            </a:r>
-          </a:p>
-        </p:txBody>
-      </p:sp>
-      <p:sp>
-        <p:nvSpPr>
-          <p:cNvPr id="32" name="Rectangle 31"/>
+              <a:t>Honest weaknesses + what I'd tell a SOC director</a:t>
+            </a:r>
+          </a:p>
+        </p:txBody>
+      </p:sp>
+      <p:sp>
+        <p:nvSpPr>
+          <p:cNvPr id="5" name="TextBox 4"/>
+          <p:cNvSpPr txBox="1"/>
+          <p:nvPr/>
+        </p:nvSpPr>
+        <p:spPr>
+          <a:xfrm>
+            <a:off x="274320" y="6492240"/>
+            <a:ext cx="10972800" cy="320040"/>
+          </a:xfrm>
+          <a:prstGeom prst="rect">
+            <a:avLst/>
+          </a:prstGeom>
+          <a:noFill/>
+        </p:spPr>
+        <p:txBody>
+          <a:bodyPr wrap="square">
+            <a:spAutoFit/>
+          </a:bodyPr>
+          <a:lstStyle/>
+          <a:p>
+            <a:pPr algn="l"/>
+            <a:r>
+              <a:rPr sz="1100" b="0">
+                <a:solidFill>
+                  <a:srgbClr val="9CA3AF"/>
+                </a:solidFill>
+                <a:latin typeface="Calibri"/>
+              </a:rPr>
+              <a:t>Mark Crisci  |  LANL ML Final Project  |  12/12</a:t>
+            </a:r>
+          </a:p>
+        </p:txBody>
+      </p:sp>
+      <p:sp>
+        <p:nvSpPr>
+          <p:cNvPr id="6" name="TextBox 5"/>
+          <p:cNvSpPr txBox="1"/>
+          <p:nvPr/>
+        </p:nvSpPr>
+        <p:spPr>
+          <a:xfrm>
+            <a:off x="365760" y="1417320"/>
+            <a:ext cx="5486400" cy="365760"/>
+          </a:xfrm>
+          <a:prstGeom prst="rect">
+            <a:avLst/>
+          </a:prstGeom>
+          <a:noFill/>
+        </p:spPr>
+        <p:txBody>
+          <a:bodyPr wrap="square">
+            <a:spAutoFit/>
+          </a:bodyPr>
+          <a:lstStyle/>
+          <a:p>
+            <a:pPr algn="l"/>
+            <a:r>
+              <a:rPr sz="1600" b="1">
+                <a:solidFill>
+                  <a:srgbClr val="FFB800"/>
+                </a:solidFill>
+                <a:latin typeface="Calibri"/>
+              </a:rPr>
+              <a:t>Limitations</a:t>
+            </a:r>
+          </a:p>
+        </p:txBody>
+      </p:sp>
+      <p:sp>
+        <p:nvSpPr>
+          <p:cNvPr id="7" name="Rectangle 6"/>
           <p:cNvSpPr/>
           <p:nvPr/>
         </p:nvSpPr>
         <p:spPr>
           <a:xfrm>
-            <a:off x="6217920" y="4123943"/>
+            <a:off x="365760" y="1874519"/>
             <a:ext cx="5577840" cy="685800"/>
           </a:xfrm>
           <a:prstGeom prst="rect">
@@ -6355,18 +6682,19 @@
           <a:lstStyle/>
           <a:p>
             <a:pPr algn="ctr"/>
-          </a:p>
-        </p:txBody>
-      </p:sp>
-      <p:sp>
-        <p:nvSpPr>
-          <p:cNvPr id="33" name="TextBox 32"/>
-          <p:cNvSpPr txBox="1"/>
-          <p:nvPr/>
-        </p:nvSpPr>
-        <p:spPr>
-          <a:xfrm>
-            <a:off x="6400800" y="4169663"/>
+            <a:endParaRPr/>
+          </a:p>
+        </p:txBody>
+      </p:sp>
+      <p:sp>
+        <p:nvSpPr>
+          <p:cNvPr id="8" name="TextBox 7"/>
+          <p:cNvSpPr txBox="1"/>
+          <p:nvPr/>
+        </p:nvSpPr>
+        <p:spPr>
+          <a:xfrm>
+            <a:off x="548640" y="1920239"/>
             <a:ext cx="5212080" cy="301752"/>
           </a:xfrm>
           <a:prstGeom prst="rect">
@@ -6384,24 +6712,24 @@
             <a:r>
               <a:rPr sz="1300" b="1">
                 <a:solidFill>
-                  <a:srgbClr val="00D48A"/>
-                </a:solidFill>
-                <a:latin typeface="Calibri"/>
-              </a:rPr>
-              <a:t>Add calibration before quoting percentages</a:t>
-            </a:r>
-          </a:p>
-        </p:txBody>
-      </p:sp>
-      <p:sp>
-        <p:nvSpPr>
-          <p:cNvPr id="34" name="TextBox 33"/>
-          <p:cNvSpPr txBox="1"/>
-          <p:nvPr/>
-        </p:nvSpPr>
-        <p:spPr>
-          <a:xfrm>
-            <a:off x="6400800" y="4489703"/>
+                  <a:srgbClr val="FFB800"/>
+                </a:solidFill>
+                <a:latin typeface="Calibri"/>
+              </a:rPr>
+              <a:t>Streaming is simulated</a:t>
+            </a:r>
+          </a:p>
+        </p:txBody>
+      </p:sp>
+      <p:sp>
+        <p:nvSpPr>
+          <p:cNvPr id="9" name="TextBox 8"/>
+          <p:cNvSpPr txBox="1"/>
+          <p:nvPr/>
+        </p:nvSpPr>
+        <p:spPr>
+          <a:xfrm>
+            <a:off x="548640" y="2240279"/>
             <a:ext cx="5212080" cy="256032"/>
           </a:xfrm>
           <a:prstGeom prst="rect">
@@ -6423,20 +6751,20 @@
                 </a:solidFill>
                 <a:latin typeface="Calibri"/>
               </a:rPr>
-              <a:t>Reliability diagrams + Platt scaling before telling a CISO '74.5% chance'</a:t>
-            </a:r>
-          </a:p>
-        </p:txBody>
-      </p:sp>
-      <p:sp>
-        <p:nvSpPr>
-          <p:cNvPr id="35" name="Rectangle 34"/>
+              <a:t>CSV replay at 1 event/sec — not live Kinesis ingest</a:t>
+            </a:r>
+          </a:p>
+        </p:txBody>
+      </p:sp>
+      <p:sp>
+        <p:nvSpPr>
+          <p:cNvPr id="10" name="Rectangle 9"/>
           <p:cNvSpPr/>
           <p:nvPr/>
         </p:nvSpPr>
         <p:spPr>
           <a:xfrm>
-            <a:off x="6217920" y="4873751"/>
+            <a:off x="365760" y="2624327"/>
             <a:ext cx="5577840" cy="685800"/>
           </a:xfrm>
           <a:prstGeom prst="rect">
@@ -6468,6 +6796,954 @@
           <a:lstStyle/>
           <a:p>
             <a:pPr algn="ctr"/>
+            <a:endParaRPr/>
+          </a:p>
+        </p:txBody>
+      </p:sp>
+      <p:sp>
+        <p:nvSpPr>
+          <p:cNvPr id="11" name="TextBox 10"/>
+          <p:cNvSpPr txBox="1"/>
+          <p:nvPr/>
+        </p:nvSpPr>
+        <p:spPr>
+          <a:xfrm>
+            <a:off x="548640" y="2670047"/>
+            <a:ext cx="5212080" cy="301752"/>
+          </a:xfrm>
+          <a:prstGeom prst="rect">
+            <a:avLst/>
+          </a:prstGeom>
+          <a:noFill/>
+        </p:spPr>
+        <p:txBody>
+          <a:bodyPr wrap="square">
+            <a:spAutoFit/>
+          </a:bodyPr>
+          <a:lstStyle/>
+          <a:p>
+            <a:pPr algn="l"/>
+            <a:r>
+              <a:rPr sz="1300" b="1">
+                <a:solidFill>
+                  <a:srgbClr val="FFB800"/>
+                </a:solidFill>
+                <a:latin typeface="Calibri"/>
+              </a:rPr>
+              <a:t>No calibration analysis</a:t>
+            </a:r>
+          </a:p>
+        </p:txBody>
+      </p:sp>
+      <p:sp>
+        <p:nvSpPr>
+          <p:cNvPr id="12" name="TextBox 11"/>
+          <p:cNvSpPr txBox="1"/>
+          <p:nvPr/>
+        </p:nvSpPr>
+        <p:spPr>
+          <a:xfrm>
+            <a:off x="548640" y="2990087"/>
+            <a:ext cx="5212080" cy="256032"/>
+          </a:xfrm>
+          <a:prstGeom prst="rect">
+            <a:avLst/>
+          </a:prstGeom>
+          <a:noFill/>
+        </p:spPr>
+        <p:txBody>
+          <a:bodyPr wrap="square">
+            <a:spAutoFit/>
+          </a:bodyPr>
+          <a:lstStyle/>
+          <a:p>
+            <a:pPr algn="l"/>
+            <a:r>
+              <a:rPr sz="1200" b="0">
+                <a:solidFill>
+                  <a:srgbClr val="9CA3AF"/>
+                </a:solidFill>
+                <a:latin typeface="Calibri"/>
+              </a:rPr>
+              <a:t>Probabilities rank correctly; not verified as true frequencies</a:t>
+            </a:r>
+          </a:p>
+        </p:txBody>
+      </p:sp>
+      <p:sp>
+        <p:nvSpPr>
+          <p:cNvPr id="13" name="Rectangle 12"/>
+          <p:cNvSpPr/>
+          <p:nvPr/>
+        </p:nvSpPr>
+        <p:spPr>
+          <a:xfrm>
+            <a:off x="365760" y="3374135"/>
+            <a:ext cx="5577840" cy="685800"/>
+          </a:xfrm>
+          <a:prstGeom prst="rect">
+            <a:avLst/>
+          </a:prstGeom>
+          <a:solidFill>
+            <a:srgbClr val="1A202C"/>
+          </a:solidFill>
+          <a:ln>
+            <a:noFill/>
+          </a:ln>
+        </p:spPr>
+        <p:style>
+          <a:lnRef idx="1">
+            <a:schemeClr val="accent1"/>
+          </a:lnRef>
+          <a:fillRef idx="3">
+            <a:schemeClr val="accent1"/>
+          </a:fillRef>
+          <a:effectRef idx="2">
+            <a:schemeClr val="accent1"/>
+          </a:effectRef>
+          <a:fontRef idx="minor">
+            <a:schemeClr val="lt1"/>
+          </a:fontRef>
+        </p:style>
+        <p:txBody>
+          <a:bodyPr rtlCol="0" anchor="ctr"/>
+          <a:lstStyle/>
+          <a:p>
+            <a:pPr algn="ctr"/>
+            <a:endParaRPr/>
+          </a:p>
+        </p:txBody>
+      </p:sp>
+      <p:sp>
+        <p:nvSpPr>
+          <p:cNvPr id="14" name="TextBox 13"/>
+          <p:cNvSpPr txBox="1"/>
+          <p:nvPr/>
+        </p:nvSpPr>
+        <p:spPr>
+          <a:xfrm>
+            <a:off x="548640" y="3419855"/>
+            <a:ext cx="5212080" cy="301752"/>
+          </a:xfrm>
+          <a:prstGeom prst="rect">
+            <a:avLst/>
+          </a:prstGeom>
+          <a:noFill/>
+        </p:spPr>
+        <p:txBody>
+          <a:bodyPr wrap="square">
+            <a:spAutoFit/>
+          </a:bodyPr>
+          <a:lstStyle/>
+          <a:p>
+            <a:pPr algn="l"/>
+            <a:r>
+              <a:rPr sz="1300" b="1">
+                <a:solidFill>
+                  <a:srgbClr val="FFB800"/>
+                </a:solidFill>
+                <a:latin typeface="Calibri"/>
+              </a:rPr>
+              <a:t>k-fold not used</a:t>
+            </a:r>
+          </a:p>
+        </p:txBody>
+      </p:sp>
+      <p:sp>
+        <p:nvSpPr>
+          <p:cNvPr id="15" name="TextBox 14"/>
+          <p:cNvSpPr txBox="1"/>
+          <p:nvPr/>
+        </p:nvSpPr>
+        <p:spPr>
+          <a:xfrm>
+            <a:off x="548640" y="3739895"/>
+            <a:ext cx="5212080" cy="256032"/>
+          </a:xfrm>
+          <a:prstGeom prst="rect">
+            <a:avLst/>
+          </a:prstGeom>
+          <a:noFill/>
+        </p:spPr>
+        <p:txBody>
+          <a:bodyPr wrap="square">
+            <a:spAutoFit/>
+          </a:bodyPr>
+          <a:lstStyle/>
+          <a:p>
+            <a:pPr algn="l"/>
+            <a:r>
+              <a:rPr sz="1200" b="0">
+                <a:solidFill>
+                  <a:srgbClr val="9CA3AF"/>
+                </a:solidFill>
+                <a:latin typeface="Calibri"/>
+              </a:rPr>
+              <a:t>Justified by temporal structure; acknowledged as a gap</a:t>
+            </a:r>
+          </a:p>
+        </p:txBody>
+      </p:sp>
+      <p:sp>
+        <p:nvSpPr>
+          <p:cNvPr id="16" name="Rectangle 15"/>
+          <p:cNvSpPr/>
+          <p:nvPr/>
+        </p:nvSpPr>
+        <p:spPr>
+          <a:xfrm>
+            <a:off x="365760" y="4123943"/>
+            <a:ext cx="5577840" cy="685800"/>
+          </a:xfrm>
+          <a:prstGeom prst="rect">
+            <a:avLst/>
+          </a:prstGeom>
+          <a:solidFill>
+            <a:srgbClr val="1A202C"/>
+          </a:solidFill>
+          <a:ln>
+            <a:noFill/>
+          </a:ln>
+        </p:spPr>
+        <p:style>
+          <a:lnRef idx="1">
+            <a:schemeClr val="accent1"/>
+          </a:lnRef>
+          <a:fillRef idx="3">
+            <a:schemeClr val="accent1"/>
+          </a:fillRef>
+          <a:effectRef idx="2">
+            <a:schemeClr val="accent1"/>
+          </a:effectRef>
+          <a:fontRef idx="minor">
+            <a:schemeClr val="lt1"/>
+          </a:fontRef>
+        </p:style>
+        <p:txBody>
+          <a:bodyPr rtlCol="0" anchor="ctr"/>
+          <a:lstStyle/>
+          <a:p>
+            <a:pPr algn="ctr"/>
+            <a:endParaRPr/>
+          </a:p>
+        </p:txBody>
+      </p:sp>
+      <p:sp>
+        <p:nvSpPr>
+          <p:cNvPr id="17" name="TextBox 16"/>
+          <p:cNvSpPr txBox="1"/>
+          <p:nvPr/>
+        </p:nvSpPr>
+        <p:spPr>
+          <a:xfrm>
+            <a:off x="548640" y="4169663"/>
+            <a:ext cx="5212080" cy="301752"/>
+          </a:xfrm>
+          <a:prstGeom prst="rect">
+            <a:avLst/>
+          </a:prstGeom>
+          <a:noFill/>
+        </p:spPr>
+        <p:txBody>
+          <a:bodyPr wrap="square">
+            <a:spAutoFit/>
+          </a:bodyPr>
+          <a:lstStyle/>
+          <a:p>
+            <a:pPr algn="l"/>
+            <a:r>
+              <a:rPr sz="1300" b="1">
+                <a:solidFill>
+                  <a:srgbClr val="FFB800"/>
+                </a:solidFill>
+                <a:latin typeface="Calibri"/>
+              </a:rPr>
+              <a:t>596 positives total</a:t>
+            </a:r>
+          </a:p>
+        </p:txBody>
+      </p:sp>
+      <p:sp>
+        <p:nvSpPr>
+          <p:cNvPr id="18" name="TextBox 17"/>
+          <p:cNvSpPr txBox="1"/>
+          <p:nvPr/>
+        </p:nvSpPr>
+        <p:spPr>
+          <a:xfrm>
+            <a:off x="548640" y="4489703"/>
+            <a:ext cx="5212080" cy="256032"/>
+          </a:xfrm>
+          <a:prstGeom prst="rect">
+            <a:avLst/>
+          </a:prstGeom>
+          <a:noFill/>
+        </p:spPr>
+        <p:txBody>
+          <a:bodyPr wrap="square">
+            <a:spAutoFit/>
+          </a:bodyPr>
+          <a:lstStyle/>
+          <a:p>
+            <a:pPr algn="l"/>
+            <a:r>
+              <a:rPr sz="1200" b="0">
+                <a:solidFill>
+                  <a:srgbClr val="9CA3AF"/>
+                </a:solidFill>
+                <a:latin typeface="Calibri"/>
+              </a:rPr>
+              <a:t>Model generalizes within LANL; external validity unknown</a:t>
+            </a:r>
+          </a:p>
+        </p:txBody>
+      </p:sp>
+      <p:sp>
+        <p:nvSpPr>
+          <p:cNvPr id="19" name="Rectangle 18"/>
+          <p:cNvSpPr/>
+          <p:nvPr/>
+        </p:nvSpPr>
+        <p:spPr>
+          <a:xfrm>
+            <a:off x="365760" y="4873751"/>
+            <a:ext cx="5577840" cy="685800"/>
+          </a:xfrm>
+          <a:prstGeom prst="rect">
+            <a:avLst/>
+          </a:prstGeom>
+          <a:solidFill>
+            <a:srgbClr val="1A202C"/>
+          </a:solidFill>
+          <a:ln>
+            <a:noFill/>
+          </a:ln>
+        </p:spPr>
+        <p:style>
+          <a:lnRef idx="1">
+            <a:schemeClr val="accent1"/>
+          </a:lnRef>
+          <a:fillRef idx="3">
+            <a:schemeClr val="accent1"/>
+          </a:fillRef>
+          <a:effectRef idx="2">
+            <a:schemeClr val="accent1"/>
+          </a:effectRef>
+          <a:fontRef idx="minor">
+            <a:schemeClr val="lt1"/>
+          </a:fontRef>
+        </p:style>
+        <p:txBody>
+          <a:bodyPr rtlCol="0" anchor="ctr"/>
+          <a:lstStyle/>
+          <a:p>
+            <a:pPr algn="ctr"/>
+            <a:endParaRPr/>
+          </a:p>
+        </p:txBody>
+      </p:sp>
+      <p:sp>
+        <p:nvSpPr>
+          <p:cNvPr id="20" name="TextBox 19"/>
+          <p:cNvSpPr txBox="1"/>
+          <p:nvPr/>
+        </p:nvSpPr>
+        <p:spPr>
+          <a:xfrm>
+            <a:off x="548640" y="4919471"/>
+            <a:ext cx="5212080" cy="301752"/>
+          </a:xfrm>
+          <a:prstGeom prst="rect">
+            <a:avLst/>
+          </a:prstGeom>
+          <a:noFill/>
+        </p:spPr>
+        <p:txBody>
+          <a:bodyPr wrap="square">
+            <a:spAutoFit/>
+          </a:bodyPr>
+          <a:lstStyle/>
+          <a:p>
+            <a:pPr algn="l"/>
+            <a:r>
+              <a:rPr sz="1300" b="1">
+                <a:solidFill>
+                  <a:srgbClr val="FFB800"/>
+                </a:solidFill>
+                <a:latin typeface="Calibri"/>
+              </a:rPr>
+              <a:t>GenAI comparison: NOT DONE</a:t>
+            </a:r>
+          </a:p>
+        </p:txBody>
+      </p:sp>
+      <p:sp>
+        <p:nvSpPr>
+          <p:cNvPr id="21" name="TextBox 20"/>
+          <p:cNvSpPr txBox="1"/>
+          <p:nvPr/>
+        </p:nvSpPr>
+        <p:spPr>
+          <a:xfrm>
+            <a:off x="548640" y="5239511"/>
+            <a:ext cx="5212080" cy="256032"/>
+          </a:xfrm>
+          <a:prstGeom prst="rect">
+            <a:avLst/>
+          </a:prstGeom>
+          <a:noFill/>
+        </p:spPr>
+        <p:txBody>
+          <a:bodyPr wrap="square">
+            <a:spAutoFit/>
+          </a:bodyPr>
+          <a:lstStyle/>
+          <a:p>
+            <a:pPr algn="l"/>
+            <a:r>
+              <a:rPr sz="1200" b="0">
+                <a:solidFill>
+                  <a:srgbClr val="9CA3AF"/>
+                </a:solidFill>
+                <a:latin typeface="Calibri"/>
+              </a:rPr>
+              <a:t>Extra credit not claimed</a:t>
+            </a:r>
+          </a:p>
+        </p:txBody>
+      </p:sp>
+      <p:sp>
+        <p:nvSpPr>
+          <p:cNvPr id="22" name="TextBox 21"/>
+          <p:cNvSpPr txBox="1"/>
+          <p:nvPr/>
+        </p:nvSpPr>
+        <p:spPr>
+          <a:xfrm>
+            <a:off x="6217920" y="1417320"/>
+            <a:ext cx="5577840" cy="365760"/>
+          </a:xfrm>
+          <a:prstGeom prst="rect">
+            <a:avLst/>
+          </a:prstGeom>
+          <a:noFill/>
+        </p:spPr>
+        <p:txBody>
+          <a:bodyPr wrap="square">
+            <a:spAutoFit/>
+          </a:bodyPr>
+          <a:lstStyle/>
+          <a:p>
+            <a:pPr algn="l"/>
+            <a:r>
+              <a:rPr sz="1600" b="1">
+                <a:solidFill>
+                  <a:srgbClr val="00D48A"/>
+                </a:solidFill>
+                <a:latin typeface="Calibri"/>
+              </a:rPr>
+              <a:t>Stakeholder Recommendation</a:t>
+            </a:r>
+          </a:p>
+        </p:txBody>
+      </p:sp>
+      <p:sp>
+        <p:nvSpPr>
+          <p:cNvPr id="23" name="Rectangle 22"/>
+          <p:cNvSpPr/>
+          <p:nvPr/>
+        </p:nvSpPr>
+        <p:spPr>
+          <a:xfrm>
+            <a:off x="6217920" y="1874519"/>
+            <a:ext cx="5577840" cy="685800"/>
+          </a:xfrm>
+          <a:prstGeom prst="rect">
+            <a:avLst/>
+          </a:prstGeom>
+          <a:solidFill>
+            <a:srgbClr val="1A202C"/>
+          </a:solidFill>
+          <a:ln>
+            <a:noFill/>
+          </a:ln>
+        </p:spPr>
+        <p:style>
+          <a:lnRef idx="1">
+            <a:schemeClr val="accent1"/>
+          </a:lnRef>
+          <a:fillRef idx="3">
+            <a:schemeClr val="accent1"/>
+          </a:fillRef>
+          <a:effectRef idx="2">
+            <a:schemeClr val="accent1"/>
+          </a:effectRef>
+          <a:fontRef idx="minor">
+            <a:schemeClr val="lt1"/>
+          </a:fontRef>
+        </p:style>
+        <p:txBody>
+          <a:bodyPr rtlCol="0" anchor="ctr"/>
+          <a:lstStyle/>
+          <a:p>
+            <a:pPr algn="ctr"/>
+            <a:endParaRPr/>
+          </a:p>
+        </p:txBody>
+      </p:sp>
+      <p:sp>
+        <p:nvSpPr>
+          <p:cNvPr id="24" name="TextBox 23"/>
+          <p:cNvSpPr txBox="1"/>
+          <p:nvPr/>
+        </p:nvSpPr>
+        <p:spPr>
+          <a:xfrm>
+            <a:off x="6400800" y="1920239"/>
+            <a:ext cx="5212080" cy="301752"/>
+          </a:xfrm>
+          <a:prstGeom prst="rect">
+            <a:avLst/>
+          </a:prstGeom>
+          <a:noFill/>
+        </p:spPr>
+        <p:txBody>
+          <a:bodyPr wrap="square">
+            <a:spAutoFit/>
+          </a:bodyPr>
+          <a:lstStyle/>
+          <a:p>
+            <a:pPr algn="l"/>
+            <a:r>
+              <a:rPr sz="1300" b="1">
+                <a:solidFill>
+                  <a:srgbClr val="00D48A"/>
+                </a:solidFill>
+                <a:latin typeface="Calibri"/>
+              </a:rPr>
+              <a:t>Deploy LightGBM at cost-optimal threshold</a:t>
+            </a:r>
+          </a:p>
+        </p:txBody>
+      </p:sp>
+      <p:sp>
+        <p:nvSpPr>
+          <p:cNvPr id="25" name="TextBox 24"/>
+          <p:cNvSpPr txBox="1"/>
+          <p:nvPr/>
+        </p:nvSpPr>
+        <p:spPr>
+          <a:xfrm>
+            <a:off x="6400800" y="2240279"/>
+            <a:ext cx="5212080" cy="256032"/>
+          </a:xfrm>
+          <a:prstGeom prst="rect">
+            <a:avLst/>
+          </a:prstGeom>
+          <a:noFill/>
+        </p:spPr>
+        <p:txBody>
+          <a:bodyPr wrap="square">
+            <a:spAutoFit/>
+          </a:bodyPr>
+          <a:lstStyle/>
+          <a:p>
+            <a:pPr algn="l"/>
+            <a:r>
+              <a:rPr sz="1200" b="0">
+                <a:solidFill>
+                  <a:srgbClr val="9CA3AF"/>
+                </a:solidFill>
+                <a:latin typeface="Calibri"/>
+              </a:rPr>
+              <a:t>Set threshold via the cost-matrix calculator using your actual FP/FN costs</a:t>
+            </a:r>
+          </a:p>
+        </p:txBody>
+      </p:sp>
+      <p:sp>
+        <p:nvSpPr>
+          <p:cNvPr id="26" name="Rectangle 25"/>
+          <p:cNvSpPr/>
+          <p:nvPr/>
+        </p:nvSpPr>
+        <p:spPr>
+          <a:xfrm>
+            <a:off x="6217920" y="2624327"/>
+            <a:ext cx="5577840" cy="685800"/>
+          </a:xfrm>
+          <a:prstGeom prst="rect">
+            <a:avLst/>
+          </a:prstGeom>
+          <a:solidFill>
+            <a:srgbClr val="1A202C"/>
+          </a:solidFill>
+          <a:ln>
+            <a:noFill/>
+          </a:ln>
+        </p:spPr>
+        <p:style>
+          <a:lnRef idx="1">
+            <a:schemeClr val="accent1"/>
+          </a:lnRef>
+          <a:fillRef idx="3">
+            <a:schemeClr val="accent1"/>
+          </a:fillRef>
+          <a:effectRef idx="2">
+            <a:schemeClr val="accent1"/>
+          </a:effectRef>
+          <a:fontRef idx="minor">
+            <a:schemeClr val="lt1"/>
+          </a:fontRef>
+        </p:style>
+        <p:txBody>
+          <a:bodyPr rtlCol="0" anchor="ctr"/>
+          <a:lstStyle/>
+          <a:p>
+            <a:pPr algn="ctr"/>
+            <a:endParaRPr/>
+          </a:p>
+        </p:txBody>
+      </p:sp>
+      <p:sp>
+        <p:nvSpPr>
+          <p:cNvPr id="27" name="TextBox 26"/>
+          <p:cNvSpPr txBox="1"/>
+          <p:nvPr/>
+        </p:nvSpPr>
+        <p:spPr>
+          <a:xfrm>
+            <a:off x="6400800" y="2670047"/>
+            <a:ext cx="5212080" cy="301752"/>
+          </a:xfrm>
+          <a:prstGeom prst="rect">
+            <a:avLst/>
+          </a:prstGeom>
+          <a:noFill/>
+        </p:spPr>
+        <p:txBody>
+          <a:bodyPr wrap="square">
+            <a:spAutoFit/>
+          </a:bodyPr>
+          <a:lstStyle/>
+          <a:p>
+            <a:pPr algn="l"/>
+            <a:r>
+              <a:rPr sz="1300" b="1">
+                <a:solidFill>
+                  <a:srgbClr val="00D48A"/>
+                </a:solidFill>
+                <a:latin typeface="Calibri"/>
+              </a:rPr>
+              <a:t>Pair every alert with its SHAP explanation</a:t>
+            </a:r>
+          </a:p>
+        </p:txBody>
+      </p:sp>
+      <p:sp>
+        <p:nvSpPr>
+          <p:cNvPr id="28" name="TextBox 27"/>
+          <p:cNvSpPr txBox="1"/>
+          <p:nvPr/>
+        </p:nvSpPr>
+        <p:spPr>
+          <a:xfrm>
+            <a:off x="6400800" y="2990087"/>
+            <a:ext cx="5212080" cy="256032"/>
+          </a:xfrm>
+          <a:prstGeom prst="rect">
+            <a:avLst/>
+          </a:prstGeom>
+          <a:noFill/>
+        </p:spPr>
+        <p:txBody>
+          <a:bodyPr wrap="square">
+            <a:spAutoFit/>
+          </a:bodyPr>
+          <a:lstStyle/>
+          <a:p>
+            <a:pPr algn="l"/>
+            <a:r>
+              <a:rPr sz="1200" b="0">
+                <a:solidFill>
+                  <a:srgbClr val="9CA3AF"/>
+                </a:solidFill>
+                <a:latin typeface="Calibri"/>
+              </a:rPr>
+              <a:t>Analysts see WHY the model flagged — not just that it did</a:t>
+            </a:r>
+          </a:p>
+        </p:txBody>
+      </p:sp>
+      <p:sp>
+        <p:nvSpPr>
+          <p:cNvPr id="29" name="Rectangle 28"/>
+          <p:cNvSpPr/>
+          <p:nvPr/>
+        </p:nvSpPr>
+        <p:spPr>
+          <a:xfrm>
+            <a:off x="6217920" y="3374135"/>
+            <a:ext cx="5577840" cy="685800"/>
+          </a:xfrm>
+          <a:prstGeom prst="rect">
+            <a:avLst/>
+          </a:prstGeom>
+          <a:solidFill>
+            <a:srgbClr val="1A202C"/>
+          </a:solidFill>
+          <a:ln>
+            <a:noFill/>
+          </a:ln>
+        </p:spPr>
+        <p:style>
+          <a:lnRef idx="1">
+            <a:schemeClr val="accent1"/>
+          </a:lnRef>
+          <a:fillRef idx="3">
+            <a:schemeClr val="accent1"/>
+          </a:fillRef>
+          <a:effectRef idx="2">
+            <a:schemeClr val="accent1"/>
+          </a:effectRef>
+          <a:fontRef idx="minor">
+            <a:schemeClr val="lt1"/>
+          </a:fontRef>
+        </p:style>
+        <p:txBody>
+          <a:bodyPr rtlCol="0" anchor="ctr"/>
+          <a:lstStyle/>
+          <a:p>
+            <a:pPr algn="ctr"/>
+            <a:endParaRPr/>
+          </a:p>
+        </p:txBody>
+      </p:sp>
+      <p:sp>
+        <p:nvSpPr>
+          <p:cNvPr id="30" name="TextBox 29"/>
+          <p:cNvSpPr txBox="1"/>
+          <p:nvPr/>
+        </p:nvSpPr>
+        <p:spPr>
+          <a:xfrm>
+            <a:off x="6400800" y="3419855"/>
+            <a:ext cx="5212080" cy="301752"/>
+          </a:xfrm>
+          <a:prstGeom prst="rect">
+            <a:avLst/>
+          </a:prstGeom>
+          <a:noFill/>
+        </p:spPr>
+        <p:txBody>
+          <a:bodyPr wrap="square">
+            <a:spAutoFit/>
+          </a:bodyPr>
+          <a:lstStyle/>
+          <a:p>
+            <a:pPr algn="l"/>
+            <a:r>
+              <a:rPr sz="1300" b="1">
+                <a:solidFill>
+                  <a:srgbClr val="00D48A"/>
+                </a:solidFill>
+                <a:latin typeface="Calibri"/>
+              </a:rPr>
+              <a:t>Use the counterfactual table as first-line remediation</a:t>
+            </a:r>
+          </a:p>
+        </p:txBody>
+      </p:sp>
+      <p:sp>
+        <p:nvSpPr>
+          <p:cNvPr id="31" name="TextBox 30"/>
+          <p:cNvSpPr txBox="1"/>
+          <p:nvPr/>
+        </p:nvSpPr>
+        <p:spPr>
+          <a:xfrm>
+            <a:off x="6400800" y="3739895"/>
+            <a:ext cx="5212080" cy="256032"/>
+          </a:xfrm>
+          <a:prstGeom prst="rect">
+            <a:avLst/>
+          </a:prstGeom>
+          <a:noFill/>
+        </p:spPr>
+        <p:txBody>
+          <a:bodyPr wrap="square">
+            <a:spAutoFit/>
+          </a:bodyPr>
+          <a:lstStyle/>
+          <a:p>
+            <a:pPr algn="l"/>
+            <a:r>
+              <a:rPr sz="1200" b="0">
+                <a:solidFill>
+                  <a:srgbClr val="9CA3AF"/>
+                </a:solidFill>
+                <a:latin typeface="Calibri"/>
+              </a:rPr>
+              <a:t>'Reduce outbound auth count by 2' is actionable; 'elevated risk' is not</a:t>
+            </a:r>
+          </a:p>
+        </p:txBody>
+      </p:sp>
+      <p:sp>
+        <p:nvSpPr>
+          <p:cNvPr id="32" name="Rectangle 31"/>
+          <p:cNvSpPr/>
+          <p:nvPr/>
+        </p:nvSpPr>
+        <p:spPr>
+          <a:xfrm>
+            <a:off x="6217920" y="4123943"/>
+            <a:ext cx="5577840" cy="685800"/>
+          </a:xfrm>
+          <a:prstGeom prst="rect">
+            <a:avLst/>
+          </a:prstGeom>
+          <a:solidFill>
+            <a:srgbClr val="1A202C"/>
+          </a:solidFill>
+          <a:ln>
+            <a:noFill/>
+          </a:ln>
+        </p:spPr>
+        <p:style>
+          <a:lnRef idx="1">
+            <a:schemeClr val="accent1"/>
+          </a:lnRef>
+          <a:fillRef idx="3">
+            <a:schemeClr val="accent1"/>
+          </a:fillRef>
+          <a:effectRef idx="2">
+            <a:schemeClr val="accent1"/>
+          </a:effectRef>
+          <a:fontRef idx="minor">
+            <a:schemeClr val="lt1"/>
+          </a:fontRef>
+        </p:style>
+        <p:txBody>
+          <a:bodyPr rtlCol="0" anchor="ctr"/>
+          <a:lstStyle/>
+          <a:p>
+            <a:pPr algn="ctr"/>
+            <a:endParaRPr/>
+          </a:p>
+        </p:txBody>
+      </p:sp>
+      <p:sp>
+        <p:nvSpPr>
+          <p:cNvPr id="33" name="TextBox 32"/>
+          <p:cNvSpPr txBox="1"/>
+          <p:nvPr/>
+        </p:nvSpPr>
+        <p:spPr>
+          <a:xfrm>
+            <a:off x="6400800" y="4169663"/>
+            <a:ext cx="5212080" cy="301752"/>
+          </a:xfrm>
+          <a:prstGeom prst="rect">
+            <a:avLst/>
+          </a:prstGeom>
+          <a:noFill/>
+        </p:spPr>
+        <p:txBody>
+          <a:bodyPr wrap="square">
+            <a:spAutoFit/>
+          </a:bodyPr>
+          <a:lstStyle/>
+          <a:p>
+            <a:pPr algn="l"/>
+            <a:r>
+              <a:rPr sz="1300" b="1">
+                <a:solidFill>
+                  <a:srgbClr val="00D48A"/>
+                </a:solidFill>
+                <a:latin typeface="Calibri"/>
+              </a:rPr>
+              <a:t>Add calibration before quoting percentages</a:t>
+            </a:r>
+          </a:p>
+        </p:txBody>
+      </p:sp>
+      <p:sp>
+        <p:nvSpPr>
+          <p:cNvPr id="34" name="TextBox 33"/>
+          <p:cNvSpPr txBox="1"/>
+          <p:nvPr/>
+        </p:nvSpPr>
+        <p:spPr>
+          <a:xfrm>
+            <a:off x="6400800" y="4489703"/>
+            <a:ext cx="5212080" cy="256032"/>
+          </a:xfrm>
+          <a:prstGeom prst="rect">
+            <a:avLst/>
+          </a:prstGeom>
+          <a:noFill/>
+        </p:spPr>
+        <p:txBody>
+          <a:bodyPr wrap="square">
+            <a:spAutoFit/>
+          </a:bodyPr>
+          <a:lstStyle/>
+          <a:p>
+            <a:pPr algn="l"/>
+            <a:r>
+              <a:rPr sz="1200" b="0">
+                <a:solidFill>
+                  <a:srgbClr val="9CA3AF"/>
+                </a:solidFill>
+                <a:latin typeface="Calibri"/>
+              </a:rPr>
+              <a:t>Reliability diagrams + Platt scaling before telling a CISO '74.5% chance'</a:t>
+            </a:r>
+          </a:p>
+        </p:txBody>
+      </p:sp>
+      <p:sp>
+        <p:nvSpPr>
+          <p:cNvPr id="35" name="Rectangle 34"/>
+          <p:cNvSpPr/>
+          <p:nvPr/>
+        </p:nvSpPr>
+        <p:spPr>
+          <a:xfrm>
+            <a:off x="6217920" y="4873751"/>
+            <a:ext cx="5577840" cy="685800"/>
+          </a:xfrm>
+          <a:prstGeom prst="rect">
+            <a:avLst/>
+          </a:prstGeom>
+          <a:solidFill>
+            <a:srgbClr val="1A202C"/>
+          </a:solidFill>
+          <a:ln>
+            <a:noFill/>
+          </a:ln>
+        </p:spPr>
+        <p:style>
+          <a:lnRef idx="1">
+            <a:schemeClr val="accent1"/>
+          </a:lnRef>
+          <a:fillRef idx="3">
+            <a:schemeClr val="accent1"/>
+          </a:fillRef>
+          <a:effectRef idx="2">
+            <a:schemeClr val="accent1"/>
+          </a:effectRef>
+          <a:fontRef idx="minor">
+            <a:schemeClr val="lt1"/>
+          </a:fontRef>
+        </p:style>
+        <p:txBody>
+          <a:bodyPr rtlCol="0" anchor="ctr"/>
+          <a:lstStyle/>
+          <a:p>
+            <a:pPr algn="ctr"/>
+            <a:endParaRPr/>
           </a:p>
         </p:txBody>
       </p:sp>
@@ -6550,23 +7826,22 @@
 </file>
 
 <file path=ppt/slides/slide2.xml><?xml version="1.0" encoding="utf-8"?>
-<p:sld xmlns:a="http://schemas.openxmlformats.org/drawingml/2006/main" xmlns:p="http://schemas.openxmlformats.org/presentationml/2006/main" xmlns:r="http://schemas.openxmlformats.org/officeDocument/2006/relationships">
+<p:sld xmlns:a="http://schemas.openxmlformats.org/drawingml/2006/main" xmlns:r="http://schemas.openxmlformats.org/officeDocument/2006/relationships" xmlns:p="http://schemas.openxmlformats.org/presentationml/2006/main">
   <p:cSld>
-    <p:bg>
-      <p:bgPr>
-        <a:solidFill>
-          <a:srgbClr val="0D1117"/>
-        </a:solidFill>
-        <a:effectLst/>
-      </p:bgPr>
-    </p:bg>
     <p:spTree>
       <p:nvGrpSpPr>
         <p:cNvPr id="1" name=""/>
         <p:cNvGrpSpPr/>
         <p:nvPr/>
       </p:nvGrpSpPr>
-      <p:grpSpPr/>
+      <p:grpSpPr>
+        <a:xfrm>
+          <a:off x="0" y="0"/>
+          <a:ext cx="0" cy="0"/>
+          <a:chOff x="0" y="0"/>
+          <a:chExt cx="0" cy="0"/>
+        </a:xfrm>
+      </p:grpSpPr>
       <p:sp>
         <p:nvSpPr>
           <p:cNvPr id="2" name="Rectangle 1"/>
@@ -6607,6 +7882,7 @@
           <a:lstStyle/>
           <a:p>
             <a:pPr algn="ctr"/>
+            <a:endParaRPr/>
           </a:p>
         </p:txBody>
       </p:sp>
@@ -6755,6 +8031,7 @@
           <a:lstStyle/>
           <a:p>
             <a:pPr algn="ctr"/>
+            <a:endParaRPr/>
           </a:p>
         </p:txBody>
       </p:sp>
@@ -6833,6 +8110,7 @@
           <a:lstStyle/>
           <a:p>
             <a:pPr algn="ctr"/>
+            <a:endParaRPr/>
           </a:p>
         </p:txBody>
       </p:sp>
@@ -6946,6 +8224,7 @@
           <a:lstStyle/>
           <a:p>
             <a:pPr algn="ctr"/>
+            <a:endParaRPr/>
           </a:p>
         </p:txBody>
       </p:sp>
@@ -7059,6 +8338,7 @@
           <a:lstStyle/>
           <a:p>
             <a:pPr algn="ctr"/>
+            <a:endParaRPr/>
           </a:p>
         </p:txBody>
       </p:sp>
@@ -7172,6 +8452,7 @@
           <a:lstStyle/>
           <a:p>
             <a:pPr algn="ctr"/>
+            <a:endParaRPr/>
           </a:p>
         </p:txBody>
       </p:sp>
@@ -7254,23 +8535,22 @@
 </file>
 
 <file path=ppt/slides/slide3.xml><?xml version="1.0" encoding="utf-8"?>
-<p:sld xmlns:a="http://schemas.openxmlformats.org/drawingml/2006/main" xmlns:p="http://schemas.openxmlformats.org/presentationml/2006/main" xmlns:r="http://schemas.openxmlformats.org/officeDocument/2006/relationships">
+<p:sld xmlns:a="http://schemas.openxmlformats.org/drawingml/2006/main" xmlns:r="http://schemas.openxmlformats.org/officeDocument/2006/relationships" xmlns:p="http://schemas.openxmlformats.org/presentationml/2006/main">
   <p:cSld>
-    <p:bg>
-      <p:bgPr>
-        <a:solidFill>
-          <a:srgbClr val="0D1117"/>
-        </a:solidFill>
-        <a:effectLst/>
-      </p:bgPr>
-    </p:bg>
     <p:spTree>
       <p:nvGrpSpPr>
         <p:cNvPr id="1" name=""/>
         <p:cNvGrpSpPr/>
         <p:nvPr/>
       </p:nvGrpSpPr>
-      <p:grpSpPr/>
+      <p:grpSpPr>
+        <a:xfrm>
+          <a:off x="0" y="0"/>
+          <a:ext cx="0" cy="0"/>
+          <a:chOff x="0" y="0"/>
+          <a:chExt cx="0" cy="0"/>
+        </a:xfrm>
+      </p:grpSpPr>
       <p:sp>
         <p:nvSpPr>
           <p:cNvPr id="2" name="Rectangle 1"/>
@@ -7311,6 +8591,7 @@
           <a:lstStyle/>
           <a:p>
             <a:pPr algn="ctr"/>
+            <a:endParaRPr/>
           </a:p>
         </p:txBody>
       </p:sp>
@@ -7459,6 +8740,7 @@
           <a:lstStyle/>
           <a:p>
             <a:pPr algn="ctr"/>
+            <a:endParaRPr/>
           </a:p>
         </p:txBody>
       </p:sp>
@@ -7607,6 +8889,7 @@
           <a:lstStyle/>
           <a:p>
             <a:pPr algn="ctr"/>
+            <a:endParaRPr/>
           </a:p>
         </p:txBody>
       </p:sp>
@@ -7755,6 +9038,7 @@
           <a:lstStyle/>
           <a:p>
             <a:pPr algn="ctr"/>
+            <a:endParaRPr/>
           </a:p>
         </p:txBody>
       </p:sp>
@@ -7903,6 +9187,7 @@
           <a:lstStyle/>
           <a:p>
             <a:pPr algn="ctr"/>
+            <a:endParaRPr/>
           </a:p>
         </p:txBody>
       </p:sp>
@@ -8051,6 +9336,7 @@
           <a:lstStyle/>
           <a:p>
             <a:pPr algn="ctr"/>
+            <a:endParaRPr/>
           </a:p>
         </p:txBody>
       </p:sp>
@@ -8199,6 +9485,7 @@
           <a:lstStyle/>
           <a:p>
             <a:pPr algn="ctr"/>
+            <a:endParaRPr/>
           </a:p>
         </p:txBody>
       </p:sp>
@@ -8347,6 +9634,7 @@
           <a:lstStyle/>
           <a:p>
             <a:pPr algn="ctr"/>
+            <a:endParaRPr/>
           </a:p>
         </p:txBody>
       </p:sp>
@@ -8495,6 +9783,7 @@
           <a:lstStyle/>
           <a:p>
             <a:pPr algn="ctr"/>
+            <a:endParaRPr/>
           </a:p>
         </p:txBody>
       </p:sp>
@@ -8643,6 +9932,7 @@
           <a:lstStyle/>
           <a:p>
             <a:pPr algn="ctr"/>
+            <a:endParaRPr/>
           </a:p>
         </p:txBody>
       </p:sp>
@@ -8760,23 +10050,22 @@
 </file>
 
 <file path=ppt/slides/slide4.xml><?xml version="1.0" encoding="utf-8"?>
-<p:sld xmlns:a="http://schemas.openxmlformats.org/drawingml/2006/main" xmlns:p="http://schemas.openxmlformats.org/presentationml/2006/main" xmlns:r="http://schemas.openxmlformats.org/officeDocument/2006/relationships">
+<p:sld xmlns:a="http://schemas.openxmlformats.org/drawingml/2006/main" xmlns:r="http://schemas.openxmlformats.org/officeDocument/2006/relationships" xmlns:p="http://schemas.openxmlformats.org/presentationml/2006/main">
   <p:cSld>
-    <p:bg>
-      <p:bgPr>
-        <a:solidFill>
-          <a:srgbClr val="0D1117"/>
-        </a:solidFill>
-        <a:effectLst/>
-      </p:bgPr>
-    </p:bg>
     <p:spTree>
       <p:nvGrpSpPr>
         <p:cNvPr id="1" name=""/>
         <p:cNvGrpSpPr/>
         <p:nvPr/>
       </p:nvGrpSpPr>
-      <p:grpSpPr/>
+      <p:grpSpPr>
+        <a:xfrm>
+          <a:off x="0" y="0"/>
+          <a:ext cx="0" cy="0"/>
+          <a:chOff x="0" y="0"/>
+          <a:chExt cx="0" cy="0"/>
+        </a:xfrm>
+      </p:grpSpPr>
       <p:sp>
         <p:nvSpPr>
           <p:cNvPr id="2" name="Rectangle 1"/>
@@ -8817,6 +10106,7 @@
           <a:lstStyle/>
           <a:p>
             <a:pPr algn="ctr"/>
+            <a:endParaRPr/>
           </a:p>
         </p:txBody>
       </p:sp>
@@ -8965,6 +10255,7 @@
           <a:lstStyle/>
           <a:p>
             <a:pPr algn="ctr"/>
+            <a:endParaRPr/>
           </a:p>
         </p:txBody>
       </p:sp>
@@ -9078,6 +10369,7 @@
           <a:lstStyle/>
           <a:p>
             <a:pPr algn="ctr"/>
+            <a:endParaRPr/>
           </a:p>
         </p:txBody>
       </p:sp>
@@ -9191,6 +10483,7 @@
           <a:lstStyle/>
           <a:p>
             <a:pPr algn="ctr"/>
+            <a:endParaRPr/>
           </a:p>
         </p:txBody>
       </p:sp>
@@ -9304,6 +10597,7 @@
           <a:lstStyle/>
           <a:p>
             <a:pPr algn="ctr"/>
+            <a:endParaRPr/>
           </a:p>
         </p:txBody>
       </p:sp>
@@ -9420,6 +10714,7 @@
           <a:lstStyle/>
           <a:p>
             <a:pPr algn="ctr"/>
+            <a:endParaRPr/>
           </a:p>
         </p:txBody>
       </p:sp>
@@ -9568,6 +10863,7 @@
           <a:lstStyle/>
           <a:p>
             <a:pPr algn="ctr"/>
+            <a:endParaRPr/>
           </a:p>
         </p:txBody>
       </p:sp>
@@ -9716,6 +11012,7 @@
           <a:lstStyle/>
           <a:p>
             <a:pPr algn="ctr"/>
+            <a:endParaRPr/>
           </a:p>
         </p:txBody>
       </p:sp>
@@ -9864,6 +11161,7 @@
           <a:lstStyle/>
           <a:p>
             <a:pPr algn="ctr"/>
+            <a:endParaRPr/>
           </a:p>
         </p:txBody>
       </p:sp>
@@ -10012,6 +11310,7 @@
           <a:lstStyle/>
           <a:p>
             <a:pPr algn="ctr"/>
+            <a:endParaRPr/>
           </a:p>
         </p:txBody>
       </p:sp>
@@ -10164,23 +11463,22 @@
 </file>
 
 <file path=ppt/slides/slide5.xml><?xml version="1.0" encoding="utf-8"?>
-<p:sld xmlns:a="http://schemas.openxmlformats.org/drawingml/2006/main" xmlns:p="http://schemas.openxmlformats.org/presentationml/2006/main" xmlns:r="http://schemas.openxmlformats.org/officeDocument/2006/relationships">
+<p:sld xmlns:a="http://schemas.openxmlformats.org/drawingml/2006/main" xmlns:r="http://schemas.openxmlformats.org/officeDocument/2006/relationships" xmlns:p="http://schemas.openxmlformats.org/presentationml/2006/main">
   <p:cSld>
-    <p:bg>
-      <p:bgPr>
-        <a:solidFill>
-          <a:srgbClr val="0D1117"/>
-        </a:solidFill>
-        <a:effectLst/>
-      </p:bgPr>
-    </p:bg>
     <p:spTree>
       <p:nvGrpSpPr>
         <p:cNvPr id="1" name=""/>
         <p:cNvGrpSpPr/>
         <p:nvPr/>
       </p:nvGrpSpPr>
-      <p:grpSpPr/>
+      <p:grpSpPr>
+        <a:xfrm>
+          <a:off x="0" y="0"/>
+          <a:ext cx="0" cy="0"/>
+          <a:chOff x="0" y="0"/>
+          <a:chExt cx="0" cy="0"/>
+        </a:xfrm>
+      </p:grpSpPr>
       <p:sp>
         <p:nvSpPr>
           <p:cNvPr id="2" name="Rectangle 1"/>
@@ -10221,6 +11519,7 @@
           <a:lstStyle/>
           <a:p>
             <a:pPr algn="ctr"/>
+            <a:endParaRPr/>
           </a:p>
         </p:txBody>
       </p:sp>
@@ -10369,6 +11668,7 @@
           <a:lstStyle/>
           <a:p>
             <a:pPr algn="ctr"/>
+            <a:endParaRPr/>
           </a:p>
         </p:txBody>
       </p:sp>
@@ -10482,6 +11782,7 @@
           <a:lstStyle/>
           <a:p>
             <a:pPr algn="ctr"/>
+            <a:endParaRPr/>
           </a:p>
         </p:txBody>
       </p:sp>
@@ -10595,6 +11896,7 @@
           <a:lstStyle/>
           <a:p>
             <a:pPr algn="ctr"/>
+            <a:endParaRPr/>
           </a:p>
         </p:txBody>
       </p:sp>
@@ -10708,6 +12010,7 @@
           <a:lstStyle/>
           <a:p>
             <a:pPr algn="ctr"/>
+            <a:endParaRPr/>
           </a:p>
         </p:txBody>
       </p:sp>
@@ -10821,6 +12124,7 @@
           <a:lstStyle/>
           <a:p>
             <a:pPr algn="ctr"/>
+            <a:endParaRPr/>
           </a:p>
         </p:txBody>
       </p:sp>
@@ -11043,23 +12347,22 @@
 </file>
 
 <file path=ppt/slides/slide6.xml><?xml version="1.0" encoding="utf-8"?>
-<p:sld xmlns:a="http://schemas.openxmlformats.org/drawingml/2006/main" xmlns:p="http://schemas.openxmlformats.org/presentationml/2006/main" xmlns:r="http://schemas.openxmlformats.org/officeDocument/2006/relationships">
+<p:sld xmlns:a="http://schemas.openxmlformats.org/drawingml/2006/main" xmlns:r="http://schemas.openxmlformats.org/officeDocument/2006/relationships" xmlns:p="http://schemas.openxmlformats.org/presentationml/2006/main">
   <p:cSld>
-    <p:bg>
-      <p:bgPr>
-        <a:solidFill>
-          <a:srgbClr val="0D1117"/>
-        </a:solidFill>
-        <a:effectLst/>
-      </p:bgPr>
-    </p:bg>
     <p:spTree>
       <p:nvGrpSpPr>
         <p:cNvPr id="1" name=""/>
         <p:cNvGrpSpPr/>
         <p:nvPr/>
       </p:nvGrpSpPr>
-      <p:grpSpPr/>
+      <p:grpSpPr>
+        <a:xfrm>
+          <a:off x="0" y="0"/>
+          <a:ext cx="0" cy="0"/>
+          <a:chOff x="0" y="0"/>
+          <a:chExt cx="0" cy="0"/>
+        </a:xfrm>
+      </p:grpSpPr>
       <p:sp>
         <p:nvSpPr>
           <p:cNvPr id="2" name="Rectangle 1"/>
@@ -11100,6 +12403,7 @@
           <a:lstStyle/>
           <a:p>
             <a:pPr algn="ctr"/>
+            <a:endParaRPr/>
           </a:p>
         </p:txBody>
       </p:sp>
@@ -11248,6 +12552,7 @@
           <a:lstStyle/>
           <a:p>
             <a:pPr algn="ctr"/>
+            <a:endParaRPr/>
           </a:p>
         </p:txBody>
       </p:sp>
@@ -11361,6 +12666,7 @@
           <a:lstStyle/>
           <a:p>
             <a:pPr algn="ctr"/>
+            <a:endParaRPr/>
           </a:p>
         </p:txBody>
       </p:sp>
@@ -11474,6 +12780,7 @@
           <a:lstStyle/>
           <a:p>
             <a:pPr algn="ctr"/>
+            <a:endParaRPr/>
           </a:p>
         </p:txBody>
       </p:sp>
@@ -11622,6 +12929,7 @@
           <a:lstStyle/>
           <a:p>
             <a:pPr algn="ctr"/>
+            <a:endParaRPr/>
           </a:p>
         </p:txBody>
       </p:sp>
@@ -11770,6 +13078,7 @@
           <a:lstStyle/>
           <a:p>
             <a:pPr algn="ctr"/>
+            <a:endParaRPr/>
           </a:p>
         </p:txBody>
       </p:sp>
@@ -11953,6 +13262,7 @@
           <a:lstStyle/>
           <a:p>
             <a:pPr algn="ctr"/>
+            <a:endParaRPr/>
           </a:p>
         </p:txBody>
       </p:sp>
@@ -12000,23 +13310,22 @@
 </file>
 
 <file path=ppt/slides/slide7.xml><?xml version="1.0" encoding="utf-8"?>
-<p:sld xmlns:a="http://schemas.openxmlformats.org/drawingml/2006/main" xmlns:p="http://schemas.openxmlformats.org/presentationml/2006/main" xmlns:r="http://schemas.openxmlformats.org/officeDocument/2006/relationships">
+<p:sld xmlns:a="http://schemas.openxmlformats.org/drawingml/2006/main" xmlns:r="http://schemas.openxmlformats.org/officeDocument/2006/relationships" xmlns:p="http://schemas.openxmlformats.org/presentationml/2006/main">
   <p:cSld>
-    <p:bg>
-      <p:bgPr>
-        <a:solidFill>
-          <a:srgbClr val="0D1117"/>
-        </a:solidFill>
-        <a:effectLst/>
-      </p:bgPr>
-    </p:bg>
     <p:spTree>
       <p:nvGrpSpPr>
         <p:cNvPr id="1" name=""/>
         <p:cNvGrpSpPr/>
         <p:nvPr/>
       </p:nvGrpSpPr>
-      <p:grpSpPr/>
+      <p:grpSpPr>
+        <a:xfrm>
+          <a:off x="0" y="0"/>
+          <a:ext cx="0" cy="0"/>
+          <a:chOff x="0" y="0"/>
+          <a:chExt cx="0" cy="0"/>
+        </a:xfrm>
+      </p:grpSpPr>
       <p:sp>
         <p:nvSpPr>
           <p:cNvPr id="2" name="Rectangle 1"/>
@@ -12057,6 +13366,7 @@
           <a:lstStyle/>
           <a:p>
             <a:pPr algn="ctr"/>
+            <a:endParaRPr/>
           </a:p>
         </p:txBody>
       </p:sp>
@@ -12205,6 +13515,7 @@
           <a:lstStyle/>
           <a:p>
             <a:pPr algn="ctr"/>
+            <a:endParaRPr/>
           </a:p>
         </p:txBody>
       </p:sp>
@@ -12353,6 +13664,7 @@
           <a:lstStyle/>
           <a:p>
             <a:pPr algn="ctr"/>
+            <a:endParaRPr/>
           </a:p>
         </p:txBody>
       </p:sp>
@@ -12501,6 +13813,7 @@
           <a:lstStyle/>
           <a:p>
             <a:pPr algn="ctr"/>
+            <a:endParaRPr/>
           </a:p>
         </p:txBody>
       </p:sp>
@@ -12649,6 +13962,7 @@
           <a:lstStyle/>
           <a:p>
             <a:pPr algn="ctr"/>
+            <a:endParaRPr/>
           </a:p>
         </p:txBody>
       </p:sp>
@@ -12797,6 +14111,7 @@
           <a:lstStyle/>
           <a:p>
             <a:pPr algn="ctr"/>
+            <a:endParaRPr/>
           </a:p>
         </p:txBody>
       </p:sp>
@@ -12879,23 +14194,22 @@
 </file>
 
 <file path=ppt/slides/slide8.xml><?xml version="1.0" encoding="utf-8"?>
-<p:sld xmlns:a="http://schemas.openxmlformats.org/drawingml/2006/main" xmlns:p="http://schemas.openxmlformats.org/presentationml/2006/main" xmlns:r="http://schemas.openxmlformats.org/officeDocument/2006/relationships">
+<p:sld xmlns:a="http://schemas.openxmlformats.org/drawingml/2006/main" xmlns:r="http://schemas.openxmlformats.org/officeDocument/2006/relationships" xmlns:p="http://schemas.openxmlformats.org/presentationml/2006/main">
   <p:cSld>
-    <p:bg>
-      <p:bgPr>
-        <a:solidFill>
-          <a:srgbClr val="0D1117"/>
-        </a:solidFill>
-        <a:effectLst/>
-      </p:bgPr>
-    </p:bg>
     <p:spTree>
       <p:nvGrpSpPr>
         <p:cNvPr id="1" name=""/>
         <p:cNvGrpSpPr/>
         <p:nvPr/>
       </p:nvGrpSpPr>
-      <p:grpSpPr/>
+      <p:grpSpPr>
+        <a:xfrm>
+          <a:off x="0" y="0"/>
+          <a:ext cx="0" cy="0"/>
+          <a:chOff x="0" y="0"/>
+          <a:chExt cx="0" cy="0"/>
+        </a:xfrm>
+      </p:grpSpPr>
       <p:sp>
         <p:nvSpPr>
           <p:cNvPr id="2" name="Rectangle 1"/>
@@ -12936,6 +14250,7 @@
           <a:lstStyle/>
           <a:p>
             <a:pPr algn="ctr"/>
+            <a:endParaRPr/>
           </a:p>
         </p:txBody>
       </p:sp>
@@ -13084,6 +14399,7 @@
           <a:lstStyle/>
           <a:p>
             <a:pPr algn="ctr"/>
+            <a:endParaRPr/>
           </a:p>
         </p:txBody>
       </p:sp>
@@ -13162,6 +14478,7 @@
           <a:lstStyle/>
           <a:p>
             <a:pPr algn="ctr"/>
+            <a:endParaRPr/>
           </a:p>
         </p:txBody>
       </p:sp>
@@ -13240,6 +14557,7 @@
           <a:lstStyle/>
           <a:p>
             <a:pPr algn="ctr"/>
+            <a:endParaRPr/>
           </a:p>
         </p:txBody>
       </p:sp>
@@ -13633,6 +14951,7 @@
           <a:lstStyle/>
           <a:p>
             <a:pPr algn="ctr"/>
+            <a:endParaRPr/>
           </a:p>
         </p:txBody>
       </p:sp>
@@ -13720,23 +15039,22 @@
 </file>
 
 <file path=ppt/slides/slide9.xml><?xml version="1.0" encoding="utf-8"?>
-<p:sld xmlns:a="http://schemas.openxmlformats.org/drawingml/2006/main" xmlns:p="http://schemas.openxmlformats.org/presentationml/2006/main" xmlns:r="http://schemas.openxmlformats.org/officeDocument/2006/relationships">
+<p:sld xmlns:a="http://schemas.openxmlformats.org/drawingml/2006/main" xmlns:r="http://schemas.openxmlformats.org/officeDocument/2006/relationships" xmlns:p="http://schemas.openxmlformats.org/presentationml/2006/main">
   <p:cSld>
-    <p:bg>
-      <p:bgPr>
-        <a:solidFill>
-          <a:srgbClr val="0D1117"/>
-        </a:solidFill>
-        <a:effectLst/>
-      </p:bgPr>
-    </p:bg>
     <p:spTree>
       <p:nvGrpSpPr>
         <p:cNvPr id="1" name=""/>
         <p:cNvGrpSpPr/>
         <p:nvPr/>
       </p:nvGrpSpPr>
-      <p:grpSpPr/>
+      <p:grpSpPr>
+        <a:xfrm>
+          <a:off x="0" y="0"/>
+          <a:ext cx="0" cy="0"/>
+          <a:chOff x="0" y="0"/>
+          <a:chExt cx="0" cy="0"/>
+        </a:xfrm>
+      </p:grpSpPr>
       <p:sp>
         <p:nvSpPr>
           <p:cNvPr id="2" name="Rectangle 1"/>
@@ -13777,6 +15095,7 @@
           <a:lstStyle/>
           <a:p>
             <a:pPr algn="ctr"/>
+            <a:endParaRPr/>
           </a:p>
         </p:txBody>
       </p:sp>
@@ -13925,6 +15244,7 @@
           <a:lstStyle/>
           <a:p>
             <a:pPr algn="ctr"/>
+            <a:endParaRPr/>
           </a:p>
         </p:txBody>
       </p:sp>
@@ -14003,6 +15323,7 @@
           <a:lstStyle/>
           <a:p>
             <a:pPr algn="ctr"/>
+            <a:endParaRPr/>
           </a:p>
         </p:txBody>
       </p:sp>
@@ -14081,6 +15402,7 @@
           <a:lstStyle/>
           <a:p>
             <a:pPr algn="ctr"/>
+            <a:endParaRPr/>
           </a:p>
         </p:txBody>
       </p:sp>
@@ -14159,6 +15481,7 @@
           <a:lstStyle/>
           <a:p>
             <a:pPr algn="ctr"/>
+            <a:endParaRPr/>
           </a:p>
         </p:txBody>
       </p:sp>
@@ -14237,6 +15560,7 @@
           <a:lstStyle/>
           <a:p>
             <a:pPr algn="ctr"/>
+            <a:endParaRPr/>
           </a:p>
         </p:txBody>
       </p:sp>
@@ -14315,6 +15639,7 @@
           <a:lstStyle/>
           <a:p>
             <a:pPr algn="ctr"/>
+            <a:endParaRPr/>
           </a:p>
         </p:txBody>
       </p:sp>
@@ -14393,6 +15718,7 @@
           <a:lstStyle/>
           <a:p>
             <a:pPr algn="ctr"/>
+            <a:endParaRPr/>
           </a:p>
         </p:txBody>
       </p:sp>
@@ -14471,6 +15797,7 @@
           <a:lstStyle/>
           <a:p>
             <a:pPr algn="ctr"/>
+            <a:endParaRPr/>
           </a:p>
         </p:txBody>
       </p:sp>
@@ -14549,6 +15876,7 @@
           <a:lstStyle/>
           <a:p>
             <a:pPr algn="ctr"/>
+            <a:endParaRPr/>
           </a:p>
         </p:txBody>
       </p:sp>
@@ -14627,6 +15955,7 @@
           <a:lstStyle/>
           <a:p>
             <a:pPr algn="ctr"/>
+            <a:endParaRPr/>
           </a:p>
         </p:txBody>
       </p:sp>
@@ -14705,6 +16034,7 @@
           <a:lstStyle/>
           <a:p>
             <a:pPr algn="ctr"/>
+            <a:endParaRPr/>
           </a:p>
         </p:txBody>
       </p:sp>
@@ -14783,6 +16113,7 @@
           <a:lstStyle/>
           <a:p>
             <a:pPr algn="ctr"/>
+            <a:endParaRPr/>
           </a:p>
         </p:txBody>
       </p:sp>
@@ -14861,6 +16192,7 @@
           <a:lstStyle/>
           <a:p>
             <a:pPr algn="ctr"/>
+            <a:endParaRPr/>
           </a:p>
         </p:txBody>
       </p:sp>
@@ -14939,6 +16271,7 @@
           <a:lstStyle/>
           <a:p>
             <a:pPr algn="ctr"/>
+            <a:endParaRPr/>
           </a:p>
         </p:txBody>
       </p:sp>
@@ -15017,6 +16350,7 @@
           <a:lstStyle/>
           <a:p>
             <a:pPr algn="ctr"/>
+            <a:endParaRPr/>
           </a:p>
         </p:txBody>
       </p:sp>
@@ -15095,6 +16429,7 @@
           <a:lstStyle/>
           <a:p>
             <a:pPr algn="ctr"/>
+            <a:endParaRPr/>
           </a:p>
         </p:txBody>
       </p:sp>
@@ -15173,6 +16508,7 @@
           <a:lstStyle/>
           <a:p>
             <a:pPr algn="ctr"/>
+            <a:endParaRPr/>
           </a:p>
         </p:txBody>
       </p:sp>
@@ -15251,6 +16587,7 @@
           <a:lstStyle/>
           <a:p>
             <a:pPr algn="ctr"/>
+            <a:endParaRPr/>
           </a:p>
         </p:txBody>
       </p:sp>
@@ -15329,6 +16666,7 @@
           <a:lstStyle/>
           <a:p>
             <a:pPr algn="ctr"/>
+            <a:endParaRPr/>
           </a:p>
         </p:txBody>
       </p:sp>
@@ -15407,6 +16745,7 @@
           <a:lstStyle/>
           <a:p>
             <a:pPr algn="ctr"/>
+            <a:endParaRPr/>
           </a:p>
         </p:txBody>
       </p:sp>
@@ -15485,6 +16824,7 @@
           <a:lstStyle/>
           <a:p>
             <a:pPr algn="ctr"/>
+            <a:endParaRPr/>
           </a:p>
         </p:txBody>
       </p:sp>
@@ -15563,6 +16903,7 @@
           <a:lstStyle/>
           <a:p>
             <a:pPr algn="ctr"/>
+            <a:endParaRPr/>
           </a:p>
         </p:txBody>
       </p:sp>
@@ -15641,6 +16982,7 @@
           <a:lstStyle/>
           <a:p>
             <a:pPr algn="ctr"/>
+            <a:endParaRPr/>
           </a:p>
         </p:txBody>
       </p:sp>
@@ -15719,6 +17061,7 @@
           <a:lstStyle/>
           <a:p>
             <a:pPr algn="ctr"/>
+            <a:endParaRPr/>
           </a:p>
         </p:txBody>
       </p:sp>
@@ -15797,6 +17140,7 @@
           <a:lstStyle/>
           <a:p>
             <a:pPr algn="ctr"/>
+            <a:endParaRPr/>
           </a:p>
         </p:txBody>
       </p:sp>
@@ -15875,6 +17219,7 @@
           <a:lstStyle/>
           <a:p>
             <a:pPr algn="ctr"/>
+            <a:endParaRPr/>
           </a:p>
         </p:txBody>
       </p:sp>
@@ -16023,6 +17368,7 @@
           <a:lstStyle/>
           <a:p>
             <a:pPr algn="ctr"/>
+            <a:endParaRPr/>
           </a:p>
         </p:txBody>
       </p:sp>
@@ -16171,6 +17517,7 @@
           <a:lstStyle/>
           <a:p>
             <a:pPr algn="ctr"/>
+            <a:endParaRPr/>
           </a:p>
         </p:txBody>
       </p:sp>

--- a/presentation_ml_final/LANL_ML_Final_Project_Presentation.pptx
+++ b/presentation_ml_final/LANL_ML_Final_Project_Presentation.pptx
@@ -1114,26 +1114,9 @@
           <a:bodyPr/>
           <a:lstStyle/>
           <a:p>
-            <a:pPr marL="0" marR="0" lvl="0" indent="0" algn="l" defTabSz="914400" rtl="0" eaLnBrk="1" fontAlgn="auto" latinLnBrk="0" hangingPunct="1">
-              <a:lnSpc>
-                <a:spcPct val="100000"/>
-              </a:lnSpc>
-              <a:spcBef>
-                <a:spcPts val="0"/>
-              </a:spcBef>
-              <a:spcAft>
-                <a:spcPts val="0"/>
-              </a:spcAft>
-              <a:buClrTx/>
-              <a:buSzTx/>
-              <a:buFontTx/>
-              <a:buNone/>
-              <a:tabLst/>
-              <a:defRPr/>
-            </a:pPr>
             <a:r>
               <a:rPr lang="en-US" dirty="0"/>
-              <a:t>"Honest limitations: the streaming ingest is simulated, not a real Kinesis consumer. The model's probabilities are good for ranking but not calibrated as true frequencies — we'd want reliability diagrams and Platt scaling before quoting percentages to a CISO. k-fold was not used, for reasons I've explained. The GenAI comparison was not completed. My recommendation: deploy </a:t>
+              <a:t>"Honest limitations: the streaming ingest is simulated, not a real Kinesis consumer. The model's probabilities are good for ranking but not calibrated as true frequencies — we'd want reliability diagrams and Platt scaling before quoting percentages. “The model’s biggest limitation is that this is a rare-event problem with only 596 positives. I used a stratified 60/20/20 split because a strict chronological split left validation and test with too few positives to evaluate, but that means the evaluation is not a perfect forward-in-time deployment simulation. </a:t>
             </a:r>
             <a:r>
               <a:rPr lang="en-US" dirty="0" err="1"/>
@@ -1141,11 +1124,12 @@
             </a:r>
             <a:r>
               <a:rPr lang="en-US" dirty="0"/>
-              <a:t> at the cost-optimal threshold, pair every alert with its SHAP explanation so analysts understand why, and use the counterfactual recommender as the first-line remediation guide. The model doesn't replace analysts — it tells them where to look and why."</a:t>
-            </a:r>
-          </a:p>
-          <a:p>
-            <a:endParaRPr lang="en-US" dirty="0"/>
+              <a:t> performs much better than random and much better than logistic regression, especially on PR-AUC, but the absolute PR-AUC is still low because the positive rate is only about 0.0043%. The confusion matrix also shows that at threshold 0.10, the model catches some attacks but misses many and still creates analyst workload. So I would not frame this as an autonomous attack detector. I would frame it as a SOC triage model that ranks risky host-hours for analyst review. </a:t>
+            </a:r>
+            <a:r>
+              <a:rPr lang="en-US"/>
+              <a:t>Future work would include external validation, probability calibration, stronger temporal validation, sequence/graph features, and threshold tuning based on actual SOC capacity.”</a:t>
+            </a:r>
           </a:p>
         </p:txBody>
       </p:sp>
